--- a/cricket_object_detection/Group27-PMLProject.pptx
+++ b/cricket_object_detection/Group27-PMLProject.pptx
@@ -5,10 +5,10 @@
     <p:sldMasterId id="2147483892" r:id="rId1"/>
   </p:sldMasterIdLst>
   <p:notesMasterIdLst>
-    <p:notesMasterId r:id="rId15"/>
+    <p:notesMasterId r:id="rId13"/>
   </p:notesMasterIdLst>
   <p:handoutMasterIdLst>
-    <p:handoutMasterId r:id="rId16"/>
+    <p:handoutMasterId r:id="rId14"/>
   </p:handoutMasterIdLst>
   <p:sldIdLst>
     <p:sldId id="2561" r:id="rId2"/>
@@ -22,8 +22,6 @@
     <p:sldId id="2576" r:id="rId10"/>
     <p:sldId id="2571" r:id="rId11"/>
     <p:sldId id="2572" r:id="rId12"/>
-    <p:sldId id="2573" r:id="rId13"/>
-    <p:sldId id="2574" r:id="rId14"/>
   </p:sldIdLst>
   <p:sldSz cx="12192000" cy="6858000"/>
   <p:notesSz cx="6858000" cy="9144000"/>
@@ -156,12 +154,6 @@
             <p14:sldId id="2572"/>
           </p14:sldIdLst>
         </p14:section>
-        <p14:section name="References" id="{E0DB6E13-8433-4FF2-8E3A-398F7C6963A0}">
-          <p14:sldIdLst>
-            <p14:sldId id="2573"/>
-            <p14:sldId id="2574"/>
-          </p14:sldIdLst>
-        </p14:section>
       </p14:sectionLst>
     </p:ext>
     <p:ext uri="{EFAFB233-063F-42B5-8137-9DF3F51BA10A}">
@@ -191,2791 +183,6 @@
 </p188:authorLst>
 </file>
 
-<file path=ppt/diagrams/colors1.xml><?xml version="1.0" encoding="utf-8"?>
-<dgm:colorsDef xmlns:dgm="http://schemas.openxmlformats.org/drawingml/2006/diagram" xmlns:a="http://schemas.openxmlformats.org/drawingml/2006/main" uniqueId="urn:microsoft.com/office/officeart/2005/8/colors/accent1_2">
-  <dgm:title val=""/>
-  <dgm:desc val=""/>
-  <dgm:catLst>
-    <dgm:cat type="accent1" pri="11200"/>
-  </dgm:catLst>
-  <dgm:styleLbl name="node0">
-    <dgm:fillClrLst meth="repeat">
-      <a:schemeClr val="accent1"/>
-    </dgm:fillClrLst>
-    <dgm:linClrLst meth="repeat">
-      <a:schemeClr val="lt1"/>
-    </dgm:linClrLst>
-    <dgm:effectClrLst/>
-    <dgm:txLinClrLst/>
-    <dgm:txFillClrLst/>
-    <dgm:txEffectClrLst/>
-  </dgm:styleLbl>
-  <dgm:styleLbl name="alignNode1">
-    <dgm:fillClrLst meth="repeat">
-      <a:schemeClr val="accent1"/>
-    </dgm:fillClrLst>
-    <dgm:linClrLst meth="repeat">
-      <a:schemeClr val="accent1"/>
-    </dgm:linClrLst>
-    <dgm:effectClrLst/>
-    <dgm:txLinClrLst/>
-    <dgm:txFillClrLst/>
-    <dgm:txEffectClrLst/>
-  </dgm:styleLbl>
-  <dgm:styleLbl name="node1">
-    <dgm:fillClrLst meth="repeat">
-      <a:schemeClr val="accent1"/>
-    </dgm:fillClrLst>
-    <dgm:linClrLst meth="repeat">
-      <a:schemeClr val="lt1"/>
-    </dgm:linClrLst>
-    <dgm:effectClrLst/>
-    <dgm:txLinClrLst/>
-    <dgm:txFillClrLst/>
-    <dgm:txEffectClrLst/>
-  </dgm:styleLbl>
-  <dgm:styleLbl name="lnNode1">
-    <dgm:fillClrLst meth="repeat">
-      <a:schemeClr val="accent1"/>
-    </dgm:fillClrLst>
-    <dgm:linClrLst meth="repeat">
-      <a:schemeClr val="lt1"/>
-    </dgm:linClrLst>
-    <dgm:effectClrLst/>
-    <dgm:txLinClrLst/>
-    <dgm:txFillClrLst/>
-    <dgm:txEffectClrLst/>
-  </dgm:styleLbl>
-  <dgm:styleLbl name="vennNode1">
-    <dgm:fillClrLst meth="repeat">
-      <a:schemeClr val="accent1">
-        <a:alpha val="50000"/>
-      </a:schemeClr>
-    </dgm:fillClrLst>
-    <dgm:linClrLst meth="repeat">
-      <a:schemeClr val="lt1"/>
-    </dgm:linClrLst>
-    <dgm:effectClrLst/>
-    <dgm:txLinClrLst/>
-    <dgm:txFillClrLst/>
-    <dgm:txEffectClrLst/>
-  </dgm:styleLbl>
-  <dgm:styleLbl name="node2">
-    <dgm:fillClrLst meth="repeat">
-      <a:schemeClr val="accent1"/>
-    </dgm:fillClrLst>
-    <dgm:linClrLst meth="repeat">
-      <a:schemeClr val="lt1"/>
-    </dgm:linClrLst>
-    <dgm:effectClrLst/>
-    <dgm:txLinClrLst/>
-    <dgm:txFillClrLst/>
-    <dgm:txEffectClrLst/>
-  </dgm:styleLbl>
-  <dgm:styleLbl name="node3">
-    <dgm:fillClrLst meth="repeat">
-      <a:schemeClr val="accent1"/>
-    </dgm:fillClrLst>
-    <dgm:linClrLst meth="repeat">
-      <a:schemeClr val="lt1"/>
-    </dgm:linClrLst>
-    <dgm:effectClrLst/>
-    <dgm:txLinClrLst/>
-    <dgm:txFillClrLst/>
-    <dgm:txEffectClrLst/>
-  </dgm:styleLbl>
-  <dgm:styleLbl name="node4">
-    <dgm:fillClrLst meth="repeat">
-      <a:schemeClr val="accent1"/>
-    </dgm:fillClrLst>
-    <dgm:linClrLst meth="repeat">
-      <a:schemeClr val="lt1"/>
-    </dgm:linClrLst>
-    <dgm:effectClrLst/>
-    <dgm:txLinClrLst/>
-    <dgm:txFillClrLst/>
-    <dgm:txEffectClrLst/>
-  </dgm:styleLbl>
-  <dgm:styleLbl name="fgImgPlace1">
-    <dgm:fillClrLst meth="repeat">
-      <a:schemeClr val="accent1">
-        <a:tint val="50000"/>
-      </a:schemeClr>
-    </dgm:fillClrLst>
-    <dgm:linClrLst meth="repeat">
-      <a:schemeClr val="lt1"/>
-    </dgm:linClrLst>
-    <dgm:effectClrLst/>
-    <dgm:txLinClrLst/>
-    <dgm:txFillClrLst meth="repeat">
-      <a:schemeClr val="lt1"/>
-    </dgm:txFillClrLst>
-    <dgm:txEffectClrLst/>
-  </dgm:styleLbl>
-  <dgm:styleLbl name="alignImgPlace1">
-    <dgm:fillClrLst meth="repeat">
-      <a:schemeClr val="accent1">
-        <a:tint val="50000"/>
-      </a:schemeClr>
-    </dgm:fillClrLst>
-    <dgm:linClrLst meth="repeat">
-      <a:schemeClr val="lt1"/>
-    </dgm:linClrLst>
-    <dgm:effectClrLst/>
-    <dgm:txLinClrLst/>
-    <dgm:txFillClrLst meth="repeat">
-      <a:schemeClr val="lt1"/>
-    </dgm:txFillClrLst>
-    <dgm:txEffectClrLst/>
-  </dgm:styleLbl>
-  <dgm:styleLbl name="bgImgPlace1">
-    <dgm:fillClrLst meth="repeat">
-      <a:schemeClr val="accent1">
-        <a:tint val="50000"/>
-      </a:schemeClr>
-    </dgm:fillClrLst>
-    <dgm:linClrLst meth="repeat">
-      <a:schemeClr val="lt1"/>
-    </dgm:linClrLst>
-    <dgm:effectClrLst/>
-    <dgm:txLinClrLst/>
-    <dgm:txFillClrLst meth="repeat">
-      <a:schemeClr val="lt1"/>
-    </dgm:txFillClrLst>
-    <dgm:txEffectClrLst/>
-  </dgm:styleLbl>
-  <dgm:styleLbl name="sibTrans2D1">
-    <dgm:fillClrLst meth="repeat">
-      <a:schemeClr val="accent1">
-        <a:tint val="60000"/>
-      </a:schemeClr>
-    </dgm:fillClrLst>
-    <dgm:linClrLst meth="repeat">
-      <a:schemeClr val="accent1">
-        <a:tint val="60000"/>
-      </a:schemeClr>
-    </dgm:linClrLst>
-    <dgm:effectClrLst/>
-    <dgm:txLinClrLst/>
-    <dgm:txFillClrLst/>
-    <dgm:txEffectClrLst/>
-  </dgm:styleLbl>
-  <dgm:styleLbl name="fgSibTrans2D1">
-    <dgm:fillClrLst meth="repeat">
-      <a:schemeClr val="accent1">
-        <a:tint val="60000"/>
-      </a:schemeClr>
-    </dgm:fillClrLst>
-    <dgm:linClrLst meth="repeat">
-      <a:schemeClr val="accent1">
-        <a:tint val="60000"/>
-      </a:schemeClr>
-    </dgm:linClrLst>
-    <dgm:effectClrLst/>
-    <dgm:txLinClrLst/>
-    <dgm:txFillClrLst/>
-    <dgm:txEffectClrLst/>
-  </dgm:styleLbl>
-  <dgm:styleLbl name="bgSibTrans2D1">
-    <dgm:fillClrLst meth="repeat">
-      <a:schemeClr val="accent1">
-        <a:tint val="60000"/>
-      </a:schemeClr>
-    </dgm:fillClrLst>
-    <dgm:linClrLst meth="repeat">
-      <a:schemeClr val="accent1">
-        <a:tint val="60000"/>
-      </a:schemeClr>
-    </dgm:linClrLst>
-    <dgm:effectClrLst/>
-    <dgm:txLinClrLst/>
-    <dgm:txFillClrLst/>
-    <dgm:txEffectClrLst/>
-  </dgm:styleLbl>
-  <dgm:styleLbl name="sibTrans1D1">
-    <dgm:fillClrLst meth="repeat">
-      <a:schemeClr val="accent1"/>
-    </dgm:fillClrLst>
-    <dgm:linClrLst meth="repeat">
-      <a:schemeClr val="accent1"/>
-    </dgm:linClrLst>
-    <dgm:effectClrLst/>
-    <dgm:txLinClrLst/>
-    <dgm:txFillClrLst meth="repeat">
-      <a:schemeClr val="tx1"/>
-    </dgm:txFillClrLst>
-    <dgm:txEffectClrLst/>
-  </dgm:styleLbl>
-  <dgm:styleLbl name="callout">
-    <dgm:fillClrLst meth="repeat">
-      <a:schemeClr val="accent1"/>
-    </dgm:fillClrLst>
-    <dgm:linClrLst meth="repeat">
-      <a:schemeClr val="accent1">
-        <a:tint val="50000"/>
-      </a:schemeClr>
-    </dgm:linClrLst>
-    <dgm:effectClrLst/>
-    <dgm:txLinClrLst/>
-    <dgm:txFillClrLst meth="repeat">
-      <a:schemeClr val="tx1"/>
-    </dgm:txFillClrLst>
-    <dgm:txEffectClrLst/>
-  </dgm:styleLbl>
-  <dgm:styleLbl name="asst0">
-    <dgm:fillClrLst meth="repeat">
-      <a:schemeClr val="accent1"/>
-    </dgm:fillClrLst>
-    <dgm:linClrLst meth="repeat">
-      <a:schemeClr val="lt1"/>
-    </dgm:linClrLst>
-    <dgm:effectClrLst/>
-    <dgm:txLinClrLst/>
-    <dgm:txFillClrLst/>
-    <dgm:txEffectClrLst/>
-  </dgm:styleLbl>
-  <dgm:styleLbl name="asst1">
-    <dgm:fillClrLst meth="repeat">
-      <a:schemeClr val="accent1"/>
-    </dgm:fillClrLst>
-    <dgm:linClrLst meth="repeat">
-      <a:schemeClr val="lt1"/>
-    </dgm:linClrLst>
-    <dgm:effectClrLst/>
-    <dgm:txLinClrLst/>
-    <dgm:txFillClrLst/>
-    <dgm:txEffectClrLst/>
-  </dgm:styleLbl>
-  <dgm:styleLbl name="asst2">
-    <dgm:fillClrLst meth="repeat">
-      <a:schemeClr val="accent1"/>
-    </dgm:fillClrLst>
-    <dgm:linClrLst meth="repeat">
-      <a:schemeClr val="lt1"/>
-    </dgm:linClrLst>
-    <dgm:effectClrLst/>
-    <dgm:txLinClrLst/>
-    <dgm:txFillClrLst/>
-    <dgm:txEffectClrLst/>
-  </dgm:styleLbl>
-  <dgm:styleLbl name="asst3">
-    <dgm:fillClrLst meth="repeat">
-      <a:schemeClr val="accent1"/>
-    </dgm:fillClrLst>
-    <dgm:linClrLst meth="repeat">
-      <a:schemeClr val="lt1"/>
-    </dgm:linClrLst>
-    <dgm:effectClrLst/>
-    <dgm:txLinClrLst/>
-    <dgm:txFillClrLst/>
-    <dgm:txEffectClrLst/>
-  </dgm:styleLbl>
-  <dgm:styleLbl name="asst4">
-    <dgm:fillClrLst meth="repeat">
-      <a:schemeClr val="accent1"/>
-    </dgm:fillClrLst>
-    <dgm:linClrLst meth="repeat">
-      <a:schemeClr val="lt1"/>
-    </dgm:linClrLst>
-    <dgm:effectClrLst/>
-    <dgm:txLinClrLst/>
-    <dgm:txFillClrLst/>
-    <dgm:txEffectClrLst/>
-  </dgm:styleLbl>
-  <dgm:styleLbl name="parChTrans2D1">
-    <dgm:fillClrLst meth="repeat">
-      <a:schemeClr val="accent1">
-        <a:tint val="60000"/>
-      </a:schemeClr>
-    </dgm:fillClrLst>
-    <dgm:linClrLst meth="repeat">
-      <a:schemeClr val="accent1">
-        <a:tint val="60000"/>
-      </a:schemeClr>
-    </dgm:linClrLst>
-    <dgm:effectClrLst/>
-    <dgm:txLinClrLst/>
-    <dgm:txFillClrLst meth="repeat">
-      <a:schemeClr val="lt1"/>
-    </dgm:txFillClrLst>
-    <dgm:txEffectClrLst/>
-  </dgm:styleLbl>
-  <dgm:styleLbl name="parChTrans2D2">
-    <dgm:fillClrLst meth="repeat">
-      <a:schemeClr val="accent1"/>
-    </dgm:fillClrLst>
-    <dgm:linClrLst meth="repeat">
-      <a:schemeClr val="accent1"/>
-    </dgm:linClrLst>
-    <dgm:effectClrLst/>
-    <dgm:txLinClrLst/>
-    <dgm:txFillClrLst meth="repeat">
-      <a:schemeClr val="lt1"/>
-    </dgm:txFillClrLst>
-    <dgm:txEffectClrLst/>
-  </dgm:styleLbl>
-  <dgm:styleLbl name="parChTrans2D3">
-    <dgm:fillClrLst meth="repeat">
-      <a:schemeClr val="accent1"/>
-    </dgm:fillClrLst>
-    <dgm:linClrLst meth="repeat">
-      <a:schemeClr val="accent1"/>
-    </dgm:linClrLst>
-    <dgm:effectClrLst/>
-    <dgm:txLinClrLst/>
-    <dgm:txFillClrLst meth="repeat">
-      <a:schemeClr val="lt1"/>
-    </dgm:txFillClrLst>
-    <dgm:txEffectClrLst/>
-  </dgm:styleLbl>
-  <dgm:styleLbl name="parChTrans2D4">
-    <dgm:fillClrLst meth="repeat">
-      <a:schemeClr val="accent1"/>
-    </dgm:fillClrLst>
-    <dgm:linClrLst meth="repeat">
-      <a:schemeClr val="accent1"/>
-    </dgm:linClrLst>
-    <dgm:effectClrLst/>
-    <dgm:txLinClrLst/>
-    <dgm:txFillClrLst meth="repeat">
-      <a:schemeClr val="lt1"/>
-    </dgm:txFillClrLst>
-    <dgm:txEffectClrLst/>
-  </dgm:styleLbl>
-  <dgm:styleLbl name="parChTrans1D1">
-    <dgm:fillClrLst meth="repeat">
-      <a:schemeClr val="accent1"/>
-    </dgm:fillClrLst>
-    <dgm:linClrLst meth="repeat">
-      <a:schemeClr val="accent1">
-        <a:shade val="60000"/>
-      </a:schemeClr>
-    </dgm:linClrLst>
-    <dgm:effectClrLst/>
-    <dgm:txLinClrLst/>
-    <dgm:txFillClrLst meth="repeat">
-      <a:schemeClr val="tx1"/>
-    </dgm:txFillClrLst>
-    <dgm:txEffectClrLst/>
-  </dgm:styleLbl>
-  <dgm:styleLbl name="parChTrans1D2">
-    <dgm:fillClrLst meth="repeat">
-      <a:schemeClr val="accent1"/>
-    </dgm:fillClrLst>
-    <dgm:linClrLst meth="repeat">
-      <a:schemeClr val="accent1">
-        <a:shade val="60000"/>
-      </a:schemeClr>
-    </dgm:linClrLst>
-    <dgm:effectClrLst/>
-    <dgm:txLinClrLst/>
-    <dgm:txFillClrLst meth="repeat">
-      <a:schemeClr val="tx1"/>
-    </dgm:txFillClrLst>
-    <dgm:txEffectClrLst/>
-  </dgm:styleLbl>
-  <dgm:styleLbl name="parChTrans1D3">
-    <dgm:fillClrLst meth="repeat">
-      <a:schemeClr val="accent1"/>
-    </dgm:fillClrLst>
-    <dgm:linClrLst meth="repeat">
-      <a:schemeClr val="accent1">
-        <a:shade val="80000"/>
-      </a:schemeClr>
-    </dgm:linClrLst>
-    <dgm:effectClrLst/>
-    <dgm:txLinClrLst/>
-    <dgm:txFillClrLst meth="repeat">
-      <a:schemeClr val="tx1"/>
-    </dgm:txFillClrLst>
-    <dgm:txEffectClrLst/>
-  </dgm:styleLbl>
-  <dgm:styleLbl name="parChTrans1D4">
-    <dgm:fillClrLst meth="repeat">
-      <a:schemeClr val="accent1"/>
-    </dgm:fillClrLst>
-    <dgm:linClrLst meth="repeat">
-      <a:schemeClr val="accent1">
-        <a:shade val="80000"/>
-      </a:schemeClr>
-    </dgm:linClrLst>
-    <dgm:effectClrLst/>
-    <dgm:txLinClrLst/>
-    <dgm:txFillClrLst meth="repeat">
-      <a:schemeClr val="tx1"/>
-    </dgm:txFillClrLst>
-    <dgm:txEffectClrLst/>
-  </dgm:styleLbl>
-  <dgm:styleLbl name="fgAcc1">
-    <dgm:fillClrLst meth="repeat">
-      <a:schemeClr val="lt1">
-        <a:alpha val="90000"/>
-      </a:schemeClr>
-    </dgm:fillClrLst>
-    <dgm:linClrLst meth="repeat">
-      <a:schemeClr val="accent1"/>
-    </dgm:linClrLst>
-    <dgm:effectClrLst/>
-    <dgm:txLinClrLst/>
-    <dgm:txFillClrLst meth="repeat">
-      <a:schemeClr val="dk1"/>
-    </dgm:txFillClrLst>
-    <dgm:txEffectClrLst/>
-  </dgm:styleLbl>
-  <dgm:styleLbl name="conFgAcc1">
-    <dgm:fillClrLst meth="repeat">
-      <a:schemeClr val="lt1">
-        <a:alpha val="90000"/>
-      </a:schemeClr>
-    </dgm:fillClrLst>
-    <dgm:linClrLst meth="repeat">
-      <a:schemeClr val="accent1"/>
-    </dgm:linClrLst>
-    <dgm:effectClrLst/>
-    <dgm:txLinClrLst/>
-    <dgm:txFillClrLst meth="repeat">
-      <a:schemeClr val="dk1"/>
-    </dgm:txFillClrLst>
-    <dgm:txEffectClrLst/>
-  </dgm:styleLbl>
-  <dgm:styleLbl name="alignAcc1">
-    <dgm:fillClrLst meth="repeat">
-      <a:schemeClr val="lt1">
-        <a:alpha val="90000"/>
-      </a:schemeClr>
-    </dgm:fillClrLst>
-    <dgm:linClrLst meth="repeat">
-      <a:schemeClr val="accent1"/>
-    </dgm:linClrLst>
-    <dgm:effectClrLst/>
-    <dgm:txLinClrLst/>
-    <dgm:txFillClrLst meth="repeat">
-      <a:schemeClr val="dk1"/>
-    </dgm:txFillClrLst>
-    <dgm:txEffectClrLst/>
-  </dgm:styleLbl>
-  <dgm:styleLbl name="trAlignAcc1">
-    <dgm:fillClrLst meth="repeat">
-      <a:schemeClr val="lt1">
-        <a:alpha val="40000"/>
-      </a:schemeClr>
-    </dgm:fillClrLst>
-    <dgm:linClrLst meth="repeat">
-      <a:schemeClr val="accent1"/>
-    </dgm:linClrLst>
-    <dgm:effectClrLst/>
-    <dgm:txLinClrLst/>
-    <dgm:txFillClrLst meth="repeat">
-      <a:schemeClr val="dk1"/>
-    </dgm:txFillClrLst>
-    <dgm:txEffectClrLst/>
-  </dgm:styleLbl>
-  <dgm:styleLbl name="bgAcc1">
-    <dgm:fillClrLst meth="repeat">
-      <a:schemeClr val="lt1">
-        <a:alpha val="90000"/>
-      </a:schemeClr>
-    </dgm:fillClrLst>
-    <dgm:linClrLst meth="repeat">
-      <a:schemeClr val="accent1"/>
-    </dgm:linClrLst>
-    <dgm:effectClrLst/>
-    <dgm:txLinClrLst/>
-    <dgm:txFillClrLst meth="repeat">
-      <a:schemeClr val="dk1"/>
-    </dgm:txFillClrLst>
-    <dgm:txEffectClrLst/>
-  </dgm:styleLbl>
-  <dgm:styleLbl name="solidFgAcc1">
-    <dgm:fillClrLst meth="repeat">
-      <a:schemeClr val="lt1"/>
-    </dgm:fillClrLst>
-    <dgm:linClrLst meth="repeat">
-      <a:schemeClr val="accent1"/>
-    </dgm:linClrLst>
-    <dgm:effectClrLst/>
-    <dgm:txLinClrLst/>
-    <dgm:txFillClrLst meth="repeat">
-      <a:schemeClr val="dk1"/>
-    </dgm:txFillClrLst>
-    <dgm:txEffectClrLst/>
-  </dgm:styleLbl>
-  <dgm:styleLbl name="solidAlignAcc1">
-    <dgm:fillClrLst meth="repeat">
-      <a:schemeClr val="lt1"/>
-    </dgm:fillClrLst>
-    <dgm:linClrLst meth="repeat">
-      <a:schemeClr val="accent1"/>
-    </dgm:linClrLst>
-    <dgm:effectClrLst/>
-    <dgm:txLinClrLst/>
-    <dgm:txFillClrLst meth="repeat">
-      <a:schemeClr val="dk1"/>
-    </dgm:txFillClrLst>
-    <dgm:txEffectClrLst/>
-  </dgm:styleLbl>
-  <dgm:styleLbl name="solidBgAcc1">
-    <dgm:fillClrLst meth="repeat">
-      <a:schemeClr val="lt1"/>
-    </dgm:fillClrLst>
-    <dgm:linClrLst meth="repeat">
-      <a:schemeClr val="accent1"/>
-    </dgm:linClrLst>
-    <dgm:effectClrLst/>
-    <dgm:txLinClrLst/>
-    <dgm:txFillClrLst meth="repeat">
-      <a:schemeClr val="dk1"/>
-    </dgm:txFillClrLst>
-    <dgm:txEffectClrLst/>
-  </dgm:styleLbl>
-  <dgm:styleLbl name="fgAccFollowNode1">
-    <dgm:fillClrLst meth="repeat">
-      <a:schemeClr val="accent1">
-        <a:alpha val="90000"/>
-        <a:tint val="40000"/>
-      </a:schemeClr>
-    </dgm:fillClrLst>
-    <dgm:linClrLst meth="repeat">
-      <a:schemeClr val="accent1">
-        <a:alpha val="90000"/>
-        <a:tint val="40000"/>
-      </a:schemeClr>
-    </dgm:linClrLst>
-    <dgm:effectClrLst/>
-    <dgm:txLinClrLst/>
-    <dgm:txFillClrLst meth="repeat">
-      <a:schemeClr val="dk1"/>
-    </dgm:txFillClrLst>
-    <dgm:txEffectClrLst/>
-  </dgm:styleLbl>
-  <dgm:styleLbl name="alignAccFollowNode1">
-    <dgm:fillClrLst meth="repeat">
-      <a:schemeClr val="accent1">
-        <a:alpha val="90000"/>
-        <a:tint val="40000"/>
-      </a:schemeClr>
-    </dgm:fillClrLst>
-    <dgm:linClrLst meth="repeat">
-      <a:schemeClr val="accent1">
-        <a:alpha val="90000"/>
-        <a:tint val="40000"/>
-      </a:schemeClr>
-    </dgm:linClrLst>
-    <dgm:effectClrLst/>
-    <dgm:txLinClrLst/>
-    <dgm:txFillClrLst meth="repeat">
-      <a:schemeClr val="dk1"/>
-    </dgm:txFillClrLst>
-    <dgm:txEffectClrLst/>
-  </dgm:styleLbl>
-  <dgm:styleLbl name="bgAccFollowNode1">
-    <dgm:fillClrLst meth="repeat">
-      <a:schemeClr val="accent1">
-        <a:alpha val="90000"/>
-        <a:tint val="40000"/>
-      </a:schemeClr>
-    </dgm:fillClrLst>
-    <dgm:linClrLst meth="repeat">
-      <a:schemeClr val="accent1">
-        <a:alpha val="90000"/>
-        <a:tint val="40000"/>
-      </a:schemeClr>
-    </dgm:linClrLst>
-    <dgm:effectClrLst/>
-    <dgm:txLinClrLst/>
-    <dgm:txFillClrLst meth="repeat">
-      <a:schemeClr val="dk1"/>
-    </dgm:txFillClrLst>
-    <dgm:txEffectClrLst/>
-  </dgm:styleLbl>
-  <dgm:styleLbl name="fgAcc0">
-    <dgm:fillClrLst meth="repeat">
-      <a:schemeClr val="lt1">
-        <a:alpha val="90000"/>
-      </a:schemeClr>
-    </dgm:fillClrLst>
-    <dgm:linClrLst meth="repeat">
-      <a:schemeClr val="accent1"/>
-    </dgm:linClrLst>
-    <dgm:effectClrLst/>
-    <dgm:txLinClrLst/>
-    <dgm:txFillClrLst meth="repeat">
-      <a:schemeClr val="dk1"/>
-    </dgm:txFillClrLst>
-    <dgm:txEffectClrLst/>
-  </dgm:styleLbl>
-  <dgm:styleLbl name="fgAcc2">
-    <dgm:fillClrLst meth="repeat">
-      <a:schemeClr val="lt1">
-        <a:alpha val="90000"/>
-      </a:schemeClr>
-    </dgm:fillClrLst>
-    <dgm:linClrLst meth="repeat">
-      <a:schemeClr val="accent1"/>
-    </dgm:linClrLst>
-    <dgm:effectClrLst/>
-    <dgm:txLinClrLst/>
-    <dgm:txFillClrLst meth="repeat">
-      <a:schemeClr val="dk1"/>
-    </dgm:txFillClrLst>
-    <dgm:txEffectClrLst/>
-  </dgm:styleLbl>
-  <dgm:styleLbl name="fgAcc3">
-    <dgm:fillClrLst meth="repeat">
-      <a:schemeClr val="lt1">
-        <a:alpha val="90000"/>
-      </a:schemeClr>
-    </dgm:fillClrLst>
-    <dgm:linClrLst meth="repeat">
-      <a:schemeClr val="accent1"/>
-    </dgm:linClrLst>
-    <dgm:effectClrLst/>
-    <dgm:txLinClrLst/>
-    <dgm:txFillClrLst meth="repeat">
-      <a:schemeClr val="dk1"/>
-    </dgm:txFillClrLst>
-    <dgm:txEffectClrLst/>
-  </dgm:styleLbl>
-  <dgm:styleLbl name="fgAcc4">
-    <dgm:fillClrLst meth="repeat">
-      <a:schemeClr val="lt1">
-        <a:alpha val="90000"/>
-      </a:schemeClr>
-    </dgm:fillClrLst>
-    <dgm:linClrLst meth="repeat">
-      <a:schemeClr val="accent1"/>
-    </dgm:linClrLst>
-    <dgm:effectClrLst/>
-    <dgm:txLinClrLst/>
-    <dgm:txFillClrLst meth="repeat">
-      <a:schemeClr val="dk1"/>
-    </dgm:txFillClrLst>
-    <dgm:txEffectClrLst/>
-  </dgm:styleLbl>
-  <dgm:styleLbl name="bgShp">
-    <dgm:fillClrLst meth="repeat">
-      <a:schemeClr val="accent1">
-        <a:tint val="40000"/>
-      </a:schemeClr>
-    </dgm:fillClrLst>
-    <dgm:linClrLst meth="repeat">
-      <a:schemeClr val="accent1"/>
-    </dgm:linClrLst>
-    <dgm:effectClrLst/>
-    <dgm:txLinClrLst/>
-    <dgm:txFillClrLst meth="repeat">
-      <a:schemeClr val="dk1"/>
-    </dgm:txFillClrLst>
-    <dgm:txEffectClrLst/>
-  </dgm:styleLbl>
-  <dgm:styleLbl name="dkBgShp">
-    <dgm:fillClrLst meth="repeat">
-      <a:schemeClr val="accent1">
-        <a:shade val="80000"/>
-      </a:schemeClr>
-    </dgm:fillClrLst>
-    <dgm:linClrLst meth="repeat">
-      <a:schemeClr val="accent1"/>
-    </dgm:linClrLst>
-    <dgm:effectClrLst/>
-    <dgm:txLinClrLst/>
-    <dgm:txFillClrLst meth="repeat">
-      <a:schemeClr val="lt1"/>
-    </dgm:txFillClrLst>
-    <dgm:txEffectClrLst/>
-  </dgm:styleLbl>
-  <dgm:styleLbl name="trBgShp">
-    <dgm:fillClrLst meth="repeat">
-      <a:schemeClr val="accent1">
-        <a:tint val="50000"/>
-        <a:alpha val="40000"/>
-      </a:schemeClr>
-    </dgm:fillClrLst>
-    <dgm:linClrLst meth="repeat">
-      <a:schemeClr val="accent1"/>
-    </dgm:linClrLst>
-    <dgm:effectClrLst/>
-    <dgm:txLinClrLst/>
-    <dgm:txFillClrLst meth="repeat">
-      <a:schemeClr val="lt1"/>
-    </dgm:txFillClrLst>
-    <dgm:txEffectClrLst/>
-  </dgm:styleLbl>
-  <dgm:styleLbl name="fgShp">
-    <dgm:fillClrLst meth="repeat">
-      <a:schemeClr val="accent1">
-        <a:tint val="60000"/>
-      </a:schemeClr>
-    </dgm:fillClrLst>
-    <dgm:linClrLst meth="repeat">
-      <a:schemeClr val="lt1"/>
-    </dgm:linClrLst>
-    <dgm:effectClrLst/>
-    <dgm:txLinClrLst/>
-    <dgm:txFillClrLst meth="repeat">
-      <a:schemeClr val="dk1"/>
-    </dgm:txFillClrLst>
-    <dgm:txEffectClrLst/>
-  </dgm:styleLbl>
-  <dgm:styleLbl name="revTx">
-    <dgm:fillClrLst meth="repeat">
-      <a:schemeClr val="lt1">
-        <a:alpha val="0"/>
-      </a:schemeClr>
-    </dgm:fillClrLst>
-    <dgm:linClrLst meth="repeat">
-      <a:schemeClr val="dk1">
-        <a:alpha val="0"/>
-      </a:schemeClr>
-    </dgm:linClrLst>
-    <dgm:effectClrLst/>
-    <dgm:txLinClrLst/>
-    <dgm:txFillClrLst meth="repeat">
-      <a:schemeClr val="tx1"/>
-    </dgm:txFillClrLst>
-    <dgm:txEffectClrLst/>
-  </dgm:styleLbl>
-</dgm:colorsDef>
-</file>
-
-<file path=ppt/diagrams/data1.xml><?xml version="1.0" encoding="utf-8"?>
-<dgm:dataModel xmlns:dgm="http://schemas.openxmlformats.org/drawingml/2006/diagram" xmlns:a="http://schemas.openxmlformats.org/drawingml/2006/main">
-  <dgm:ptLst>
-    <dgm:pt modelId="{D8AF7772-329C-42A2-9825-D1A8963CCD50}" type="doc">
-      <dgm:prSet loTypeId="urn:microsoft.com/office/officeart/2024/3/layout/hArchList1" loCatId="List" qsTypeId="urn:microsoft.com/office/officeart/2005/8/quickstyle/simple1" qsCatId="simple" csTypeId="urn:microsoft.com/office/officeart/2005/8/colors/accent1_2" csCatId="accent1" phldr="1"/>
-      <dgm:spPr/>
-      <dgm:t>
-        <a:bodyPr/>
-        <a:lstStyle/>
-        <a:p>
-          <a:endParaRPr lang="en-US"/>
-        </a:p>
-      </dgm:t>
-    </dgm:pt>
-    <dgm:pt modelId="{6C37AA79-C7C7-450A-863B-26528EA3F9E6}">
-      <dgm:prSet/>
-      <dgm:spPr/>
-      <dgm:t>
-        <a:bodyPr/>
-        <a:lstStyle/>
-        <a:p>
-          <a:pPr>
-            <a:lnSpc>
-              <a:spcPct val="100000"/>
-            </a:lnSpc>
-            <a:defRPr b="1"/>
-          </a:pPr>
-          <a:r>
-            <a:rPr lang="en-US" b="0" i="0" dirty="0"/>
-            <a:t>Internal Project Resources</a:t>
-          </a:r>
-          <a:endParaRPr lang="en-US" dirty="0"/>
-        </a:p>
-      </dgm:t>
-    </dgm:pt>
-    <dgm:pt modelId="{5D3A01DC-31AA-4184-ABC5-0EB8B2558146}" type="parTrans" cxnId="{2C883A14-79BA-47F9-A02F-5C6487A76CBE}">
-      <dgm:prSet/>
-      <dgm:spPr/>
-      <dgm:t>
-        <a:bodyPr/>
-        <a:lstStyle/>
-        <a:p>
-          <a:endParaRPr lang="en-US"/>
-        </a:p>
-      </dgm:t>
-    </dgm:pt>
-    <dgm:pt modelId="{E739BA12-5C34-4CFA-8567-125DC85F0F3D}" type="sibTrans" cxnId="{2C883A14-79BA-47F9-A02F-5C6487A76CBE}">
-      <dgm:prSet/>
-      <dgm:spPr/>
-      <dgm:t>
-        <a:bodyPr/>
-        <a:lstStyle/>
-        <a:p>
-          <a:pPr>
-            <a:lnSpc>
-              <a:spcPct val="100000"/>
-            </a:lnSpc>
-            <a:defRPr b="1"/>
-          </a:pPr>
-          <a:endParaRPr lang="en-US"/>
-        </a:p>
-      </dgm:t>
-    </dgm:pt>
-    <dgm:pt modelId="{9E8AFEA5-F45B-4520-99C4-30B36E9188E3}">
-      <dgm:prSet/>
-      <dgm:spPr/>
-      <dgm:t>
-        <a:bodyPr/>
-        <a:lstStyle/>
-        <a:p>
-          <a:pPr>
-            <a:lnSpc>
-              <a:spcPct val="100000"/>
-            </a:lnSpc>
-          </a:pPr>
-          <a:r>
-            <a:rPr lang="en-US" b="0" i="0"/>
-            <a:t>Internal scripts, notebooks, and detailed README files guided workflow and team tasks effectively.</a:t>
-          </a:r>
-          <a:endParaRPr lang="en-US"/>
-        </a:p>
-      </dgm:t>
-    </dgm:pt>
-    <dgm:pt modelId="{129EA142-7F71-4CAA-8AEF-46DF06DAE590}" type="parTrans" cxnId="{3AC8159A-A7AD-48E8-9491-3F3D103DA2C2}">
-      <dgm:prSet/>
-      <dgm:spPr/>
-      <dgm:t>
-        <a:bodyPr/>
-        <a:lstStyle/>
-        <a:p>
-          <a:endParaRPr lang="en-US"/>
-        </a:p>
-      </dgm:t>
-    </dgm:pt>
-    <dgm:pt modelId="{21CC67DA-B5AF-4C08-BEED-354E45578782}" type="sibTrans" cxnId="{3AC8159A-A7AD-48E8-9491-3F3D103DA2C2}">
-      <dgm:prSet/>
-      <dgm:spPr/>
-      <dgm:t>
-        <a:bodyPr/>
-        <a:lstStyle/>
-        <a:p>
-          <a:endParaRPr lang="en-US"/>
-        </a:p>
-      </dgm:t>
-    </dgm:pt>
-    <dgm:pt modelId="{57A8CB2B-1B91-43D5-A42C-CD4FDDE3CC1E}">
-      <dgm:prSet/>
-      <dgm:spPr/>
-      <dgm:t>
-        <a:bodyPr/>
-        <a:lstStyle/>
-        <a:p>
-          <a:pPr>
-            <a:lnSpc>
-              <a:spcPct val="100000"/>
-            </a:lnSpc>
-            <a:defRPr b="1"/>
-          </a:pPr>
-          <a:r>
-            <a:rPr lang="en-US" b="0" i="0"/>
-            <a:t>External Library Documentation</a:t>
-          </a:r>
-          <a:endParaRPr lang="en-US"/>
-        </a:p>
-      </dgm:t>
-    </dgm:pt>
-    <dgm:pt modelId="{A31C4989-2F1F-4297-9D52-485788828B7C}" type="parTrans" cxnId="{BBFE6CD3-3E66-4C3F-9FB2-AA4EA814BB7A}">
-      <dgm:prSet/>
-      <dgm:spPr/>
-      <dgm:t>
-        <a:bodyPr/>
-        <a:lstStyle/>
-        <a:p>
-          <a:endParaRPr lang="en-US"/>
-        </a:p>
-      </dgm:t>
-    </dgm:pt>
-    <dgm:pt modelId="{410A1119-1AF9-4AD0-B281-6148038071F4}" type="sibTrans" cxnId="{BBFE6CD3-3E66-4C3F-9FB2-AA4EA814BB7A}">
-      <dgm:prSet/>
-      <dgm:spPr/>
-      <dgm:t>
-        <a:bodyPr/>
-        <a:lstStyle/>
-        <a:p>
-          <a:pPr>
-            <a:lnSpc>
-              <a:spcPct val="100000"/>
-            </a:lnSpc>
-            <a:defRPr b="1"/>
-          </a:pPr>
-          <a:endParaRPr lang="en-US"/>
-        </a:p>
-      </dgm:t>
-    </dgm:pt>
-    <dgm:pt modelId="{F2CC702A-A2CD-464B-806E-FD2C15301140}">
-      <dgm:prSet/>
-      <dgm:spPr/>
-      <dgm:t>
-        <a:bodyPr/>
-        <a:lstStyle/>
-        <a:p>
-          <a:pPr>
-            <a:lnSpc>
-              <a:spcPct val="100000"/>
-            </a:lnSpc>
-          </a:pPr>
-          <a:r>
-            <a:rPr lang="en-US" b="0" i="0"/>
-            <a:t>Documentation from libraries like scikit-learn and scikit-image supported model training and feature extraction.</a:t>
-          </a:r>
-          <a:endParaRPr lang="en-US"/>
-        </a:p>
-      </dgm:t>
-    </dgm:pt>
-    <dgm:pt modelId="{40D36D32-9094-44C7-9BBB-B4B98AE64EF3}" type="parTrans" cxnId="{BDD8F4D3-246D-4442-8C07-1E72C1195E98}">
-      <dgm:prSet/>
-      <dgm:spPr/>
-      <dgm:t>
-        <a:bodyPr/>
-        <a:lstStyle/>
-        <a:p>
-          <a:endParaRPr lang="en-US"/>
-        </a:p>
-      </dgm:t>
-    </dgm:pt>
-    <dgm:pt modelId="{A3881489-2506-4651-8C1D-6E03D6F0DE3A}" type="sibTrans" cxnId="{BDD8F4D3-246D-4442-8C07-1E72C1195E98}">
-      <dgm:prSet/>
-      <dgm:spPr/>
-      <dgm:t>
-        <a:bodyPr/>
-        <a:lstStyle/>
-        <a:p>
-          <a:endParaRPr lang="en-US"/>
-        </a:p>
-      </dgm:t>
-    </dgm:pt>
-    <dgm:pt modelId="{A5BD9A1E-D7B1-4B12-9DAF-8FCDA8D218DE}">
-      <dgm:prSet/>
-      <dgm:spPr/>
-      <dgm:t>
-        <a:bodyPr/>
-        <a:lstStyle/>
-        <a:p>
-          <a:pPr>
-            <a:lnSpc>
-              <a:spcPct val="100000"/>
-            </a:lnSpc>
-            <a:defRPr b="1"/>
-          </a:pPr>
-          <a:r>
-            <a:rPr lang="en-US" b="0" i="0"/>
-            <a:t>Ensuring Best Practices</a:t>
-          </a:r>
-          <a:endParaRPr lang="en-US"/>
-        </a:p>
-      </dgm:t>
-    </dgm:pt>
-    <dgm:pt modelId="{3D07BDB9-AC6D-46BD-9A0B-48ED36C8BB34}" type="parTrans" cxnId="{BB27A7C8-98BC-44E7-B983-0C097AED2FD0}">
-      <dgm:prSet/>
-      <dgm:spPr/>
-      <dgm:t>
-        <a:bodyPr/>
-        <a:lstStyle/>
-        <a:p>
-          <a:endParaRPr lang="en-US"/>
-        </a:p>
-      </dgm:t>
-    </dgm:pt>
-    <dgm:pt modelId="{9391BE1F-F614-45AC-B7A3-E24F90833FC9}" type="sibTrans" cxnId="{BB27A7C8-98BC-44E7-B983-0C097AED2FD0}">
-      <dgm:prSet/>
-      <dgm:spPr/>
-      <dgm:t>
-        <a:bodyPr/>
-        <a:lstStyle/>
-        <a:p>
-          <a:endParaRPr lang="en-US"/>
-        </a:p>
-      </dgm:t>
-    </dgm:pt>
-    <dgm:pt modelId="{17D8EA3C-D7EC-45D7-AEFB-1DA4815C7189}">
-      <dgm:prSet/>
-      <dgm:spPr/>
-      <dgm:t>
-        <a:bodyPr/>
-        <a:lstStyle/>
-        <a:p>
-          <a:pPr>
-            <a:lnSpc>
-              <a:spcPct val="100000"/>
-            </a:lnSpc>
-          </a:pPr>
-          <a:r>
-            <a:rPr lang="en-US" b="0" i="0"/>
-            <a:t>Leveraging internal and external references ensured technical rigor and practical project development.</a:t>
-          </a:r>
-          <a:endParaRPr lang="en-US"/>
-        </a:p>
-      </dgm:t>
-    </dgm:pt>
-    <dgm:pt modelId="{B17B72DB-5C58-478F-A347-36002BB31E01}" type="parTrans" cxnId="{02C3E879-6D3A-45E3-BA09-0CD6095CAC39}">
-      <dgm:prSet/>
-      <dgm:spPr/>
-      <dgm:t>
-        <a:bodyPr/>
-        <a:lstStyle/>
-        <a:p>
-          <a:endParaRPr lang="en-US"/>
-        </a:p>
-      </dgm:t>
-    </dgm:pt>
-    <dgm:pt modelId="{B7CC8B4B-0B9D-454C-99B7-704C7B50AD4A}" type="sibTrans" cxnId="{02C3E879-6D3A-45E3-BA09-0CD6095CAC39}">
-      <dgm:prSet/>
-      <dgm:spPr/>
-      <dgm:t>
-        <a:bodyPr/>
-        <a:lstStyle/>
-        <a:p>
-          <a:endParaRPr lang="en-US"/>
-        </a:p>
-      </dgm:t>
-    </dgm:pt>
-    <dgm:pt modelId="{A3912F71-4838-4B5E-B036-E6DC2E6FC91A}" type="pres">
-      <dgm:prSet presAssocID="{D8AF7772-329C-42A2-9825-D1A8963CCD50}" presName="Name0" presStyleCnt="0">
-        <dgm:presLayoutVars>
-          <dgm:dir/>
-          <dgm:resizeHandles val="exact"/>
-        </dgm:presLayoutVars>
-      </dgm:prSet>
-      <dgm:spPr/>
-    </dgm:pt>
-    <dgm:pt modelId="{777B23B8-6FDE-4E0F-B108-EEA113C5AF3E}" type="pres">
-      <dgm:prSet presAssocID="{6C37AA79-C7C7-450A-863B-26528EA3F9E6}" presName="compNode" presStyleCnt="0"/>
-      <dgm:spPr/>
-    </dgm:pt>
-    <dgm:pt modelId="{BEBCA07E-FCB3-476A-8CF2-DCAE968D2256}" type="pres">
-      <dgm:prSet presAssocID="{6C37AA79-C7C7-450A-863B-26528EA3F9E6}" presName="pictRect" presStyleLbl="revTx" presStyleIdx="0" presStyleCnt="6">
-        <dgm:presLayoutVars>
-          <dgm:chMax val="0"/>
-          <dgm:bulletEnabled/>
-        </dgm:presLayoutVars>
-      </dgm:prSet>
-      <dgm:spPr/>
-    </dgm:pt>
-    <dgm:pt modelId="{9F846D98-E927-4376-9FE8-332D88579D72}" type="pres">
-      <dgm:prSet presAssocID="{6C37AA79-C7C7-450A-863B-26528EA3F9E6}" presName="textRect" presStyleLbl="revTx" presStyleIdx="1" presStyleCnt="6">
-        <dgm:presLayoutVars>
-          <dgm:bulletEnabled/>
-        </dgm:presLayoutVars>
-      </dgm:prSet>
-      <dgm:spPr/>
-    </dgm:pt>
-    <dgm:pt modelId="{CA03E24B-2679-4AEC-8A67-070D738BDDE6}" type="pres">
-      <dgm:prSet presAssocID="{E739BA12-5C34-4CFA-8567-125DC85F0F3D}" presName="sibTrans" presStyleLbl="sibTrans2D1" presStyleIdx="0" presStyleCnt="0"/>
-      <dgm:spPr/>
-    </dgm:pt>
-    <dgm:pt modelId="{4FADDC57-A9EF-49DF-868F-554E87590CEB}" type="pres">
-      <dgm:prSet presAssocID="{57A8CB2B-1B91-43D5-A42C-CD4FDDE3CC1E}" presName="compNode" presStyleCnt="0"/>
-      <dgm:spPr/>
-    </dgm:pt>
-    <dgm:pt modelId="{681C3D8D-DEF9-4C98-8137-16E642F553EF}" type="pres">
-      <dgm:prSet presAssocID="{57A8CB2B-1B91-43D5-A42C-CD4FDDE3CC1E}" presName="pictRect" presStyleLbl="revTx" presStyleIdx="2" presStyleCnt="6">
-        <dgm:presLayoutVars>
-          <dgm:chMax val="0"/>
-          <dgm:bulletEnabled/>
-        </dgm:presLayoutVars>
-      </dgm:prSet>
-      <dgm:spPr/>
-    </dgm:pt>
-    <dgm:pt modelId="{FDAFA682-C213-48AA-8536-02E270D5D649}" type="pres">
-      <dgm:prSet presAssocID="{57A8CB2B-1B91-43D5-A42C-CD4FDDE3CC1E}" presName="textRect" presStyleLbl="revTx" presStyleIdx="3" presStyleCnt="6">
-        <dgm:presLayoutVars>
-          <dgm:bulletEnabled/>
-        </dgm:presLayoutVars>
-      </dgm:prSet>
-      <dgm:spPr/>
-    </dgm:pt>
-    <dgm:pt modelId="{25D8A988-E1F4-477C-A7D2-4096801396D0}" type="pres">
-      <dgm:prSet presAssocID="{410A1119-1AF9-4AD0-B281-6148038071F4}" presName="sibTrans" presStyleLbl="sibTrans2D1" presStyleIdx="0" presStyleCnt="0"/>
-      <dgm:spPr/>
-    </dgm:pt>
-    <dgm:pt modelId="{A3B3DDAA-C241-4ECB-8809-2DA3446C0C9C}" type="pres">
-      <dgm:prSet presAssocID="{A5BD9A1E-D7B1-4B12-9DAF-8FCDA8D218DE}" presName="compNode" presStyleCnt="0"/>
-      <dgm:spPr/>
-    </dgm:pt>
-    <dgm:pt modelId="{C64642ED-FC7E-4DD2-9FD0-86CE30B713EA}" type="pres">
-      <dgm:prSet presAssocID="{A5BD9A1E-D7B1-4B12-9DAF-8FCDA8D218DE}" presName="pictRect" presStyleLbl="revTx" presStyleIdx="4" presStyleCnt="6">
-        <dgm:presLayoutVars>
-          <dgm:chMax val="0"/>
-          <dgm:bulletEnabled/>
-        </dgm:presLayoutVars>
-      </dgm:prSet>
-      <dgm:spPr/>
-    </dgm:pt>
-    <dgm:pt modelId="{1BD5F9F5-03B7-4123-9526-0F553D9E690B}" type="pres">
-      <dgm:prSet presAssocID="{A5BD9A1E-D7B1-4B12-9DAF-8FCDA8D218DE}" presName="textRect" presStyleLbl="revTx" presStyleIdx="5" presStyleCnt="6">
-        <dgm:presLayoutVars>
-          <dgm:bulletEnabled/>
-        </dgm:presLayoutVars>
-      </dgm:prSet>
-      <dgm:spPr/>
-    </dgm:pt>
-  </dgm:ptLst>
-  <dgm:cxnLst>
-    <dgm:cxn modelId="{2C883A14-79BA-47F9-A02F-5C6487A76CBE}" srcId="{D8AF7772-329C-42A2-9825-D1A8963CCD50}" destId="{6C37AA79-C7C7-450A-863B-26528EA3F9E6}" srcOrd="0" destOrd="0" parTransId="{5D3A01DC-31AA-4184-ABC5-0EB8B2558146}" sibTransId="{E739BA12-5C34-4CFA-8567-125DC85F0F3D}"/>
-    <dgm:cxn modelId="{B2D27C2A-D0E5-48D1-93AB-386488740CAE}" type="presOf" srcId="{6C37AA79-C7C7-450A-863B-26528EA3F9E6}" destId="{BEBCA07E-FCB3-476A-8CF2-DCAE968D2256}" srcOrd="0" destOrd="0" presId="urn:microsoft.com/office/officeart/2024/3/layout/hArchList1"/>
-    <dgm:cxn modelId="{4735743D-2C2A-4818-86D6-C5532D09E346}" type="presOf" srcId="{57A8CB2B-1B91-43D5-A42C-CD4FDDE3CC1E}" destId="{681C3D8D-DEF9-4C98-8137-16E642F553EF}" srcOrd="0" destOrd="0" presId="urn:microsoft.com/office/officeart/2024/3/layout/hArchList1"/>
-    <dgm:cxn modelId="{9FA48C46-AB29-44E4-9D31-E654BE41D070}" type="presOf" srcId="{410A1119-1AF9-4AD0-B281-6148038071F4}" destId="{25D8A988-E1F4-477C-A7D2-4096801396D0}" srcOrd="0" destOrd="0" presId="urn:microsoft.com/office/officeart/2024/3/layout/hArchList1"/>
-    <dgm:cxn modelId="{C287F94E-1A96-4199-9282-F7B67B5AFAC8}" type="presOf" srcId="{F2CC702A-A2CD-464B-806E-FD2C15301140}" destId="{FDAFA682-C213-48AA-8536-02E270D5D649}" srcOrd="0" destOrd="0" presId="urn:microsoft.com/office/officeart/2024/3/layout/hArchList1"/>
-    <dgm:cxn modelId="{50DF5D58-58AA-4353-949A-88DC04BFB644}" type="presOf" srcId="{9E8AFEA5-F45B-4520-99C4-30B36E9188E3}" destId="{9F846D98-E927-4376-9FE8-332D88579D72}" srcOrd="0" destOrd="0" presId="urn:microsoft.com/office/officeart/2024/3/layout/hArchList1"/>
-    <dgm:cxn modelId="{02C3E879-6D3A-45E3-BA09-0CD6095CAC39}" srcId="{A5BD9A1E-D7B1-4B12-9DAF-8FCDA8D218DE}" destId="{17D8EA3C-D7EC-45D7-AEFB-1DA4815C7189}" srcOrd="0" destOrd="0" parTransId="{B17B72DB-5C58-478F-A347-36002BB31E01}" sibTransId="{B7CC8B4B-0B9D-454C-99B7-704C7B50AD4A}"/>
-    <dgm:cxn modelId="{A44F9A81-AA05-4031-8CC6-0C3185399940}" type="presOf" srcId="{A5BD9A1E-D7B1-4B12-9DAF-8FCDA8D218DE}" destId="{C64642ED-FC7E-4DD2-9FD0-86CE30B713EA}" srcOrd="0" destOrd="0" presId="urn:microsoft.com/office/officeart/2024/3/layout/hArchList1"/>
-    <dgm:cxn modelId="{826E258E-A18E-404A-9ABE-309AD7E9915C}" type="presOf" srcId="{D8AF7772-329C-42A2-9825-D1A8963CCD50}" destId="{A3912F71-4838-4B5E-B036-E6DC2E6FC91A}" srcOrd="0" destOrd="0" presId="urn:microsoft.com/office/officeart/2024/3/layout/hArchList1"/>
-    <dgm:cxn modelId="{913A8C97-047B-46E8-AB97-CF72CB904846}" type="presOf" srcId="{17D8EA3C-D7EC-45D7-AEFB-1DA4815C7189}" destId="{1BD5F9F5-03B7-4123-9526-0F553D9E690B}" srcOrd="0" destOrd="0" presId="urn:microsoft.com/office/officeart/2024/3/layout/hArchList1"/>
-    <dgm:cxn modelId="{3AC8159A-A7AD-48E8-9491-3F3D103DA2C2}" srcId="{6C37AA79-C7C7-450A-863B-26528EA3F9E6}" destId="{9E8AFEA5-F45B-4520-99C4-30B36E9188E3}" srcOrd="0" destOrd="0" parTransId="{129EA142-7F71-4CAA-8AEF-46DF06DAE590}" sibTransId="{21CC67DA-B5AF-4C08-BEED-354E45578782}"/>
-    <dgm:cxn modelId="{BB27A7C8-98BC-44E7-B983-0C097AED2FD0}" srcId="{D8AF7772-329C-42A2-9825-D1A8963CCD50}" destId="{A5BD9A1E-D7B1-4B12-9DAF-8FCDA8D218DE}" srcOrd="2" destOrd="0" parTransId="{3D07BDB9-AC6D-46BD-9A0B-48ED36C8BB34}" sibTransId="{9391BE1F-F614-45AC-B7A3-E24F90833FC9}"/>
-    <dgm:cxn modelId="{BBFE6CD3-3E66-4C3F-9FB2-AA4EA814BB7A}" srcId="{D8AF7772-329C-42A2-9825-D1A8963CCD50}" destId="{57A8CB2B-1B91-43D5-A42C-CD4FDDE3CC1E}" srcOrd="1" destOrd="0" parTransId="{A31C4989-2F1F-4297-9D52-485788828B7C}" sibTransId="{410A1119-1AF9-4AD0-B281-6148038071F4}"/>
-    <dgm:cxn modelId="{BDD8F4D3-246D-4442-8C07-1E72C1195E98}" srcId="{57A8CB2B-1B91-43D5-A42C-CD4FDDE3CC1E}" destId="{F2CC702A-A2CD-464B-806E-FD2C15301140}" srcOrd="0" destOrd="0" parTransId="{40D36D32-9094-44C7-9BBB-B4B98AE64EF3}" sibTransId="{A3881489-2506-4651-8C1D-6E03D6F0DE3A}"/>
-    <dgm:cxn modelId="{03F080FF-39CC-4C1A-A8C4-95E0069B638E}" type="presOf" srcId="{E739BA12-5C34-4CFA-8567-125DC85F0F3D}" destId="{CA03E24B-2679-4AEC-8A67-070D738BDDE6}" srcOrd="0" destOrd="0" presId="urn:microsoft.com/office/officeart/2024/3/layout/hArchList1"/>
-    <dgm:cxn modelId="{FF1CAEB2-87D0-430B-B8FD-612FE73425EA}" type="presParOf" srcId="{A3912F71-4838-4B5E-B036-E6DC2E6FC91A}" destId="{777B23B8-6FDE-4E0F-B108-EEA113C5AF3E}" srcOrd="0" destOrd="0" presId="urn:microsoft.com/office/officeart/2024/3/layout/hArchList1"/>
-    <dgm:cxn modelId="{259DBE64-062D-4DEF-9F30-E8BE305E8728}" type="presParOf" srcId="{777B23B8-6FDE-4E0F-B108-EEA113C5AF3E}" destId="{BEBCA07E-FCB3-476A-8CF2-DCAE968D2256}" srcOrd="0" destOrd="0" presId="urn:microsoft.com/office/officeart/2024/3/layout/hArchList1"/>
-    <dgm:cxn modelId="{56082E40-1790-4C5A-A27D-278151288039}" type="presParOf" srcId="{777B23B8-6FDE-4E0F-B108-EEA113C5AF3E}" destId="{9F846D98-E927-4376-9FE8-332D88579D72}" srcOrd="1" destOrd="0" presId="urn:microsoft.com/office/officeart/2024/3/layout/hArchList1"/>
-    <dgm:cxn modelId="{999CFA47-A99A-4D87-B2F0-B93015961889}" type="presParOf" srcId="{A3912F71-4838-4B5E-B036-E6DC2E6FC91A}" destId="{CA03E24B-2679-4AEC-8A67-070D738BDDE6}" srcOrd="1" destOrd="0" presId="urn:microsoft.com/office/officeart/2024/3/layout/hArchList1"/>
-    <dgm:cxn modelId="{82CF04DB-E721-40BF-B899-2F17803AB304}" type="presParOf" srcId="{A3912F71-4838-4B5E-B036-E6DC2E6FC91A}" destId="{4FADDC57-A9EF-49DF-868F-554E87590CEB}" srcOrd="2" destOrd="0" presId="urn:microsoft.com/office/officeart/2024/3/layout/hArchList1"/>
-    <dgm:cxn modelId="{7D3D5E46-9346-4ADD-A018-9385F05C42A1}" type="presParOf" srcId="{4FADDC57-A9EF-49DF-868F-554E87590CEB}" destId="{681C3D8D-DEF9-4C98-8137-16E642F553EF}" srcOrd="0" destOrd="0" presId="urn:microsoft.com/office/officeart/2024/3/layout/hArchList1"/>
-    <dgm:cxn modelId="{167297F2-CFAE-4DAA-84A6-A4E44D9F66BF}" type="presParOf" srcId="{4FADDC57-A9EF-49DF-868F-554E87590CEB}" destId="{FDAFA682-C213-48AA-8536-02E270D5D649}" srcOrd="1" destOrd="0" presId="urn:microsoft.com/office/officeart/2024/3/layout/hArchList1"/>
-    <dgm:cxn modelId="{67D379E7-ECBD-44F9-B2A6-7FE08E10264F}" type="presParOf" srcId="{A3912F71-4838-4B5E-B036-E6DC2E6FC91A}" destId="{25D8A988-E1F4-477C-A7D2-4096801396D0}" srcOrd="3" destOrd="0" presId="urn:microsoft.com/office/officeart/2024/3/layout/hArchList1"/>
-    <dgm:cxn modelId="{FFF593A8-7EB7-4927-A939-D84B2843E814}" type="presParOf" srcId="{A3912F71-4838-4B5E-B036-E6DC2E6FC91A}" destId="{A3B3DDAA-C241-4ECB-8809-2DA3446C0C9C}" srcOrd="4" destOrd="0" presId="urn:microsoft.com/office/officeart/2024/3/layout/hArchList1"/>
-    <dgm:cxn modelId="{31E6DD63-D643-4F15-85B1-185FB2233BD6}" type="presParOf" srcId="{A3B3DDAA-C241-4ECB-8809-2DA3446C0C9C}" destId="{C64642ED-FC7E-4DD2-9FD0-86CE30B713EA}" srcOrd="0" destOrd="0" presId="urn:microsoft.com/office/officeart/2024/3/layout/hArchList1"/>
-    <dgm:cxn modelId="{5BCA5A3E-BAB1-4EF4-96E0-28CE2B6128DF}" type="presParOf" srcId="{A3B3DDAA-C241-4ECB-8809-2DA3446C0C9C}" destId="{1BD5F9F5-03B7-4123-9526-0F553D9E690B}" srcOrd="1" destOrd="0" presId="urn:microsoft.com/office/officeart/2024/3/layout/hArchList1"/>
-  </dgm:cxnLst>
-  <dgm:bg/>
-  <dgm:whole/>
-  <dgm:extLst>
-    <a:ext uri="http://schemas.microsoft.com/office/drawing/2008/diagram">
-      <dsp:dataModelExt xmlns:dsp="http://schemas.microsoft.com/office/drawing/2008/diagram" relId="rId7" minVer="http://schemas.openxmlformats.org/drawingml/2006/diagram"/>
-    </a:ext>
-  </dgm:extLst>
-</dgm:dataModel>
-</file>
-
-<file path=ppt/diagrams/drawing1.xml><?xml version="1.0" encoding="utf-8"?>
-<dsp:drawing xmlns:dgm="http://schemas.openxmlformats.org/drawingml/2006/diagram" xmlns:dsp="http://schemas.microsoft.com/office/drawing/2008/diagram" xmlns:a="http://schemas.openxmlformats.org/drawingml/2006/main">
-  <dsp:spTree>
-    <dsp:nvGrpSpPr>
-      <dsp:cNvPr id="0" name=""/>
-      <dsp:cNvGrpSpPr/>
-    </dsp:nvGrpSpPr>
-    <dsp:grpSpPr/>
-    <dsp:sp modelId="{BEBCA07E-FCB3-476A-8CF2-DCAE968D2256}">
-      <dsp:nvSpPr>
-        <dsp:cNvPr id="0" name=""/>
-        <dsp:cNvSpPr/>
-      </dsp:nvSpPr>
-      <dsp:spPr>
-        <a:xfrm>
-          <a:off x="0" y="0"/>
-          <a:ext cx="2138362" cy="604420"/>
-        </a:xfrm>
-        <a:prstGeom prst="rect">
-          <a:avLst/>
-        </a:prstGeom>
-        <a:noFill/>
-        <a:ln>
-          <a:noFill/>
-        </a:ln>
-        <a:effectLst/>
-      </dsp:spPr>
-      <dsp:style>
-        <a:lnRef idx="0">
-          <a:scrgbClr r="0" g="0" b="0"/>
-        </a:lnRef>
-        <a:fillRef idx="0">
-          <a:scrgbClr r="0" g="0" b="0"/>
-        </a:fillRef>
-        <a:effectRef idx="0">
-          <a:scrgbClr r="0" g="0" b="0"/>
-        </a:effectRef>
-        <a:fontRef idx="minor"/>
-      </dsp:style>
-      <dsp:txBody>
-        <a:bodyPr spcFirstLastPara="0" vert="horz" wrap="square" lIns="137160" tIns="22860" rIns="22860" bIns="22860" numCol="1" spcCol="1270" anchor="t" anchorCtr="0">
-          <a:noAutofit/>
-        </a:bodyPr>
-        <a:lstStyle/>
-        <a:p>
-          <a:pPr marL="0" lvl="0" indent="0" algn="l" defTabSz="800100">
-            <a:lnSpc>
-              <a:spcPct val="100000"/>
-            </a:lnSpc>
-            <a:spcBef>
-              <a:spcPct val="0"/>
-            </a:spcBef>
-            <a:spcAft>
-              <a:spcPct val="35000"/>
-            </a:spcAft>
-            <a:buNone/>
-            <a:defRPr b="1"/>
-          </a:pPr>
-          <a:r>
-            <a:rPr lang="en-US" sz="1800" b="0" i="0" kern="1200" dirty="0"/>
-            <a:t>Internal Project Resources</a:t>
-          </a:r>
-          <a:endParaRPr lang="en-US" sz="1800" kern="1200" dirty="0"/>
-        </a:p>
-      </dsp:txBody>
-      <dsp:txXfrm>
-        <a:off x="0" y="0"/>
-        <a:ext cx="2138362" cy="604420"/>
-      </dsp:txXfrm>
-    </dsp:sp>
-    <dsp:sp modelId="{9F846D98-E927-4376-9FE8-332D88579D72}">
-      <dsp:nvSpPr>
-        <dsp:cNvPr id="0" name=""/>
-        <dsp:cNvSpPr/>
-      </dsp:nvSpPr>
-      <dsp:spPr>
-        <a:xfrm>
-          <a:off x="0" y="604420"/>
-          <a:ext cx="2138362" cy="2589308"/>
-        </a:xfrm>
-        <a:prstGeom prst="rect">
-          <a:avLst/>
-        </a:prstGeom>
-        <a:noFill/>
-        <a:ln>
-          <a:noFill/>
-        </a:ln>
-        <a:effectLst/>
-      </dsp:spPr>
-      <dsp:style>
-        <a:lnRef idx="0">
-          <a:scrgbClr r="0" g="0" b="0"/>
-        </a:lnRef>
-        <a:fillRef idx="0">
-          <a:scrgbClr r="0" g="0" b="0"/>
-        </a:fillRef>
-        <a:effectRef idx="0">
-          <a:scrgbClr r="0" g="0" b="0"/>
-        </a:effectRef>
-        <a:fontRef idx="minor"/>
-      </dsp:style>
-      <dsp:txBody>
-        <a:bodyPr spcFirstLastPara="0" vert="horz" wrap="square" lIns="137160" tIns="17780" rIns="17780" bIns="17780" numCol="1" spcCol="1270" anchor="t" anchorCtr="0">
-          <a:noAutofit/>
-        </a:bodyPr>
-        <a:lstStyle/>
-        <a:p>
-          <a:pPr marL="0" lvl="0" indent="0" algn="l" defTabSz="622300">
-            <a:lnSpc>
-              <a:spcPct val="100000"/>
-            </a:lnSpc>
-            <a:spcBef>
-              <a:spcPct val="0"/>
-            </a:spcBef>
-            <a:spcAft>
-              <a:spcPct val="35000"/>
-            </a:spcAft>
-            <a:buNone/>
-          </a:pPr>
-          <a:r>
-            <a:rPr lang="en-US" sz="1400" b="0" i="0" kern="1200"/>
-            <a:t>Internal scripts, notebooks, and detailed README files guided workflow and team tasks effectively.</a:t>
-          </a:r>
-          <a:endParaRPr lang="en-US" sz="1400" kern="1200"/>
-        </a:p>
-      </dsp:txBody>
-      <dsp:txXfrm>
-        <a:off x="0" y="604420"/>
-        <a:ext cx="2138362" cy="2589308"/>
-      </dsp:txXfrm>
-    </dsp:sp>
-    <dsp:sp modelId="{681C3D8D-DEF9-4C98-8137-16E642F553EF}">
-      <dsp:nvSpPr>
-        <dsp:cNvPr id="0" name=""/>
-        <dsp:cNvSpPr/>
-      </dsp:nvSpPr>
-      <dsp:spPr>
-        <a:xfrm>
-          <a:off x="2352198" y="0"/>
-          <a:ext cx="2138362" cy="604420"/>
-        </a:xfrm>
-        <a:prstGeom prst="rect">
-          <a:avLst/>
-        </a:prstGeom>
-        <a:noFill/>
-        <a:ln>
-          <a:noFill/>
-        </a:ln>
-        <a:effectLst/>
-      </dsp:spPr>
-      <dsp:style>
-        <a:lnRef idx="0">
-          <a:scrgbClr r="0" g="0" b="0"/>
-        </a:lnRef>
-        <a:fillRef idx="0">
-          <a:scrgbClr r="0" g="0" b="0"/>
-        </a:fillRef>
-        <a:effectRef idx="0">
-          <a:scrgbClr r="0" g="0" b="0"/>
-        </a:effectRef>
-        <a:fontRef idx="minor"/>
-      </dsp:style>
-      <dsp:txBody>
-        <a:bodyPr spcFirstLastPara="0" vert="horz" wrap="square" lIns="137160" tIns="22860" rIns="22860" bIns="22860" numCol="1" spcCol="1270" anchor="t" anchorCtr="0">
-          <a:noAutofit/>
-        </a:bodyPr>
-        <a:lstStyle/>
-        <a:p>
-          <a:pPr marL="0" lvl="0" indent="0" algn="l" defTabSz="800100">
-            <a:lnSpc>
-              <a:spcPct val="100000"/>
-            </a:lnSpc>
-            <a:spcBef>
-              <a:spcPct val="0"/>
-            </a:spcBef>
-            <a:spcAft>
-              <a:spcPct val="35000"/>
-            </a:spcAft>
-            <a:buNone/>
-            <a:defRPr b="1"/>
-          </a:pPr>
-          <a:r>
-            <a:rPr lang="en-US" sz="1800" b="0" i="0" kern="1200"/>
-            <a:t>External Library Documentation</a:t>
-          </a:r>
-          <a:endParaRPr lang="en-US" sz="1800" kern="1200"/>
-        </a:p>
-      </dsp:txBody>
-      <dsp:txXfrm>
-        <a:off x="2352198" y="0"/>
-        <a:ext cx="2138362" cy="604420"/>
-      </dsp:txXfrm>
-    </dsp:sp>
-    <dsp:sp modelId="{FDAFA682-C213-48AA-8536-02E270D5D649}">
-      <dsp:nvSpPr>
-        <dsp:cNvPr id="0" name=""/>
-        <dsp:cNvSpPr/>
-      </dsp:nvSpPr>
-      <dsp:spPr>
-        <a:xfrm>
-          <a:off x="2352198" y="604420"/>
-          <a:ext cx="2138362" cy="2589308"/>
-        </a:xfrm>
-        <a:prstGeom prst="rect">
-          <a:avLst/>
-        </a:prstGeom>
-        <a:noFill/>
-        <a:ln>
-          <a:noFill/>
-        </a:ln>
-        <a:effectLst/>
-      </dsp:spPr>
-      <dsp:style>
-        <a:lnRef idx="0">
-          <a:scrgbClr r="0" g="0" b="0"/>
-        </a:lnRef>
-        <a:fillRef idx="0">
-          <a:scrgbClr r="0" g="0" b="0"/>
-        </a:fillRef>
-        <a:effectRef idx="0">
-          <a:scrgbClr r="0" g="0" b="0"/>
-        </a:effectRef>
-        <a:fontRef idx="minor"/>
-      </dsp:style>
-      <dsp:txBody>
-        <a:bodyPr spcFirstLastPara="0" vert="horz" wrap="square" lIns="137160" tIns="17780" rIns="17780" bIns="17780" numCol="1" spcCol="1270" anchor="t" anchorCtr="0">
-          <a:noAutofit/>
-        </a:bodyPr>
-        <a:lstStyle/>
-        <a:p>
-          <a:pPr marL="0" lvl="0" indent="0" algn="l" defTabSz="622300">
-            <a:lnSpc>
-              <a:spcPct val="100000"/>
-            </a:lnSpc>
-            <a:spcBef>
-              <a:spcPct val="0"/>
-            </a:spcBef>
-            <a:spcAft>
-              <a:spcPct val="35000"/>
-            </a:spcAft>
-            <a:buNone/>
-          </a:pPr>
-          <a:r>
-            <a:rPr lang="en-US" sz="1400" b="0" i="0" kern="1200"/>
-            <a:t>Documentation from libraries like scikit-learn and scikit-image supported model training and feature extraction.</a:t>
-          </a:r>
-          <a:endParaRPr lang="en-US" sz="1400" kern="1200"/>
-        </a:p>
-      </dsp:txBody>
-      <dsp:txXfrm>
-        <a:off x="2352198" y="604420"/>
-        <a:ext cx="2138362" cy="2589308"/>
-      </dsp:txXfrm>
-    </dsp:sp>
-    <dsp:sp modelId="{C64642ED-FC7E-4DD2-9FD0-86CE30B713EA}">
-      <dsp:nvSpPr>
-        <dsp:cNvPr id="0" name=""/>
-        <dsp:cNvSpPr/>
-      </dsp:nvSpPr>
-      <dsp:spPr>
-        <a:xfrm>
-          <a:off x="4704396" y="0"/>
-          <a:ext cx="2138362" cy="604420"/>
-        </a:xfrm>
-        <a:prstGeom prst="rect">
-          <a:avLst/>
-        </a:prstGeom>
-        <a:noFill/>
-        <a:ln>
-          <a:noFill/>
-        </a:ln>
-        <a:effectLst/>
-      </dsp:spPr>
-      <dsp:style>
-        <a:lnRef idx="0">
-          <a:scrgbClr r="0" g="0" b="0"/>
-        </a:lnRef>
-        <a:fillRef idx="0">
-          <a:scrgbClr r="0" g="0" b="0"/>
-        </a:fillRef>
-        <a:effectRef idx="0">
-          <a:scrgbClr r="0" g="0" b="0"/>
-        </a:effectRef>
-        <a:fontRef idx="minor"/>
-      </dsp:style>
-      <dsp:txBody>
-        <a:bodyPr spcFirstLastPara="0" vert="horz" wrap="square" lIns="137160" tIns="22860" rIns="22860" bIns="22860" numCol="1" spcCol="1270" anchor="t" anchorCtr="0">
-          <a:noAutofit/>
-        </a:bodyPr>
-        <a:lstStyle/>
-        <a:p>
-          <a:pPr marL="0" lvl="0" indent="0" algn="l" defTabSz="800100">
-            <a:lnSpc>
-              <a:spcPct val="100000"/>
-            </a:lnSpc>
-            <a:spcBef>
-              <a:spcPct val="0"/>
-            </a:spcBef>
-            <a:spcAft>
-              <a:spcPct val="35000"/>
-            </a:spcAft>
-            <a:buNone/>
-            <a:defRPr b="1"/>
-          </a:pPr>
-          <a:r>
-            <a:rPr lang="en-US" sz="1800" b="0" i="0" kern="1200"/>
-            <a:t>Ensuring Best Practices</a:t>
-          </a:r>
-          <a:endParaRPr lang="en-US" sz="1800" kern="1200"/>
-        </a:p>
-      </dsp:txBody>
-      <dsp:txXfrm>
-        <a:off x="4704396" y="0"/>
-        <a:ext cx="2138362" cy="604420"/>
-      </dsp:txXfrm>
-    </dsp:sp>
-    <dsp:sp modelId="{1BD5F9F5-03B7-4123-9526-0F553D9E690B}">
-      <dsp:nvSpPr>
-        <dsp:cNvPr id="0" name=""/>
-        <dsp:cNvSpPr/>
-      </dsp:nvSpPr>
-      <dsp:spPr>
-        <a:xfrm>
-          <a:off x="4704396" y="604420"/>
-          <a:ext cx="2138362" cy="2589308"/>
-        </a:xfrm>
-        <a:prstGeom prst="rect">
-          <a:avLst/>
-        </a:prstGeom>
-        <a:noFill/>
-        <a:ln>
-          <a:noFill/>
-        </a:ln>
-        <a:effectLst/>
-      </dsp:spPr>
-      <dsp:style>
-        <a:lnRef idx="0">
-          <a:scrgbClr r="0" g="0" b="0"/>
-        </a:lnRef>
-        <a:fillRef idx="0">
-          <a:scrgbClr r="0" g="0" b="0"/>
-        </a:fillRef>
-        <a:effectRef idx="0">
-          <a:scrgbClr r="0" g="0" b="0"/>
-        </a:effectRef>
-        <a:fontRef idx="minor"/>
-      </dsp:style>
-      <dsp:txBody>
-        <a:bodyPr spcFirstLastPara="0" vert="horz" wrap="square" lIns="137160" tIns="17780" rIns="17780" bIns="17780" numCol="1" spcCol="1270" anchor="t" anchorCtr="0">
-          <a:noAutofit/>
-        </a:bodyPr>
-        <a:lstStyle/>
-        <a:p>
-          <a:pPr marL="0" lvl="0" indent="0" algn="l" defTabSz="622300">
-            <a:lnSpc>
-              <a:spcPct val="100000"/>
-            </a:lnSpc>
-            <a:spcBef>
-              <a:spcPct val="0"/>
-            </a:spcBef>
-            <a:spcAft>
-              <a:spcPct val="35000"/>
-            </a:spcAft>
-            <a:buNone/>
-          </a:pPr>
-          <a:r>
-            <a:rPr lang="en-US" sz="1400" b="0" i="0" kern="1200"/>
-            <a:t>Leveraging internal and external references ensured technical rigor and practical project development.</a:t>
-          </a:r>
-          <a:endParaRPr lang="en-US" sz="1400" kern="1200"/>
-        </a:p>
-      </dsp:txBody>
-      <dsp:txXfrm>
-        <a:off x="4704396" y="604420"/>
-        <a:ext cx="2138362" cy="2589308"/>
-      </dsp:txXfrm>
-    </dsp:sp>
-  </dsp:spTree>
-</dsp:drawing>
-</file>
-
-<file path=ppt/diagrams/layout1.xml><?xml version="1.0" encoding="utf-8"?>
-<dgm:layoutDef xmlns:dgm="http://schemas.openxmlformats.org/drawingml/2006/diagram" xmlns:a="http://schemas.openxmlformats.org/drawingml/2006/main" uniqueId="urn:microsoft.com/office/officeart/2024/3/layout/hArchList1">
-  <dgm:title val="Horizontal Text Blocks"/>
-  <dgm:desc val="Short bits of text with formatted headers. Use as an easier-to-read alternative to a bulleted list."/>
-  <dgm:catLst>
-    <dgm:cat type="list" pri="100"/>
-    <dgm:cat type="timeline" pri="500"/>
-    <dgm:cat type="process" pri="600"/>
-  </dgm:catLst>
-  <dgm:sampData>
-    <dgm:dataModel>
-      <dgm:ptLst>
-        <dgm:pt modelId="0" type="doc"/>
-        <dgm:pt modelId="1">
-          <dgm:prSet phldr="1"/>
-        </dgm:pt>
-        <dgm:pt modelId="2">
-          <dgm:prSet phldr="1"/>
-        </dgm:pt>
-        <dgm:pt modelId="3">
-          <dgm:prSet phldr="1"/>
-        </dgm:pt>
-        <dgm:pt modelId="4">
-          <dgm:prSet phldr="1"/>
-        </dgm:pt>
-      </dgm:ptLst>
-      <dgm:cxnLst>
-        <dgm:cxn modelId="7" srcId="0" destId="1" srcOrd="0" destOrd="0"/>
-        <dgm:cxn modelId="8" srcId="0" destId="2" srcOrd="1" destOrd="0"/>
-        <dgm:cxn modelId="9" srcId="0" destId="3" srcOrd="2" destOrd="0"/>
-        <dgm:cxn modelId="10" srcId="0" destId="4" srcOrd="3" destOrd="0"/>
-      </dgm:cxnLst>
-      <dgm:bg/>
-      <dgm:whole/>
-    </dgm:dataModel>
-  </dgm:sampData>
-  <dgm:styleData>
-    <dgm:dataModel>
-      <dgm:ptLst>
-        <dgm:pt modelId="0" type="doc"/>
-        <dgm:pt modelId="1"/>
-        <dgm:pt modelId="2"/>
-      </dgm:ptLst>
-      <dgm:cxnLst>
-        <dgm:cxn modelId="3" srcId="0" destId="1" srcOrd="0" destOrd="0"/>
-        <dgm:cxn modelId="4" srcId="0" destId="2" srcOrd="1" destOrd="0"/>
-      </dgm:cxnLst>
-      <dgm:bg/>
-      <dgm:whole/>
-    </dgm:dataModel>
-  </dgm:styleData>
-  <dgm:clrData>
-    <dgm:dataModel>
-      <dgm:ptLst>
-        <dgm:pt modelId="0" type="doc"/>
-        <dgm:pt modelId="1"/>
-        <dgm:pt modelId="2"/>
-        <dgm:pt modelId="3"/>
-        <dgm:pt modelId="4"/>
-      </dgm:ptLst>
-      <dgm:cxnLst>
-        <dgm:cxn modelId="5" srcId="0" destId="1" srcOrd="0" destOrd="0"/>
-        <dgm:cxn modelId="6" srcId="0" destId="2" srcOrd="1" destOrd="0"/>
-        <dgm:cxn modelId="7" srcId="0" destId="3" srcOrd="2" destOrd="0"/>
-        <dgm:cxn modelId="8" srcId="0" destId="4" srcOrd="3" destOrd="0"/>
-      </dgm:cxnLst>
-      <dgm:bg/>
-      <dgm:whole/>
-    </dgm:dataModel>
-  </dgm:clrData>
-  <dgm:layoutNode name="Name0">
-    <dgm:varLst>
-      <dgm:dir/>
-      <dgm:resizeHandles val="exact"/>
-    </dgm:varLst>
-    <dgm:choose name="Name1">
-      <dgm:if name="Name2" func="var" arg="dir" op="equ" val="norm">
-        <dgm:alg type="lin">
-          <dgm:param type="vertAlign" val="t"/>
-          <dgm:param type="horzAlign" val="l"/>
-        </dgm:alg>
-      </dgm:if>
-      <dgm:else name="Name3">
-        <dgm:alg type="lin">
-          <dgm:param type="vertAlign" val="t"/>
-          <dgm:param type="horzAlign" val="r"/>
-        </dgm:alg>
-      </dgm:else>
-    </dgm:choose>
-    <dgm:presOf/>
-    <dgm:constrLst>
-      <dgm:constr type="primFontSz" for="des" forName="pictRect" op="equ" val="18"/>
-      <dgm:constr type="primFontSz" for="des" forName="textRect" refType="primFontSz" refFor="des" refForName="pictRect" op="equ" fact="0.77"/>
-      <dgm:constr type="w" for="ch" forName="compNode" refType="w"/>
-      <dgm:constr type="h" for="ch" forName="compNode" refType="h"/>
-      <dgm:constr type="h" for="des" forName="pictRect" op="equ"/>
-      <dgm:constr type="h" for="des" forName="pictRect" refType="primFontSz" refFor="des" refForName="pictRect" fact="3"/>
-      <dgm:constr type="w" for="ch" ptType="sibTrans" refType="w" refFor="ch" refForName="compNode" op="equ" fact="0.1"/>
-      <dgm:constr type="sp" refType="w" refFor="ch" refForName="compNode" op="equ" fact="0.1"/>
-    </dgm:constrLst>
-    <dgm:ruleLst/>
-    <dgm:forEach name="Name4" axis="ch" ptType="node" cnt="20">
-      <dgm:layoutNode name="compNode">
-        <dgm:alg type="composite"/>
-        <dgm:shape xmlns:r="http://schemas.openxmlformats.org/officeDocument/2006/relationships" r:blip="">
-          <dgm:adjLst/>
-        </dgm:shape>
-        <dgm:presOf axis="self"/>
-        <dgm:constrLst>
-          <dgm:constr type="h" for="ch" forName="pictRect" refType="h" fact="0.1"/>
-          <dgm:constr type="l" for="ch" forName="pictRect"/>
-          <dgm:constr type="t" for="ch" forName="pictRect"/>
-          <dgm:constr type="l" for="ch" forName="textRect"/>
-          <dgm:constr type="t" for="ch" forName="textRect" refType="b" refFor="ch" refForName="pictRect"/>
-        </dgm:constrLst>
-        <dgm:ruleLst/>
-        <dgm:layoutNode name="pictRect" styleLbl="revTx">
-          <dgm:varLst>
-            <dgm:chMax val="0"/>
-            <dgm:bulletEnabled/>
-          </dgm:varLst>
-          <dgm:alg type="tx">
-            <dgm:param type="parTxLTRAlign" val="l"/>
-            <dgm:param type="parTxRTLAlign" val="r"/>
-            <dgm:param type="txAnchorVert" val="t"/>
-          </dgm:alg>
-          <dgm:shape xmlns:r="http://schemas.openxmlformats.org/officeDocument/2006/relationships" type="rect" r:blip="">
-            <dgm:adjLst/>
-          </dgm:shape>
-          <dgm:presOf axis="self"/>
-          <dgm:choose name="choosePictRectConstraints">
-            <dgm:if name="ifPictRectConstraints" func="var" arg="dir" op="equ" val="norm">
-              <dgm:constrLst>
-                <dgm:constr type="h" refType="w" op="lte" fact="0.4"/>
-                <dgm:constr type="lMarg" val="10.8"/>
-                <dgm:constr type="rMarg" refType="primFontSz" fact="0.1"/>
-                <dgm:constr type="tMarg" refType="primFontSz" fact="0.1"/>
-                <dgm:constr type="bMarg" refType="primFontSz" fact="0.1"/>
-              </dgm:constrLst>
-            </dgm:if>
-            <dgm:else name="elsePictRectConstraints">
-              <dgm:constrLst>
-                <dgm:constr type="lMarg" refType="primFontSz" fact="0.1"/>
-                <dgm:constr type="rMarg" val="10.8"/>
-                <dgm:constr type="tMarg" refType="primFontSz" fact="0.1"/>
-                <dgm:constr type="bMarg" refType="primFontSz" fact="0.1"/>
-              </dgm:constrLst>
-            </dgm:else>
-          </dgm:choose>
-          <dgm:ruleLst>
-            <dgm:rule type="h" val="INF" fact="NaN" max="NaN"/>
-            <dgm:rule type="primFontSz" val="5" fact="NaN" max="NaN"/>
-          </dgm:ruleLst>
-        </dgm:layoutNode>
-        <dgm:layoutNode name="textRect" styleLbl="revTx">
-          <dgm:varLst>
-            <dgm:bulletEnabled/>
-          </dgm:varLst>
-          <dgm:alg type="tx">
-            <dgm:param type="parTxLTRAlign" val="l"/>
-            <dgm:param type="parTxRTLAlign" val="r"/>
-            <dgm:param type="txAnchorVert" val="t"/>
-          </dgm:alg>
-          <dgm:shape xmlns:r="http://schemas.openxmlformats.org/officeDocument/2006/relationships" type="rect" r:blip="">
-            <dgm:adjLst/>
-          </dgm:shape>
-          <dgm:presOf axis="des" ptType="node"/>
-          <dgm:choose name="chooseTextRectConstraints">
-            <dgm:if name="ifTextRectConstraints" func="var" arg="dir" op="equ" val="norm">
-              <dgm:constrLst>
-                <dgm:constr type="lMarg" val="10.8"/>
-                <dgm:constr type="rMarg" refType="primFontSz" fact="0.1"/>
-                <dgm:constr type="tMarg" refType="primFontSz" fact="0.1"/>
-                <dgm:constr type="bMarg" refType="primFontSz" fact="0.1"/>
-              </dgm:constrLst>
-            </dgm:if>
-            <dgm:else name="elseTextRectConstraints">
-              <dgm:constrLst>
-                <dgm:constr type="lMarg" refType="primFontSz" fact="0.1"/>
-                <dgm:constr type="rMarg" val="10.8"/>
-                <dgm:constr type="tMarg" refType="primFontSz" fact="0.1"/>
-                <dgm:constr type="bMarg" refType="primFontSz" fact="0.1"/>
-              </dgm:constrLst>
-            </dgm:else>
-          </dgm:choose>
-          <dgm:ruleLst>
-            <dgm:rule type="primFontSz" val="5" fact="NaN" max="NaN"/>
-          </dgm:ruleLst>
-        </dgm:layoutNode>
-      </dgm:layoutNode>
-      <dgm:forEach name="Name5" axis="followSib" ptType="sibTrans" cnt="1">
-        <dgm:layoutNode name="sibTrans">
-          <dgm:alg type="sp"/>
-          <dgm:shape xmlns:r="http://schemas.openxmlformats.org/officeDocument/2006/relationships" type="rect" r:blip="" hideGeom="1">
-            <dgm:adjLst/>
-          </dgm:shape>
-          <dgm:presOf axis="self"/>
-          <dgm:constrLst/>
-          <dgm:ruleLst/>
-        </dgm:layoutNode>
-      </dgm:forEach>
-    </dgm:forEach>
-  </dgm:layoutNode>
-  <dgm:extLst>
-    <a:ext uri="{68A01E43-0DF5-4B5B-8FA6-DAF915123BFB}">
-      <dgm1612:lstStyle xmlns:dgm1612="http://schemas.microsoft.com/office/drawing/2016/12/diagram">
-        <a:lvl1pPr>
-          <a:lnSpc>
-            <a:spcPct val="100000"/>
-          </a:lnSpc>
-          <a:defRPr b="1"/>
-        </a:lvl1pPr>
-        <a:lvl2pPr>
-          <a:lnSpc>
-            <a:spcPct val="100000"/>
-          </a:lnSpc>
-        </a:lvl2pPr>
-      </dgm1612:lstStyle>
-    </a:ext>
-  </dgm:extLst>
-</dgm:layoutDef>
-</file>
-
-<file path=ppt/diagrams/quickStyle1.xml><?xml version="1.0" encoding="utf-8"?>
-<dgm:styleDef xmlns:dgm="http://schemas.openxmlformats.org/drawingml/2006/diagram" xmlns:a="http://schemas.openxmlformats.org/drawingml/2006/main" uniqueId="urn:microsoft.com/office/officeart/2005/8/quickstyle/simple1">
-  <dgm:title val=""/>
-  <dgm:desc val=""/>
-  <dgm:catLst>
-    <dgm:cat type="simple" pri="10100"/>
-  </dgm:catLst>
-  <dgm:scene3d>
-    <a:camera prst="orthographicFront"/>
-    <a:lightRig rig="threePt" dir="t"/>
-  </dgm:scene3d>
-  <dgm:styleLbl name="node0">
-    <dgm:scene3d>
-      <a:camera prst="orthographicFront"/>
-      <a:lightRig rig="threePt" dir="t"/>
-    </dgm:scene3d>
-    <dgm:sp3d/>
-    <dgm:txPr/>
-    <dgm:style>
-      <a:lnRef idx="2">
-        <a:scrgbClr r="0" g="0" b="0"/>
-      </a:lnRef>
-      <a:fillRef idx="1">
-        <a:scrgbClr r="0" g="0" b="0"/>
-      </a:fillRef>
-      <a:effectRef idx="0">
-        <a:scrgbClr r="0" g="0" b="0"/>
-      </a:effectRef>
-      <a:fontRef idx="minor">
-        <a:schemeClr val="lt1"/>
-      </a:fontRef>
-    </dgm:style>
-  </dgm:styleLbl>
-  <dgm:styleLbl name="lnNode1">
-    <dgm:scene3d>
-      <a:camera prst="orthographicFront"/>
-      <a:lightRig rig="threePt" dir="t"/>
-    </dgm:scene3d>
-    <dgm:sp3d/>
-    <dgm:txPr/>
-    <dgm:style>
-      <a:lnRef idx="2">
-        <a:scrgbClr r="0" g="0" b="0"/>
-      </a:lnRef>
-      <a:fillRef idx="1">
-        <a:scrgbClr r="0" g="0" b="0"/>
-      </a:fillRef>
-      <a:effectRef idx="0">
-        <a:scrgbClr r="0" g="0" b="0"/>
-      </a:effectRef>
-      <a:fontRef idx="minor">
-        <a:schemeClr val="lt1"/>
-      </a:fontRef>
-    </dgm:style>
-  </dgm:styleLbl>
-  <dgm:styleLbl name="vennNode1">
-    <dgm:scene3d>
-      <a:camera prst="orthographicFront"/>
-      <a:lightRig rig="threePt" dir="t"/>
-    </dgm:scene3d>
-    <dgm:sp3d/>
-    <dgm:txPr/>
-    <dgm:style>
-      <a:lnRef idx="2">
-        <a:scrgbClr r="0" g="0" b="0"/>
-      </a:lnRef>
-      <a:fillRef idx="1">
-        <a:scrgbClr r="0" g="0" b="0"/>
-      </a:fillRef>
-      <a:effectRef idx="0">
-        <a:scrgbClr r="0" g="0" b="0"/>
-      </a:effectRef>
-      <a:fontRef idx="minor">
-        <a:schemeClr val="tx1"/>
-      </a:fontRef>
-    </dgm:style>
-  </dgm:styleLbl>
-  <dgm:styleLbl name="alignNode1">
-    <dgm:scene3d>
-      <a:camera prst="orthographicFront"/>
-      <a:lightRig rig="threePt" dir="t"/>
-    </dgm:scene3d>
-    <dgm:sp3d/>
-    <dgm:txPr/>
-    <dgm:style>
-      <a:lnRef idx="2">
-        <a:scrgbClr r="0" g="0" b="0"/>
-      </a:lnRef>
-      <a:fillRef idx="1">
-        <a:scrgbClr r="0" g="0" b="0"/>
-      </a:fillRef>
-      <a:effectRef idx="0">
-        <a:scrgbClr r="0" g="0" b="0"/>
-      </a:effectRef>
-      <a:fontRef idx="minor">
-        <a:schemeClr val="lt1"/>
-      </a:fontRef>
-    </dgm:style>
-  </dgm:styleLbl>
-  <dgm:styleLbl name="node1">
-    <dgm:scene3d>
-      <a:camera prst="orthographicFront"/>
-      <a:lightRig rig="threePt" dir="t"/>
-    </dgm:scene3d>
-    <dgm:sp3d/>
-    <dgm:txPr/>
-    <dgm:style>
-      <a:lnRef idx="2">
-        <a:scrgbClr r="0" g="0" b="0"/>
-      </a:lnRef>
-      <a:fillRef idx="1">
-        <a:scrgbClr r="0" g="0" b="0"/>
-      </a:fillRef>
-      <a:effectRef idx="0">
-        <a:scrgbClr r="0" g="0" b="0"/>
-      </a:effectRef>
-      <a:fontRef idx="minor">
-        <a:schemeClr val="lt1"/>
-      </a:fontRef>
-    </dgm:style>
-  </dgm:styleLbl>
-  <dgm:styleLbl name="node2">
-    <dgm:scene3d>
-      <a:camera prst="orthographicFront"/>
-      <a:lightRig rig="threePt" dir="t"/>
-    </dgm:scene3d>
-    <dgm:sp3d/>
-    <dgm:txPr/>
-    <dgm:style>
-      <a:lnRef idx="2">
-        <a:scrgbClr r="0" g="0" b="0"/>
-      </a:lnRef>
-      <a:fillRef idx="1">
-        <a:scrgbClr r="0" g="0" b="0"/>
-      </a:fillRef>
-      <a:effectRef idx="0">
-        <a:scrgbClr r="0" g="0" b="0"/>
-      </a:effectRef>
-      <a:fontRef idx="minor">
-        <a:schemeClr val="lt1"/>
-      </a:fontRef>
-    </dgm:style>
-  </dgm:styleLbl>
-  <dgm:styleLbl name="node3">
-    <dgm:scene3d>
-      <a:camera prst="orthographicFront"/>
-      <a:lightRig rig="threePt" dir="t"/>
-    </dgm:scene3d>
-    <dgm:sp3d/>
-    <dgm:txPr/>
-    <dgm:style>
-      <a:lnRef idx="2">
-        <a:scrgbClr r="0" g="0" b="0"/>
-      </a:lnRef>
-      <a:fillRef idx="1">
-        <a:scrgbClr r="0" g="0" b="0"/>
-      </a:fillRef>
-      <a:effectRef idx="0">
-        <a:scrgbClr r="0" g="0" b="0"/>
-      </a:effectRef>
-      <a:fontRef idx="minor">
-        <a:schemeClr val="lt1"/>
-      </a:fontRef>
-    </dgm:style>
-  </dgm:styleLbl>
-  <dgm:styleLbl name="node4">
-    <dgm:scene3d>
-      <a:camera prst="orthographicFront"/>
-      <a:lightRig rig="threePt" dir="t"/>
-    </dgm:scene3d>
-    <dgm:sp3d/>
-    <dgm:txPr/>
-    <dgm:style>
-      <a:lnRef idx="2">
-        <a:scrgbClr r="0" g="0" b="0"/>
-      </a:lnRef>
-      <a:fillRef idx="1">
-        <a:scrgbClr r="0" g="0" b="0"/>
-      </a:fillRef>
-      <a:effectRef idx="0">
-        <a:scrgbClr r="0" g="0" b="0"/>
-      </a:effectRef>
-      <a:fontRef idx="minor">
-        <a:schemeClr val="lt1"/>
-      </a:fontRef>
-    </dgm:style>
-  </dgm:styleLbl>
-  <dgm:styleLbl name="fgImgPlace1">
-    <dgm:scene3d>
-      <a:camera prst="orthographicFront"/>
-      <a:lightRig rig="threePt" dir="t"/>
-    </dgm:scene3d>
-    <dgm:sp3d/>
-    <dgm:txPr/>
-    <dgm:style>
-      <a:lnRef idx="2">
-        <a:scrgbClr r="0" g="0" b="0"/>
-      </a:lnRef>
-      <a:fillRef idx="1">
-        <a:scrgbClr r="0" g="0" b="0"/>
-      </a:fillRef>
-      <a:effectRef idx="0">
-        <a:scrgbClr r="0" g="0" b="0"/>
-      </a:effectRef>
-      <a:fontRef idx="minor"/>
-    </dgm:style>
-  </dgm:styleLbl>
-  <dgm:styleLbl name="alignImgPlace1">
-    <dgm:scene3d>
-      <a:camera prst="orthographicFront"/>
-      <a:lightRig rig="threePt" dir="t"/>
-    </dgm:scene3d>
-    <dgm:sp3d/>
-    <dgm:txPr/>
-    <dgm:style>
-      <a:lnRef idx="2">
-        <a:scrgbClr r="0" g="0" b="0"/>
-      </a:lnRef>
-      <a:fillRef idx="1">
-        <a:scrgbClr r="0" g="0" b="0"/>
-      </a:fillRef>
-      <a:effectRef idx="0">
-        <a:scrgbClr r="0" g="0" b="0"/>
-      </a:effectRef>
-      <a:fontRef idx="minor"/>
-    </dgm:style>
-  </dgm:styleLbl>
-  <dgm:styleLbl name="bgImgPlace1">
-    <dgm:scene3d>
-      <a:camera prst="orthographicFront"/>
-      <a:lightRig rig="threePt" dir="t"/>
-    </dgm:scene3d>
-    <dgm:sp3d/>
-    <dgm:txPr/>
-    <dgm:style>
-      <a:lnRef idx="2">
-        <a:scrgbClr r="0" g="0" b="0"/>
-      </a:lnRef>
-      <a:fillRef idx="1">
-        <a:scrgbClr r="0" g="0" b="0"/>
-      </a:fillRef>
-      <a:effectRef idx="0">
-        <a:scrgbClr r="0" g="0" b="0"/>
-      </a:effectRef>
-      <a:fontRef idx="minor"/>
-    </dgm:style>
-  </dgm:styleLbl>
-  <dgm:styleLbl name="sibTrans2D1">
-    <dgm:scene3d>
-      <a:camera prst="orthographicFront"/>
-      <a:lightRig rig="threePt" dir="t"/>
-    </dgm:scene3d>
-    <dgm:sp3d/>
-    <dgm:txPr/>
-    <dgm:style>
-      <a:lnRef idx="0">
-        <a:scrgbClr r="0" g="0" b="0"/>
-      </a:lnRef>
-      <a:fillRef idx="1">
-        <a:scrgbClr r="0" g="0" b="0"/>
-      </a:fillRef>
-      <a:effectRef idx="0">
-        <a:scrgbClr r="0" g="0" b="0"/>
-      </a:effectRef>
-      <a:fontRef idx="minor">
-        <a:schemeClr val="lt1"/>
-      </a:fontRef>
-    </dgm:style>
-  </dgm:styleLbl>
-  <dgm:styleLbl name="fgSibTrans2D1">
-    <dgm:scene3d>
-      <a:camera prst="orthographicFront"/>
-      <a:lightRig rig="threePt" dir="t"/>
-    </dgm:scene3d>
-    <dgm:sp3d/>
-    <dgm:txPr/>
-    <dgm:style>
-      <a:lnRef idx="0">
-        <a:scrgbClr r="0" g="0" b="0"/>
-      </a:lnRef>
-      <a:fillRef idx="1">
-        <a:scrgbClr r="0" g="0" b="0"/>
-      </a:fillRef>
-      <a:effectRef idx="0">
-        <a:scrgbClr r="0" g="0" b="0"/>
-      </a:effectRef>
-      <a:fontRef idx="minor">
-        <a:schemeClr val="lt1"/>
-      </a:fontRef>
-    </dgm:style>
-  </dgm:styleLbl>
-  <dgm:styleLbl name="bgSibTrans2D1">
-    <dgm:scene3d>
-      <a:camera prst="orthographicFront"/>
-      <a:lightRig rig="threePt" dir="t"/>
-    </dgm:scene3d>
-    <dgm:sp3d/>
-    <dgm:txPr/>
-    <dgm:style>
-      <a:lnRef idx="0">
-        <a:scrgbClr r="0" g="0" b="0"/>
-      </a:lnRef>
-      <a:fillRef idx="1">
-        <a:scrgbClr r="0" g="0" b="0"/>
-      </a:fillRef>
-      <a:effectRef idx="0">
-        <a:scrgbClr r="0" g="0" b="0"/>
-      </a:effectRef>
-      <a:fontRef idx="minor">
-        <a:schemeClr val="lt1"/>
-      </a:fontRef>
-    </dgm:style>
-  </dgm:styleLbl>
-  <dgm:styleLbl name="sibTrans1D1">
-    <dgm:scene3d>
-      <a:camera prst="orthographicFront"/>
-      <a:lightRig rig="threePt" dir="t"/>
-    </dgm:scene3d>
-    <dgm:sp3d/>
-    <dgm:txPr/>
-    <dgm:style>
-      <a:lnRef idx="1">
-        <a:scrgbClr r="0" g="0" b="0"/>
-      </a:lnRef>
-      <a:fillRef idx="0">
-        <a:scrgbClr r="0" g="0" b="0"/>
-      </a:fillRef>
-      <a:effectRef idx="0">
-        <a:scrgbClr r="0" g="0" b="0"/>
-      </a:effectRef>
-      <a:fontRef idx="minor"/>
-    </dgm:style>
-  </dgm:styleLbl>
-  <dgm:styleLbl name="callout">
-    <dgm:scene3d>
-      <a:camera prst="orthographicFront"/>
-      <a:lightRig rig="threePt" dir="t"/>
-    </dgm:scene3d>
-    <dgm:sp3d/>
-    <dgm:txPr/>
-    <dgm:style>
-      <a:lnRef idx="2">
-        <a:scrgbClr r="0" g="0" b="0"/>
-      </a:lnRef>
-      <a:fillRef idx="1">
-        <a:scrgbClr r="0" g="0" b="0"/>
-      </a:fillRef>
-      <a:effectRef idx="0">
-        <a:scrgbClr r="0" g="0" b="0"/>
-      </a:effectRef>
-      <a:fontRef idx="minor"/>
-    </dgm:style>
-  </dgm:styleLbl>
-  <dgm:styleLbl name="asst0">
-    <dgm:scene3d>
-      <a:camera prst="orthographicFront"/>
-      <a:lightRig rig="threePt" dir="t"/>
-    </dgm:scene3d>
-    <dgm:sp3d/>
-    <dgm:txPr/>
-    <dgm:style>
-      <a:lnRef idx="2">
-        <a:scrgbClr r="0" g="0" b="0"/>
-      </a:lnRef>
-      <a:fillRef idx="1">
-        <a:scrgbClr r="0" g="0" b="0"/>
-      </a:fillRef>
-      <a:effectRef idx="0">
-        <a:scrgbClr r="0" g="0" b="0"/>
-      </a:effectRef>
-      <a:fontRef idx="minor">
-        <a:schemeClr val="lt1"/>
-      </a:fontRef>
-    </dgm:style>
-  </dgm:styleLbl>
-  <dgm:styleLbl name="asst1">
-    <dgm:scene3d>
-      <a:camera prst="orthographicFront"/>
-      <a:lightRig rig="threePt" dir="t"/>
-    </dgm:scene3d>
-    <dgm:sp3d/>
-    <dgm:txPr/>
-    <dgm:style>
-      <a:lnRef idx="2">
-        <a:scrgbClr r="0" g="0" b="0"/>
-      </a:lnRef>
-      <a:fillRef idx="1">
-        <a:scrgbClr r="0" g="0" b="0"/>
-      </a:fillRef>
-      <a:effectRef idx="0">
-        <a:scrgbClr r="0" g="0" b="0"/>
-      </a:effectRef>
-      <a:fontRef idx="minor">
-        <a:schemeClr val="lt1"/>
-      </a:fontRef>
-    </dgm:style>
-  </dgm:styleLbl>
-  <dgm:styleLbl name="asst2">
-    <dgm:scene3d>
-      <a:camera prst="orthographicFront"/>
-      <a:lightRig rig="threePt" dir="t"/>
-    </dgm:scene3d>
-    <dgm:sp3d/>
-    <dgm:txPr/>
-    <dgm:style>
-      <a:lnRef idx="2">
-        <a:scrgbClr r="0" g="0" b="0"/>
-      </a:lnRef>
-      <a:fillRef idx="1">
-        <a:scrgbClr r="0" g="0" b="0"/>
-      </a:fillRef>
-      <a:effectRef idx="0">
-        <a:scrgbClr r="0" g="0" b="0"/>
-      </a:effectRef>
-      <a:fontRef idx="minor">
-        <a:schemeClr val="lt1"/>
-      </a:fontRef>
-    </dgm:style>
-  </dgm:styleLbl>
-  <dgm:styleLbl name="asst3">
-    <dgm:scene3d>
-      <a:camera prst="orthographicFront"/>
-      <a:lightRig rig="threePt" dir="t"/>
-    </dgm:scene3d>
-    <dgm:sp3d/>
-    <dgm:txPr/>
-    <dgm:style>
-      <a:lnRef idx="2">
-        <a:scrgbClr r="0" g="0" b="0"/>
-      </a:lnRef>
-      <a:fillRef idx="1">
-        <a:scrgbClr r="0" g="0" b="0"/>
-      </a:fillRef>
-      <a:effectRef idx="0">
-        <a:scrgbClr r="0" g="0" b="0"/>
-      </a:effectRef>
-      <a:fontRef idx="minor">
-        <a:schemeClr val="lt1"/>
-      </a:fontRef>
-    </dgm:style>
-  </dgm:styleLbl>
-  <dgm:styleLbl name="asst4">
-    <dgm:scene3d>
-      <a:camera prst="orthographicFront"/>
-      <a:lightRig rig="threePt" dir="t"/>
-    </dgm:scene3d>
-    <dgm:sp3d/>
-    <dgm:txPr/>
-    <dgm:style>
-      <a:lnRef idx="2">
-        <a:scrgbClr r="0" g="0" b="0"/>
-      </a:lnRef>
-      <a:fillRef idx="1">
-        <a:scrgbClr r="0" g="0" b="0"/>
-      </a:fillRef>
-      <a:effectRef idx="0">
-        <a:scrgbClr r="0" g="0" b="0"/>
-      </a:effectRef>
-      <a:fontRef idx="minor">
-        <a:schemeClr val="lt1"/>
-      </a:fontRef>
-    </dgm:style>
-  </dgm:styleLbl>
-  <dgm:styleLbl name="parChTrans2D1">
-    <dgm:scene3d>
-      <a:camera prst="orthographicFront"/>
-      <a:lightRig rig="threePt" dir="t"/>
-    </dgm:scene3d>
-    <dgm:sp3d/>
-    <dgm:txPr/>
-    <dgm:style>
-      <a:lnRef idx="2">
-        <a:scrgbClr r="0" g="0" b="0"/>
-      </a:lnRef>
-      <a:fillRef idx="1">
-        <a:scrgbClr r="0" g="0" b="0"/>
-      </a:fillRef>
-      <a:effectRef idx="0">
-        <a:scrgbClr r="0" g="0" b="0"/>
-      </a:effectRef>
-      <a:fontRef idx="minor">
-        <a:schemeClr val="lt1"/>
-      </a:fontRef>
-    </dgm:style>
-  </dgm:styleLbl>
-  <dgm:styleLbl name="parChTrans2D2">
-    <dgm:scene3d>
-      <a:camera prst="orthographicFront"/>
-      <a:lightRig rig="threePt" dir="t"/>
-    </dgm:scene3d>
-    <dgm:sp3d/>
-    <dgm:txPr/>
-    <dgm:style>
-      <a:lnRef idx="2">
-        <a:scrgbClr r="0" g="0" b="0"/>
-      </a:lnRef>
-      <a:fillRef idx="1">
-        <a:scrgbClr r="0" g="0" b="0"/>
-      </a:fillRef>
-      <a:effectRef idx="0">
-        <a:scrgbClr r="0" g="0" b="0"/>
-      </a:effectRef>
-      <a:fontRef idx="minor">
-        <a:schemeClr val="lt1"/>
-      </a:fontRef>
-    </dgm:style>
-  </dgm:styleLbl>
-  <dgm:styleLbl name="parChTrans2D3">
-    <dgm:scene3d>
-      <a:camera prst="orthographicFront"/>
-      <a:lightRig rig="threePt" dir="t"/>
-    </dgm:scene3d>
-    <dgm:sp3d/>
-    <dgm:txPr/>
-    <dgm:style>
-      <a:lnRef idx="2">
-        <a:scrgbClr r="0" g="0" b="0"/>
-      </a:lnRef>
-      <a:fillRef idx="1">
-        <a:scrgbClr r="0" g="0" b="0"/>
-      </a:fillRef>
-      <a:effectRef idx="0">
-        <a:scrgbClr r="0" g="0" b="0"/>
-      </a:effectRef>
-      <a:fontRef idx="minor">
-        <a:schemeClr val="lt1"/>
-      </a:fontRef>
-    </dgm:style>
-  </dgm:styleLbl>
-  <dgm:styleLbl name="parChTrans2D4">
-    <dgm:scene3d>
-      <a:camera prst="orthographicFront"/>
-      <a:lightRig rig="threePt" dir="t"/>
-    </dgm:scene3d>
-    <dgm:sp3d/>
-    <dgm:txPr/>
-    <dgm:style>
-      <a:lnRef idx="2">
-        <a:scrgbClr r="0" g="0" b="0"/>
-      </a:lnRef>
-      <a:fillRef idx="1">
-        <a:scrgbClr r="0" g="0" b="0"/>
-      </a:fillRef>
-      <a:effectRef idx="0">
-        <a:scrgbClr r="0" g="0" b="0"/>
-      </a:effectRef>
-      <a:fontRef idx="minor">
-        <a:schemeClr val="lt1"/>
-      </a:fontRef>
-    </dgm:style>
-  </dgm:styleLbl>
-  <dgm:styleLbl name="parChTrans1D1">
-    <dgm:scene3d>
-      <a:camera prst="orthographicFront"/>
-      <a:lightRig rig="threePt" dir="t"/>
-    </dgm:scene3d>
-    <dgm:sp3d/>
-    <dgm:txPr/>
-    <dgm:style>
-      <a:lnRef idx="2">
-        <a:scrgbClr r="0" g="0" b="0"/>
-      </a:lnRef>
-      <a:fillRef idx="0">
-        <a:scrgbClr r="0" g="0" b="0"/>
-      </a:fillRef>
-      <a:effectRef idx="0">
-        <a:scrgbClr r="0" g="0" b="0"/>
-      </a:effectRef>
-      <a:fontRef idx="minor"/>
-    </dgm:style>
-  </dgm:styleLbl>
-  <dgm:styleLbl name="parChTrans1D2">
-    <dgm:scene3d>
-      <a:camera prst="orthographicFront"/>
-      <a:lightRig rig="threePt" dir="t"/>
-    </dgm:scene3d>
-    <dgm:sp3d/>
-    <dgm:txPr/>
-    <dgm:style>
-      <a:lnRef idx="2">
-        <a:scrgbClr r="0" g="0" b="0"/>
-      </a:lnRef>
-      <a:fillRef idx="0">
-        <a:scrgbClr r="0" g="0" b="0"/>
-      </a:fillRef>
-      <a:effectRef idx="0">
-        <a:scrgbClr r="0" g="0" b="0"/>
-      </a:effectRef>
-      <a:fontRef idx="minor"/>
-    </dgm:style>
-  </dgm:styleLbl>
-  <dgm:styleLbl name="parChTrans1D3">
-    <dgm:scene3d>
-      <a:camera prst="orthographicFront"/>
-      <a:lightRig rig="threePt" dir="t"/>
-    </dgm:scene3d>
-    <dgm:sp3d/>
-    <dgm:txPr/>
-    <dgm:style>
-      <a:lnRef idx="2">
-        <a:scrgbClr r="0" g="0" b="0"/>
-      </a:lnRef>
-      <a:fillRef idx="0">
-        <a:scrgbClr r="0" g="0" b="0"/>
-      </a:fillRef>
-      <a:effectRef idx="0">
-        <a:scrgbClr r="0" g="0" b="0"/>
-      </a:effectRef>
-      <a:fontRef idx="minor"/>
-    </dgm:style>
-  </dgm:styleLbl>
-  <dgm:styleLbl name="parChTrans1D4">
-    <dgm:scene3d>
-      <a:camera prst="orthographicFront"/>
-      <a:lightRig rig="threePt" dir="t"/>
-    </dgm:scene3d>
-    <dgm:sp3d/>
-    <dgm:txPr/>
-    <dgm:style>
-      <a:lnRef idx="2">
-        <a:scrgbClr r="0" g="0" b="0"/>
-      </a:lnRef>
-      <a:fillRef idx="0">
-        <a:scrgbClr r="0" g="0" b="0"/>
-      </a:fillRef>
-      <a:effectRef idx="0">
-        <a:scrgbClr r="0" g="0" b="0"/>
-      </a:effectRef>
-      <a:fontRef idx="minor"/>
-    </dgm:style>
-  </dgm:styleLbl>
-  <dgm:styleLbl name="fgAcc1">
-    <dgm:scene3d>
-      <a:camera prst="orthographicFront"/>
-      <a:lightRig rig="threePt" dir="t"/>
-    </dgm:scene3d>
-    <dgm:sp3d/>
-    <dgm:txPr/>
-    <dgm:style>
-      <a:lnRef idx="2">
-        <a:scrgbClr r="0" g="0" b="0"/>
-      </a:lnRef>
-      <a:fillRef idx="1">
-        <a:scrgbClr r="0" g="0" b="0"/>
-      </a:fillRef>
-      <a:effectRef idx="0">
-        <a:scrgbClr r="0" g="0" b="0"/>
-      </a:effectRef>
-      <a:fontRef idx="minor"/>
-    </dgm:style>
-  </dgm:styleLbl>
-  <dgm:styleLbl name="conFgAcc1">
-    <dgm:scene3d>
-      <a:camera prst="orthographicFront"/>
-      <a:lightRig rig="threePt" dir="t"/>
-    </dgm:scene3d>
-    <dgm:sp3d/>
-    <dgm:txPr/>
-    <dgm:style>
-      <a:lnRef idx="2">
-        <a:scrgbClr r="0" g="0" b="0"/>
-      </a:lnRef>
-      <a:fillRef idx="1">
-        <a:scrgbClr r="0" g="0" b="0"/>
-      </a:fillRef>
-      <a:effectRef idx="0">
-        <a:scrgbClr r="0" g="0" b="0"/>
-      </a:effectRef>
-      <a:fontRef idx="minor"/>
-    </dgm:style>
-  </dgm:styleLbl>
-  <dgm:styleLbl name="alignAcc1">
-    <dgm:scene3d>
-      <a:camera prst="orthographicFront"/>
-      <a:lightRig rig="threePt" dir="t"/>
-    </dgm:scene3d>
-    <dgm:sp3d/>
-    <dgm:txPr/>
-    <dgm:style>
-      <a:lnRef idx="2">
-        <a:scrgbClr r="0" g="0" b="0"/>
-      </a:lnRef>
-      <a:fillRef idx="1">
-        <a:scrgbClr r="0" g="0" b="0"/>
-      </a:fillRef>
-      <a:effectRef idx="0">
-        <a:scrgbClr r="0" g="0" b="0"/>
-      </a:effectRef>
-      <a:fontRef idx="minor"/>
-    </dgm:style>
-  </dgm:styleLbl>
-  <dgm:styleLbl name="trAlignAcc1">
-    <dgm:scene3d>
-      <a:camera prst="orthographicFront"/>
-      <a:lightRig rig="threePt" dir="t"/>
-    </dgm:scene3d>
-    <dgm:sp3d/>
-    <dgm:txPr/>
-    <dgm:style>
-      <a:lnRef idx="1">
-        <a:scrgbClr r="0" g="0" b="0"/>
-      </a:lnRef>
-      <a:fillRef idx="1">
-        <a:scrgbClr r="0" g="0" b="0"/>
-      </a:fillRef>
-      <a:effectRef idx="0">
-        <a:scrgbClr r="0" g="0" b="0"/>
-      </a:effectRef>
-      <a:fontRef idx="minor"/>
-    </dgm:style>
-  </dgm:styleLbl>
-  <dgm:styleLbl name="bgAcc1">
-    <dgm:scene3d>
-      <a:camera prst="orthographicFront"/>
-      <a:lightRig rig="threePt" dir="t"/>
-    </dgm:scene3d>
-    <dgm:sp3d/>
-    <dgm:txPr/>
-    <dgm:style>
-      <a:lnRef idx="2">
-        <a:scrgbClr r="0" g="0" b="0"/>
-      </a:lnRef>
-      <a:fillRef idx="1">
-        <a:scrgbClr r="0" g="0" b="0"/>
-      </a:fillRef>
-      <a:effectRef idx="0">
-        <a:scrgbClr r="0" g="0" b="0"/>
-      </a:effectRef>
-      <a:fontRef idx="minor"/>
-    </dgm:style>
-  </dgm:styleLbl>
-  <dgm:styleLbl name="solidFgAcc1">
-    <dgm:scene3d>
-      <a:camera prst="orthographicFront"/>
-      <a:lightRig rig="threePt" dir="t"/>
-    </dgm:scene3d>
-    <dgm:sp3d/>
-    <dgm:txPr/>
-    <dgm:style>
-      <a:lnRef idx="2">
-        <a:scrgbClr r="0" g="0" b="0"/>
-      </a:lnRef>
-      <a:fillRef idx="1">
-        <a:scrgbClr r="0" g="0" b="0"/>
-      </a:fillRef>
-      <a:effectRef idx="0">
-        <a:scrgbClr r="0" g="0" b="0"/>
-      </a:effectRef>
-      <a:fontRef idx="minor"/>
-    </dgm:style>
-  </dgm:styleLbl>
-  <dgm:styleLbl name="solidAlignAcc1">
-    <dgm:scene3d>
-      <a:camera prst="orthographicFront"/>
-      <a:lightRig rig="threePt" dir="t"/>
-    </dgm:scene3d>
-    <dgm:sp3d/>
-    <dgm:txPr/>
-    <dgm:style>
-      <a:lnRef idx="2">
-        <a:scrgbClr r="0" g="0" b="0"/>
-      </a:lnRef>
-      <a:fillRef idx="1">
-        <a:scrgbClr r="0" g="0" b="0"/>
-      </a:fillRef>
-      <a:effectRef idx="0">
-        <a:scrgbClr r="0" g="0" b="0"/>
-      </a:effectRef>
-      <a:fontRef idx="minor"/>
-    </dgm:style>
-  </dgm:styleLbl>
-  <dgm:styleLbl name="solidBgAcc1">
-    <dgm:scene3d>
-      <a:camera prst="orthographicFront"/>
-      <a:lightRig rig="threePt" dir="t"/>
-    </dgm:scene3d>
-    <dgm:sp3d/>
-    <dgm:txPr/>
-    <dgm:style>
-      <a:lnRef idx="2">
-        <a:scrgbClr r="0" g="0" b="0"/>
-      </a:lnRef>
-      <a:fillRef idx="1">
-        <a:scrgbClr r="0" g="0" b="0"/>
-      </a:fillRef>
-      <a:effectRef idx="0">
-        <a:scrgbClr r="0" g="0" b="0"/>
-      </a:effectRef>
-      <a:fontRef idx="minor"/>
-    </dgm:style>
-  </dgm:styleLbl>
-  <dgm:styleLbl name="fgAccFollowNode1">
-    <dgm:scene3d>
-      <a:camera prst="orthographicFront"/>
-      <a:lightRig rig="threePt" dir="t"/>
-    </dgm:scene3d>
-    <dgm:sp3d/>
-    <dgm:txPr/>
-    <dgm:style>
-      <a:lnRef idx="2">
-        <a:scrgbClr r="0" g="0" b="0"/>
-      </a:lnRef>
-      <a:fillRef idx="1">
-        <a:scrgbClr r="0" g="0" b="0"/>
-      </a:fillRef>
-      <a:effectRef idx="0">
-        <a:scrgbClr r="0" g="0" b="0"/>
-      </a:effectRef>
-      <a:fontRef idx="minor"/>
-    </dgm:style>
-  </dgm:styleLbl>
-  <dgm:styleLbl name="alignAccFollowNode1">
-    <dgm:scene3d>
-      <a:camera prst="orthographicFront"/>
-      <a:lightRig rig="threePt" dir="t"/>
-    </dgm:scene3d>
-    <dgm:sp3d/>
-    <dgm:txPr/>
-    <dgm:style>
-      <a:lnRef idx="2">
-        <a:scrgbClr r="0" g="0" b="0"/>
-      </a:lnRef>
-      <a:fillRef idx="1">
-        <a:scrgbClr r="0" g="0" b="0"/>
-      </a:fillRef>
-      <a:effectRef idx="0">
-        <a:scrgbClr r="0" g="0" b="0"/>
-      </a:effectRef>
-      <a:fontRef idx="minor"/>
-    </dgm:style>
-  </dgm:styleLbl>
-  <dgm:styleLbl name="bgAccFollowNode1">
-    <dgm:scene3d>
-      <a:camera prst="orthographicFront"/>
-      <a:lightRig rig="threePt" dir="t"/>
-    </dgm:scene3d>
-    <dgm:sp3d/>
-    <dgm:txPr/>
-    <dgm:style>
-      <a:lnRef idx="2">
-        <a:scrgbClr r="0" g="0" b="0"/>
-      </a:lnRef>
-      <a:fillRef idx="1">
-        <a:scrgbClr r="0" g="0" b="0"/>
-      </a:fillRef>
-      <a:effectRef idx="0">
-        <a:scrgbClr r="0" g="0" b="0"/>
-      </a:effectRef>
-      <a:fontRef idx="minor"/>
-    </dgm:style>
-  </dgm:styleLbl>
-  <dgm:styleLbl name="fgAcc0">
-    <dgm:scene3d>
-      <a:camera prst="orthographicFront"/>
-      <a:lightRig rig="threePt" dir="t"/>
-    </dgm:scene3d>
-    <dgm:sp3d/>
-    <dgm:txPr/>
-    <dgm:style>
-      <a:lnRef idx="2">
-        <a:scrgbClr r="0" g="0" b="0"/>
-      </a:lnRef>
-      <a:fillRef idx="1">
-        <a:scrgbClr r="0" g="0" b="0"/>
-      </a:fillRef>
-      <a:effectRef idx="0">
-        <a:scrgbClr r="0" g="0" b="0"/>
-      </a:effectRef>
-      <a:fontRef idx="minor"/>
-    </dgm:style>
-  </dgm:styleLbl>
-  <dgm:styleLbl name="fgAcc2">
-    <dgm:scene3d>
-      <a:camera prst="orthographicFront"/>
-      <a:lightRig rig="threePt" dir="t"/>
-    </dgm:scene3d>
-    <dgm:sp3d/>
-    <dgm:txPr/>
-    <dgm:style>
-      <a:lnRef idx="2">
-        <a:scrgbClr r="0" g="0" b="0"/>
-      </a:lnRef>
-      <a:fillRef idx="1">
-        <a:scrgbClr r="0" g="0" b="0"/>
-      </a:fillRef>
-      <a:effectRef idx="0">
-        <a:scrgbClr r="0" g="0" b="0"/>
-      </a:effectRef>
-      <a:fontRef idx="minor"/>
-    </dgm:style>
-  </dgm:styleLbl>
-  <dgm:styleLbl name="fgAcc3">
-    <dgm:scene3d>
-      <a:camera prst="orthographicFront"/>
-      <a:lightRig rig="threePt" dir="t"/>
-    </dgm:scene3d>
-    <dgm:sp3d/>
-    <dgm:txPr/>
-    <dgm:style>
-      <a:lnRef idx="2">
-        <a:scrgbClr r="0" g="0" b="0"/>
-      </a:lnRef>
-      <a:fillRef idx="1">
-        <a:scrgbClr r="0" g="0" b="0"/>
-      </a:fillRef>
-      <a:effectRef idx="0">
-        <a:scrgbClr r="0" g="0" b="0"/>
-      </a:effectRef>
-      <a:fontRef idx="minor"/>
-    </dgm:style>
-  </dgm:styleLbl>
-  <dgm:styleLbl name="fgAcc4">
-    <dgm:scene3d>
-      <a:camera prst="orthographicFront"/>
-      <a:lightRig rig="threePt" dir="t"/>
-    </dgm:scene3d>
-    <dgm:sp3d/>
-    <dgm:txPr/>
-    <dgm:style>
-      <a:lnRef idx="2">
-        <a:scrgbClr r="0" g="0" b="0"/>
-      </a:lnRef>
-      <a:fillRef idx="1">
-        <a:scrgbClr r="0" g="0" b="0"/>
-      </a:fillRef>
-      <a:effectRef idx="0">
-        <a:scrgbClr r="0" g="0" b="0"/>
-      </a:effectRef>
-      <a:fontRef idx="minor"/>
-    </dgm:style>
-  </dgm:styleLbl>
-  <dgm:styleLbl name="bgShp">
-    <dgm:scene3d>
-      <a:camera prst="orthographicFront"/>
-      <a:lightRig rig="threePt" dir="t"/>
-    </dgm:scene3d>
-    <dgm:sp3d/>
-    <dgm:txPr/>
-    <dgm:style>
-      <a:lnRef idx="0">
-        <a:scrgbClr r="0" g="0" b="0"/>
-      </a:lnRef>
-      <a:fillRef idx="1">
-        <a:scrgbClr r="0" g="0" b="0"/>
-      </a:fillRef>
-      <a:effectRef idx="0">
-        <a:scrgbClr r="0" g="0" b="0"/>
-      </a:effectRef>
-      <a:fontRef idx="minor"/>
-    </dgm:style>
-  </dgm:styleLbl>
-  <dgm:styleLbl name="dkBgShp">
-    <dgm:scene3d>
-      <a:camera prst="orthographicFront"/>
-      <a:lightRig rig="threePt" dir="t"/>
-    </dgm:scene3d>
-    <dgm:sp3d/>
-    <dgm:txPr/>
-    <dgm:style>
-      <a:lnRef idx="0">
-        <a:scrgbClr r="0" g="0" b="0"/>
-      </a:lnRef>
-      <a:fillRef idx="1">
-        <a:scrgbClr r="0" g="0" b="0"/>
-      </a:fillRef>
-      <a:effectRef idx="0">
-        <a:scrgbClr r="0" g="0" b="0"/>
-      </a:effectRef>
-      <a:fontRef idx="minor"/>
-    </dgm:style>
-  </dgm:styleLbl>
-  <dgm:styleLbl name="trBgShp">
-    <dgm:scene3d>
-      <a:camera prst="orthographicFront"/>
-      <a:lightRig rig="threePt" dir="t"/>
-    </dgm:scene3d>
-    <dgm:sp3d/>
-    <dgm:txPr/>
-    <dgm:style>
-      <a:lnRef idx="0">
-        <a:scrgbClr r="0" g="0" b="0"/>
-      </a:lnRef>
-      <a:fillRef idx="1">
-        <a:scrgbClr r="0" g="0" b="0"/>
-      </a:fillRef>
-      <a:effectRef idx="0">
-        <a:scrgbClr r="0" g="0" b="0"/>
-      </a:effectRef>
-      <a:fontRef idx="minor"/>
-    </dgm:style>
-  </dgm:styleLbl>
-  <dgm:styleLbl name="fgShp">
-    <dgm:scene3d>
-      <a:camera prst="orthographicFront"/>
-      <a:lightRig rig="threePt" dir="t"/>
-    </dgm:scene3d>
-    <dgm:sp3d/>
-    <dgm:txPr/>
-    <dgm:style>
-      <a:lnRef idx="2">
-        <a:scrgbClr r="0" g="0" b="0"/>
-      </a:lnRef>
-      <a:fillRef idx="1">
-        <a:scrgbClr r="0" g="0" b="0"/>
-      </a:fillRef>
-      <a:effectRef idx="0">
-        <a:scrgbClr r="0" g="0" b="0"/>
-      </a:effectRef>
-      <a:fontRef idx="minor"/>
-    </dgm:style>
-  </dgm:styleLbl>
-  <dgm:styleLbl name="revTx">
-    <dgm:scene3d>
-      <a:camera prst="orthographicFront"/>
-      <a:lightRig rig="threePt" dir="t"/>
-    </dgm:scene3d>
-    <dgm:sp3d/>
-    <dgm:txPr/>
-    <dgm:style>
-      <a:lnRef idx="0">
-        <a:scrgbClr r="0" g="0" b="0"/>
-      </a:lnRef>
-      <a:fillRef idx="0">
-        <a:scrgbClr r="0" g="0" b="0"/>
-      </a:fillRef>
-      <a:effectRef idx="0">
-        <a:scrgbClr r="0" g="0" b="0"/>
-      </a:effectRef>
-      <a:fontRef idx="minor"/>
-    </dgm:style>
-  </dgm:styleLbl>
-</dgm:styleDef>
-</file>
-
 <file path=ppt/handoutMasters/handoutMaster1.xml><?xml version="1.0" encoding="utf-8"?>
 <p:handoutMaster xmlns:a="http://schemas.openxmlformats.org/drawingml/2006/main" xmlns:r="http://schemas.openxmlformats.org/officeDocument/2006/relationships" xmlns:p="http://schemas.openxmlformats.org/presentationml/2006/main">
   <p:cSld>
@@ -3070,7 +277,7 @@
           <a:p>
             <a:fld id="{F223FF85-4E34-4546-B772-76DFA4A6051B}" type="datetimeFigureOut">
               <a:rPr lang="en-US" smtClean="0"/>
-              <a:t>12/12/2025</a:t>
+              <a:t>12/13/2025</a:t>
             </a:fld>
             <a:endParaRPr lang="en-US"/>
           </a:p>
@@ -3263,7 +470,7 @@
           <a:p>
             <a:fld id="{1B5CC398-6116-4BD2-9FAD-9822FDA158BE}" type="datetimeFigureOut">
               <a:rPr lang="en-US" smtClean="0"/>
-              <a:t>12/12/2025</a:t>
+              <a:t>12/13/2025</a:t>
             </a:fld>
             <a:endParaRPr lang="en-US"/>
           </a:p>
@@ -3575,9 +782,8 @@
           <a:lstStyle/>
           <a:p>
             <a:r>
-              <a:rPr lang="en-US"/>
-              <a:t>AI-generated content may be incorrect.
----
+              <a:rPr lang="en-US" dirty="0"/>
+              <a:t>
 </a:t>
             </a:r>
           </a:p>
@@ -3610,181 +816,6 @@
     <p:extLst>
       <p:ext uri="{BB962C8B-B14F-4D97-AF65-F5344CB8AC3E}">
         <p14:creationId xmlns:p14="http://schemas.microsoft.com/office/powerpoint/2010/main" val="262653396"/>
-      </p:ext>
-    </p:extLst>
-  </p:cSld>
-  <p:clrMapOvr>
-    <a:masterClrMapping/>
-  </p:clrMapOvr>
-</p:notes>
-</file>
-
-<file path=ppt/notesSlides/notesSlide10.xml><?xml version="1.0" encoding="utf-8"?>
-<p:notes xmlns:a="http://schemas.openxmlformats.org/drawingml/2006/main" xmlns:r="http://schemas.openxmlformats.org/officeDocument/2006/relationships" xmlns:p="http://schemas.openxmlformats.org/presentationml/2006/main">
-  <p:cSld>
-    <p:spTree>
-      <p:nvGrpSpPr>
-        <p:cNvPr id="1" name=""/>
-        <p:cNvGrpSpPr/>
-        <p:nvPr/>
-      </p:nvGrpSpPr>
-      <p:grpSpPr>
-        <a:xfrm>
-          <a:off x="0" y="0"/>
-          <a:ext cx="0" cy="0"/>
-          <a:chOff x="0" y="0"/>
-          <a:chExt cx="0" cy="0"/>
-        </a:xfrm>
-      </p:grpSpPr>
-      <p:sp>
-        <p:nvSpPr>
-          <p:cNvPr id="2" name="Slide Image Placeholder 1"/>
-          <p:cNvSpPr>
-            <a:spLocks noGrp="1" noRot="1" noChangeAspect="1"/>
-          </p:cNvSpPr>
-          <p:nvPr>
-            <p:ph type="sldImg"/>
-          </p:nvPr>
-        </p:nvSpPr>
-        <p:spPr/>
-      </p:sp>
-      <p:sp>
-        <p:nvSpPr>
-          <p:cNvPr id="3" name="Notes Placeholder 2"/>
-          <p:cNvSpPr>
-            <a:spLocks noGrp="1"/>
-          </p:cNvSpPr>
-          <p:nvPr>
-            <p:ph type="body" idx="1"/>
-          </p:nvPr>
-        </p:nvSpPr>
-        <p:spPr/>
-        <p:txBody>
-          <a:bodyPr/>
-          <a:lstStyle/>
-          <a:p>
-            <a:r>
-              <a:rPr lang="en-US"/>
-              <a:t>Reference Materials</a:t>
-            </a:r>
-          </a:p>
-        </p:txBody>
-      </p:sp>
-      <p:sp>
-        <p:nvSpPr>
-          <p:cNvPr id="4" name="Slide Number Placeholder 3"/>
-          <p:cNvSpPr>
-            <a:spLocks noGrp="1"/>
-          </p:cNvSpPr>
-          <p:nvPr>
-            <p:ph type="sldNum" sz="quarter" idx="5"/>
-          </p:nvPr>
-        </p:nvSpPr>
-        <p:spPr/>
-        <p:txBody>
-          <a:bodyPr/>
-          <a:lstStyle/>
-          <a:p>
-            <a:fld id="{38EFF46E-6B43-41F9-9272-B566D03A251C}" type="slidenum">
-              <a:rPr lang="en-US" smtClean="0"/>
-              <a:t>12</a:t>
-            </a:fld>
-            <a:endParaRPr lang="en-US"/>
-          </a:p>
-        </p:txBody>
-      </p:sp>
-    </p:spTree>
-    <p:extLst>
-      <p:ext uri="{BB962C8B-B14F-4D97-AF65-F5344CB8AC3E}">
-        <p14:creationId xmlns:p14="http://schemas.microsoft.com/office/powerpoint/2010/main" val="3901960427"/>
-      </p:ext>
-    </p:extLst>
-  </p:cSld>
-  <p:clrMapOvr>
-    <a:masterClrMapping/>
-  </p:clrMapOvr>
-</p:notes>
-</file>
-
-<file path=ppt/notesSlides/notesSlide11.xml><?xml version="1.0" encoding="utf-8"?>
-<p:notes xmlns:a="http://schemas.openxmlformats.org/drawingml/2006/main" xmlns:r="http://schemas.openxmlformats.org/officeDocument/2006/relationships" xmlns:p="http://schemas.openxmlformats.org/presentationml/2006/main">
-  <p:cSld>
-    <p:spTree>
-      <p:nvGrpSpPr>
-        <p:cNvPr id="1" name=""/>
-        <p:cNvGrpSpPr/>
-        <p:nvPr/>
-      </p:nvGrpSpPr>
-      <p:grpSpPr>
-        <a:xfrm>
-          <a:off x="0" y="0"/>
-          <a:ext cx="0" cy="0"/>
-          <a:chOff x="0" y="0"/>
-          <a:chExt cx="0" cy="0"/>
-        </a:xfrm>
-      </p:grpSpPr>
-      <p:sp>
-        <p:nvSpPr>
-          <p:cNvPr id="2" name="Slide Image Placeholder 1"/>
-          <p:cNvSpPr>
-            <a:spLocks noGrp="1" noRot="1" noChangeAspect="1"/>
-          </p:cNvSpPr>
-          <p:nvPr>
-            <p:ph type="sldImg"/>
-          </p:nvPr>
-        </p:nvSpPr>
-        <p:spPr/>
-      </p:sp>
-      <p:sp>
-        <p:nvSpPr>
-          <p:cNvPr id="3" name="Notes Placeholder 2"/>
-          <p:cNvSpPr>
-            <a:spLocks noGrp="1"/>
-          </p:cNvSpPr>
-          <p:nvPr>
-            <p:ph type="body" idx="1"/>
-          </p:nvPr>
-        </p:nvSpPr>
-        <p:spPr/>
-        <p:txBody>
-          <a:bodyPr/>
-          <a:lstStyle/>
-          <a:p>
-            <a:r>
-              <a:rPr lang="en-US"/>
-              <a:t>
-The project drew upon several key resources for implementation and validation. Internal materials included project scripts and notebooks located in the `src/` and `notebooks/` directories, as well as the `latest_readme.md` file, which provided detailed workflow descriptions and team assignments. External references comprised documentation for widely used libraries such as scikit-learn and scikit-image, which were instrumental in model training and feature extraction. These resources ensured adherence to best practices and facilitated efficient development. By leveraging both internal and external references, the project maintained a strong foundation of technical rigor and practical applicability.</a:t>
-            </a:r>
-          </a:p>
-        </p:txBody>
-      </p:sp>
-      <p:sp>
-        <p:nvSpPr>
-          <p:cNvPr id="4" name="Slide Number Placeholder 3"/>
-          <p:cNvSpPr>
-            <a:spLocks noGrp="1"/>
-          </p:cNvSpPr>
-          <p:nvPr>
-            <p:ph type="sldNum" sz="quarter" idx="5"/>
-          </p:nvPr>
-        </p:nvSpPr>
-        <p:spPr/>
-        <p:txBody>
-          <a:bodyPr/>
-          <a:lstStyle/>
-          <a:p>
-            <a:fld id="{38EFF46E-6B43-41F9-9272-B566D03A251C}" type="slidenum">
-              <a:rPr lang="en-US" smtClean="0"/>
-              <a:t>13</a:t>
-            </a:fld>
-            <a:endParaRPr lang="en-US"/>
-          </a:p>
-        </p:txBody>
-      </p:sp>
-    </p:spTree>
-    <p:extLst>
-      <p:ext uri="{BB962C8B-B14F-4D97-AF65-F5344CB8AC3E}">
-        <p14:creationId xmlns:p14="http://schemas.microsoft.com/office/powerpoint/2010/main" val="2304896861"/>
       </p:ext>
     </p:extLst>
   </p:cSld>
@@ -3839,9 +870,9 @@
           <a:lstStyle/>
           <a:p>
             <a:r>
-              <a:rPr lang="en-US"/>
+              <a:rPr lang="en-US" dirty="0"/>
               <a:t>
-The Cricket Object Detection Project aims to detect and classify cricket-related objects such as bats, balls, stumps, and no_object at a granular grid-cell level within images. This project was developed as part of the IIT Bombay Executive Education Machine Learning program. The primary goal is to create a robust pipeline that can accurately identify these objects using classical machine learning techniques. The approach involves several key steps: manual annotation of images, feature extraction using methods like Histogram of Oriented Gradients (HOG) and grayscale transformations, and training models such as Random Forest and K-Nearest Neighbors (KNN). Visualization plays a crucial role in validating predictions and understanding model performance. This project emphasizes practical implementation of ML concepts, including data preprocessing, annotation, feature engineering, and evaluation metrics. By focusing on classical ML models rather than deep learning, the project demonstrates how traditional algorithms can still deliver effective results for structured tasks when combined with well-engineered features. The workflow also highlights the importance of consistent annotation and preprocessing, which are critical for achieving reliable outcomes. Ultimately, this project serves as a comprehensive case study in applying machine learning to a real-world sports analytics problem, showcasing both technical rigor and practical insights.</a:t>
+</a:t>
             </a:r>
           </a:p>
         </p:txBody>
@@ -3926,11 +957,7 @@
           <a:bodyPr/>
           <a:lstStyle/>
           <a:p>
-            <a:r>
-              <a:rPr lang="en-US"/>
-              <a:t>
-The project is organized into a well-defined folder structure to ensure clarity and maintainability. The root directory, `cricket_object_detection/`, contains several subfolders and files: `data/` holds raw, training, and testing images along with annotations; `models/` stores saved machine learning models; `outputs/` includes CSV files, reports, and visualizations generated during the workflow; `src/` contains source code scripts for preprocessing, annotation, feature extraction, and pipeline execution; `requirements.txt` lists all dependencies required for the project; `README.md` provides an overview and instructions for setup; and `TASKS.csv` is used for tracking tasks and progress. This structure facilitates modular development and easy navigation, ensuring that each component of the project is logically separated. Such organization is essential for collaborative projects and reproducibility, as it allows team members to quickly locate resources and understand the workflow without ambiguity.</a:t>
-            </a:r>
+            <a:endParaRPr lang="en-US" dirty="0"/>
           </a:p>
         </p:txBody>
       </p:sp>
@@ -4033,9 +1060,9 @@
           <a:lstStyle/>
           <a:p>
             <a:r>
-              <a:rPr lang="en-US"/>
+              <a:rPr lang="en-US" dirty="0"/>
               <a:t>
-The project is organized into a well-defined folder structure to ensure clarity and maintainability. The root directory, `cricket_object_detection/`, contains several subfolders and files: `data/` holds raw, training, and testing images along with annotations; `models/` stores saved machine learning models; `outputs/` includes CSV files, reports, and visualizations generated during the workflow; `src/` contains source code scripts for preprocessing, annotation, feature extraction, and pipeline execution; `requirements.txt` lists all dependencies required for the project; `README.md` provides an overview and instructions for setup; and `TASKS.csv` is used for tracking tasks and progress. This structure facilitates modular development and easy navigation, ensuring that each component of the project is logically separated. Such organization is essential for collaborative projects and reproducibility, as it allows team members to quickly locate resources and understand the workflow without ambiguity.</a:t>
+</a:t>
             </a:r>
           </a:p>
         </p:txBody>
@@ -4215,9 +1242,9 @@
           <a:lstStyle/>
           <a:p>
             <a:r>
-              <a:rPr lang="en-US"/>
+              <a:rPr lang="en-US" dirty="0"/>
               <a:t>
-The project relies on several key scripts housed in the `src/` directory. `preprocess.py` handles image resizing and cropping to ensure uniformity across the dataset. `annotate.py` provides utilities for manual annotation, enabling interactive tagging of grid cells. `annotation_to_csv.py` converts annotation data into a structured CSV format for downstream processing. `extract_features.py` is responsible for feature extraction, applying techniques like HOG and grayscale transformations to each grid cell. The most comprehensive script, `cell_level_pipeline.py`, orchestrates the entire pipeline, including feature extraction, model training, evaluation, and visualization. This modular approach allows for flexibility and scalability, enabling individual components to be updated or replaced without disrupting the overall workflow. By organizing functionality into distinct scripts, the project promotes clean code practices and facilitates debugging and maintenance.</a:t>
+</a:t>
             </a:r>
           </a:p>
         </p:txBody>
@@ -4303,9 +1330,36 @@
           <a:lstStyle/>
           <a:p>
             <a:r>
-              <a:rPr lang="en-US"/>
+              <a:rPr lang="en-US" dirty="0"/>
               <a:t>
-Two classical machine learning models were employed: Random Forest and K-Nearest Neighbors (KNN). Both models were trained on cell-level features extracted from annotated images. Random Forest, an ensemble method, offers robustness and handles feature interactions effectively, while KNN provides simplicity and interpretability. Evaluation was conducted using standard metrics such as accuracy, precision, recall, and F1-score, which were visualized through bar charts for easy comparison. Random Forest generally outperformed KNN in terms of accuracy and precision, though KNN demonstrated faster training times. Visualizations of predictions were generated for multiple images per model, overlaying grid cells with color-coded labels to illustrate classification performance. These evaluations highlight the trade-offs between model complexity, accuracy, and computational efficiency, providing valuable insights for selecting appropriate algorithms in similar tasks.</a:t>
+Two classical machine learning models were employed: Random Forest and K-Nearest Neighbors (KNN). Both models were trained on cell-level features extracted from annotated images. </a:t>
+            </a:r>
+          </a:p>
+          <a:p>
+            <a:endParaRPr lang="en-US" dirty="0"/>
+          </a:p>
+          <a:p>
+            <a:r>
+              <a:rPr lang="en-US" dirty="0"/>
+              <a:t>Random Forest, an ensemble method, offers robustness and handles feature interactions effectively, while KNN provides simplicity and interpretability. Evaluation was conducted using standard metrics such as accuracy, precision, recall, and F1-score, which were visualized through bar charts for easy comparison. </a:t>
+            </a:r>
+          </a:p>
+          <a:p>
+            <a:endParaRPr lang="en-US" dirty="0"/>
+          </a:p>
+          <a:p>
+            <a:r>
+              <a:rPr lang="en-US" dirty="0"/>
+              <a:t>Random Forest generally outperformed KNN in terms of accuracy and precision, though KNN demonstrated faster training times. Visualizations of predictions were generated for multiple images per model, overlaying grid cells with color-coded labels to illustrate classification performance. </a:t>
+            </a:r>
+          </a:p>
+          <a:p>
+            <a:endParaRPr lang="en-US" dirty="0"/>
+          </a:p>
+          <a:p>
+            <a:r>
+              <a:rPr lang="en-US" dirty="0"/>
+              <a:t>These evaluations highlight the trade-offs between model complexity, accuracy, and computational efficiency, providing valuable insights for selecting appropriate algorithms in similar tasks.</a:t>
             </a:r>
           </a:p>
         </p:txBody>
@@ -4391,9 +1445,17 @@
           <a:lstStyle/>
           <a:p>
             <a:r>
-              <a:rPr lang="en-US"/>
+              <a:rPr lang="en-US" dirty="0"/>
               <a:t>
-Visualization is a cornerstone of this project, enabling intuitive interpretation of model predictions and performance. Predicted cell labels were overlaid on images using colored rectangles: gray for no_object, red for ball, green for bat, and blue for stump. These overlays provide a clear visual representation of how well the models identify objects within grid cells. Comparative visualizations were created for three images per model, allowing side-by-side analysis of Random Forest and KNN outputs. Additionally, bar charts summarizing evaluation metrics such as precision, recall, F1-score, and accuracy were included to complement qualitative assessments with quantitative data. These visual tools not only aid in debugging and refining models but also enhance communication of results to stakeholders, making complex data more accessible and actionable.</a:t>
+Visualization is a cornerstone of this project, enabling intuitive interpretation of model predictions and performance. Predicted cell labels were overlaid on images using colored rectangles: gray for </a:t>
+            </a:r>
+            <a:r>
+              <a:rPr lang="en-US" dirty="0" err="1"/>
+              <a:t>no_object</a:t>
+            </a:r>
+            <a:r>
+              <a:rPr lang="en-US" dirty="0"/>
+              <a:t>, red for ball, green for bat, and blue for stump. These overlays provide a clear visual representation of how well the models identify objects within grid cells. Comparative visualizations were created for three images per model, allowing side-by-side analysis of Random Forest and KNN outputs. Additionally, bar charts summarizing evaluation metrics such as precision, recall, F1-score, and accuracy were included to complement qualitative assessments with quantitative data. These visual tools not only aid in debugging and refining models but also enhance communication of results to stakeholders, making complex data more accessible and actionable.</a:t>
             </a:r>
           </a:p>
         </p:txBody>
@@ -4479,7 +1541,7 @@
           <a:lstStyle/>
           <a:p>
             <a:r>
-              <a:rPr lang="en-US"/>
+              <a:rPr lang="en-US" dirty="0"/>
               <a:t>
 Several key learnings emerged from this project. First, consistent annotation and preprocessing are critical for achieving reliable model performance; inconsistencies can lead to significant drops in accuracy. Second, feature engineering using techniques like HOG and grayscale proved highly effective for classical machine learning models, underscoring the importance of thoughtful feature selection. Third, while aggregated features can support image-level tasks, cell-level features are essential for fine-grained classification. The comparison between Random Forest and KNN highlighted trade-offs between accuracy and computational speed, informing decisions about model selection based on project constraints. Finally, visualization was invaluable for debugging and understanding model behavior, reinforcing its role as a best practice in machine learning workflows. Challenges included managing annotation complexity and ensuring scalability for larger datasets, which could be addressed through automation and optimized pipelines in future iterations.</a:t>
             </a:r>
@@ -4766,7 +1828,7 @@
           <a:p>
             <a:fld id="{F7F4CBCF-2EA5-5248-B352-49E9FE7B89CF}" type="datetime1">
               <a:rPr lang="en-US" smtClean="0"/>
-              <a:t>12/12/2025</a:t>
+              <a:t>12/13/2025</a:t>
             </a:fld>
             <a:endParaRPr lang="en-US"/>
           </a:p>
@@ -5009,7 +2071,7 @@
             <a:fld id="{5E18E063-8567-3D4A-98A7-68096F5E3E81}" type="datetime1">
               <a:rPr lang="en-US" smtClean="0"/>
               <a:pPr/>
-              <a:t>12/12/2025</a:t>
+              <a:t>12/13/2025</a:t>
             </a:fld>
             <a:endParaRPr lang="en-US"/>
           </a:p>
@@ -5399,7 +2461,7 @@
           <a:p>
             <a:fld id="{48F1EE65-9B75-D34D-9F02-D2E3965E0F0C}" type="datetime1">
               <a:rPr lang="en-US" smtClean="0"/>
-              <a:t>12/12/2025</a:t>
+              <a:t>12/13/2025</a:t>
             </a:fld>
             <a:endParaRPr lang="en-US"/>
           </a:p>
@@ -5844,7 +2906,7 @@
           <a:p>
             <a:fld id="{BCD35447-68C7-CB49-B79C-2828CACD9C53}" type="datetime1">
               <a:rPr lang="en-US" smtClean="0"/>
-              <a:t>12/12/2025</a:t>
+              <a:t>12/13/2025</a:t>
             </a:fld>
             <a:endParaRPr lang="en-US"/>
           </a:p>
@@ -6068,7 +3130,7 @@
           <a:p>
             <a:fld id="{A3F75FBB-52A4-3947-9071-787C670AA4F3}" type="datetime1">
               <a:rPr lang="en-US" smtClean="0"/>
-              <a:t>12/12/2025</a:t>
+              <a:t>12/13/2025</a:t>
             </a:fld>
             <a:endParaRPr lang="en-US"/>
           </a:p>
@@ -6313,7 +3375,7 @@
           <a:p>
             <a:fld id="{13480301-390C-8846-A6E3-CD2894BE139C}" type="datetime1">
               <a:rPr lang="en-US" smtClean="0"/>
-              <a:t>12/12/2025</a:t>
+              <a:t>12/13/2025</a:t>
             </a:fld>
             <a:endParaRPr lang="en-US"/>
           </a:p>
@@ -6555,7 +3617,7 @@
           <a:p>
             <a:fld id="{C275CAB1-537D-AB4A-86AF-498D16CC8BFB}" type="datetime1">
               <a:rPr lang="en-US" smtClean="0"/>
-              <a:t>12/12/2025</a:t>
+              <a:t>12/13/2025</a:t>
             </a:fld>
             <a:endParaRPr lang="en-US"/>
           </a:p>
@@ -6797,7 +3859,7 @@
           <a:p>
             <a:fld id="{9C9067C8-B2FA-9242-99D3-2AAAEA57F6E3}" type="datetime1">
               <a:rPr lang="en-US" smtClean="0"/>
-              <a:t>12/12/2025</a:t>
+              <a:t>12/13/2025</a:t>
             </a:fld>
             <a:endParaRPr lang="en-US"/>
           </a:p>
@@ -7039,7 +4101,7 @@
           <a:p>
             <a:fld id="{F2121301-BC9F-2048-8BD9-9D5533C3FEB8}" type="datetime1">
               <a:rPr lang="en-US" smtClean="0"/>
-              <a:t>12/12/2025</a:t>
+              <a:t>12/13/2025</a:t>
             </a:fld>
             <a:endParaRPr lang="en-US"/>
           </a:p>
@@ -7425,7 +4487,7 @@
           <a:p>
             <a:fld id="{B5FC2305-971C-BE4F-9A36-18A81034BC3D}" type="datetime1">
               <a:rPr lang="en-US" smtClean="0"/>
-              <a:t>12/12/2025</a:t>
+              <a:t>12/13/2025</a:t>
             </a:fld>
             <a:endParaRPr lang="en-US"/>
           </a:p>
@@ -7807,7 +4869,7 @@
           <a:p>
             <a:fld id="{6FAC4171-8BCA-1740-A615-A2F6C531D1D6}" type="datetime1">
               <a:rPr lang="en-US" smtClean="0"/>
-              <a:t>12/12/2025</a:t>
+              <a:t>12/13/2025</a:t>
             </a:fld>
             <a:endParaRPr lang="en-US"/>
           </a:p>
@@ -8063,7 +5125,7 @@
           <a:p>
             <a:fld id="{192DDA33-D578-2640-B42E-CEBF81697F81}" type="datetime1">
               <a:rPr lang="en-US" smtClean="0"/>
-              <a:t>12/12/2025</a:t>
+              <a:t>12/13/2025</a:t>
             </a:fld>
             <a:endParaRPr lang="en-US"/>
           </a:p>
@@ -8482,7 +5544,7 @@
           <a:p>
             <a:fld id="{C5987AE8-F78F-CC42-9328-6043D017DE32}" type="datetime1">
               <a:rPr lang="en-US" smtClean="0"/>
-              <a:t>12/12/2025</a:t>
+              <a:t>12/13/2025</a:t>
             </a:fld>
             <a:endParaRPr lang="en-US"/>
           </a:p>
@@ -8902,7 +5964,7 @@
           <a:p>
             <a:fld id="{649CB69A-2A75-F048-B0D8-F5328E5C18F8}" type="datetime1">
               <a:rPr lang="en-US" smtClean="0"/>
-              <a:t>12/12/2025</a:t>
+              <a:t>12/13/2025</a:t>
             </a:fld>
             <a:endParaRPr lang="en-US"/>
           </a:p>
@@ -9322,7 +6384,7 @@
           <a:p>
             <a:fld id="{CB04B35F-5075-784C-9FF4-85B4381265F5}" type="datetime1">
               <a:rPr lang="en-US" smtClean="0"/>
-              <a:t>12/12/2025</a:t>
+              <a:t>12/13/2025</a:t>
             </a:fld>
             <a:endParaRPr lang="en-US"/>
           </a:p>
@@ -9763,7 +6825,7 @@
           <a:p>
             <a:fld id="{D90E99A5-9B5B-654B-AFAE-033D0C138539}" type="datetime1">
               <a:rPr lang="en-US" smtClean="0"/>
-              <a:t>12/12/2025</a:t>
+              <a:t>12/13/2025</a:t>
             </a:fld>
             <a:endParaRPr lang="en-US"/>
           </a:p>
@@ -10199,7 +7261,7 @@
           <a:p>
             <a:fld id="{018FC212-A04D-EC40-A3FF-C37DE82847B2}" type="datetime1">
               <a:rPr lang="en-US" smtClean="0"/>
-              <a:t>12/12/2025</a:t>
+              <a:t>12/13/2025</a:t>
             </a:fld>
             <a:endParaRPr lang="en-US"/>
           </a:p>
@@ -10652,7 +7714,7 @@
           <a:p>
             <a:fld id="{BE0F28E2-1197-1343-806E-BC1F6DA16A33}" type="datetime1">
               <a:rPr lang="en-US" smtClean="0"/>
-              <a:t>12/12/2025</a:t>
+              <a:t>12/13/2025</a:t>
             </a:fld>
             <a:endParaRPr lang="en-US"/>
           </a:p>
@@ -11110,7 +8172,7 @@
           <a:p>
             <a:fld id="{BE0F28E2-1197-1343-806E-BC1F6DA16A33}" type="datetime1">
               <a:rPr lang="en-US" smtClean="0"/>
-              <a:t>12/12/2025</a:t>
+              <a:t>12/13/2025</a:t>
             </a:fld>
             <a:endParaRPr lang="en-US"/>
           </a:p>
@@ -11573,7 +8635,7 @@
           <a:p>
             <a:fld id="{3C3C2431-2FCD-D448-9C7B-DAD39E7098D4}" type="datetime1">
               <a:rPr lang="en-US" smtClean="0"/>
-              <a:t>12/12/2025</a:t>
+              <a:t>12/13/2025</a:t>
             </a:fld>
             <a:endParaRPr lang="en-US"/>
           </a:p>
@@ -12023,7 +9085,7 @@
           <a:p>
             <a:fld id="{6AF84008-CECF-4C4E-8814-FA8FA71DAEEA}" type="datetime1">
               <a:rPr lang="en-US" smtClean="0"/>
-              <a:t>12/12/2025</a:t>
+              <a:t>12/13/2025</a:t>
             </a:fld>
             <a:endParaRPr lang="en-US"/>
           </a:p>
@@ -12393,7 +9455,7 @@
           <a:p>
             <a:fld id="{5F3A8F1C-349F-4D40-A069-7D38D41B5261}" type="datetime1">
               <a:rPr lang="en-US" smtClean="0"/>
-              <a:t>12/12/2025</a:t>
+              <a:t>12/13/2025</a:t>
             </a:fld>
             <a:endParaRPr lang="en-US"/>
           </a:p>
@@ -12659,7 +9721,7 @@
           <a:p>
             <a:fld id="{75D6F905-E9A0-F246-B3D1-2727C4EFD37F}" type="datetime1">
               <a:rPr lang="en-US" smtClean="0"/>
-              <a:t>12/12/2025</a:t>
+              <a:t>12/13/2025</a:t>
             </a:fld>
             <a:endParaRPr lang="en-US"/>
           </a:p>
@@ -13053,7 +10115,7 @@
           <a:p>
             <a:fld id="{93F60926-2D52-7E43-9B2B-7315B4A2BF0B}" type="datetime1">
               <a:rPr lang="en-US" smtClean="0"/>
-              <a:t>12/12/2025</a:t>
+              <a:t>12/13/2025</a:t>
             </a:fld>
             <a:endParaRPr lang="en-US"/>
           </a:p>
@@ -13423,7 +10485,7 @@
           <a:p>
             <a:fld id="{9B5E51FC-CBC9-9843-92FD-38CACF39D773}" type="datetime1">
               <a:rPr lang="en-US" smtClean="0"/>
-              <a:t>12/12/2025</a:t>
+              <a:t>12/13/2025</a:t>
             </a:fld>
             <a:endParaRPr lang="en-US"/>
           </a:p>
@@ -13889,7 +10951,7 @@
           <a:p>
             <a:fld id="{7B7AA9A6-1052-6144-AEF7-DAB3DC5C1870}" type="datetime1">
               <a:rPr lang="en-US" smtClean="0"/>
-              <a:t>12/12/2025</a:t>
+              <a:t>12/13/2025</a:t>
             </a:fld>
             <a:endParaRPr lang="en-US"/>
           </a:p>
@@ -14355,7 +11417,7 @@
           <a:p>
             <a:fld id="{3FE5D550-C18F-9046-9823-1666101C984D}" type="datetime1">
               <a:rPr lang="en-US" smtClean="0"/>
-              <a:t>12/12/2025</a:t>
+              <a:t>12/13/2025</a:t>
             </a:fld>
             <a:endParaRPr lang="en-US"/>
           </a:p>
@@ -14742,7 +11804,7 @@
           <a:p>
             <a:fld id="{345EA323-74B6-5848-92CE-4C72A64B8493}" type="datetime1">
               <a:rPr lang="en-US" smtClean="0"/>
-              <a:t>12/12/2025</a:t>
+              <a:t>12/13/2025</a:t>
             </a:fld>
             <a:endParaRPr lang="en-US"/>
           </a:p>
@@ -15121,7 +12183,7 @@
           <a:p>
             <a:fld id="{7EB7FF3F-DA9F-314F-9D49-20971D537C61}" type="datetime1">
               <a:rPr lang="en-US" smtClean="0"/>
-              <a:t>12/12/2025</a:t>
+              <a:t>12/13/2025</a:t>
             </a:fld>
             <a:endParaRPr lang="en-US"/>
           </a:p>
@@ -15394,7 +12456,7 @@
             <a:fld id="{BB684DC2-C5AB-E14B-8633-21D19F683F0B}" type="datetime1">
               <a:rPr lang="en-US" smtClean="0"/>
               <a:pPr/>
-              <a:t>12/12/2025</a:t>
+              <a:t>12/13/2025</a:t>
             </a:fld>
             <a:endParaRPr lang="en-US"/>
           </a:p>
@@ -15657,7 +12719,7 @@
           <a:p>
             <a:fld id="{9195CB68-20BB-7D4A-9E92-9AD71D038F2F}" type="datetime1">
               <a:rPr lang="en-US" smtClean="0"/>
-              <a:t>12/12/2025</a:t>
+              <a:t>12/13/2025</a:t>
             </a:fld>
             <a:endParaRPr lang="en-US"/>
           </a:p>
@@ -15994,7 +13056,7 @@
           <a:p>
             <a:fld id="{FAF93496-2377-444C-B645-EBE751409D0E}" type="datetime1">
               <a:rPr lang="en-US" smtClean="0"/>
-              <a:t>12/12/2025</a:t>
+              <a:t>12/13/2025</a:t>
             </a:fld>
             <a:endParaRPr lang="en-US"/>
           </a:p>
@@ -16429,7 +13491,7 @@
             <a:fld id="{B29FD2E1-2E7E-4E47-A0E4-B8C330155E6A}" type="datetime1">
               <a:rPr lang="en-US" smtClean="0"/>
               <a:pPr/>
-              <a:t>12/12/2025</a:t>
+              <a:t>12/13/2025</a:t>
             </a:fld>
             <a:endParaRPr lang="en-US"/>
           </a:p>
@@ -16769,7 +13831,7 @@
           <a:p>
             <a:fld id="{55872412-C725-2842-8141-6F8DA99B275E}" type="datetime1">
               <a:rPr lang="en-US" smtClean="0"/>
-              <a:t>12/12/2025</a:t>
+              <a:t>12/13/2025</a:t>
             </a:fld>
             <a:endParaRPr lang="en-US"/>
           </a:p>
@@ -17129,7 +14191,7 @@
             <a:fld id="{EEC1C73B-E8EA-3F4D-BC6B-13568C609C15}" type="datetime1">
               <a:rPr lang="en-US" smtClean="0"/>
               <a:pPr/>
-              <a:t>12/12/2025</a:t>
+              <a:t>12/13/2025</a:t>
             </a:fld>
             <a:endParaRPr lang="en-US"/>
           </a:p>
@@ -17521,7 +14583,7 @@
           <a:p>
             <a:fld id="{60E31574-77A2-5049-8555-8B5875AD8BC3}" type="datetime1">
               <a:rPr lang="en-US" smtClean="0"/>
-              <a:t>12/12/2025</a:t>
+              <a:t>12/13/2025</a:t>
             </a:fld>
             <a:endParaRPr lang="en-US"/>
           </a:p>
@@ -17918,7 +14980,7 @@
           <a:p>
             <a:fld id="{BE0F28E2-1197-1343-806E-BC1F6DA16A33}" type="datetime1">
               <a:rPr lang="en-US" smtClean="0"/>
-              <a:t>12/12/2025</a:t>
+              <a:t>12/13/2025</a:t>
             </a:fld>
             <a:endParaRPr lang="en-US"/>
           </a:p>
@@ -18270,7 +15332,7 @@
             <a:fld id="{526E19FE-7254-FB46-9FD2-44BC5921542B}" type="datetime1">
               <a:rPr lang="en-US" smtClean="0"/>
               <a:pPr/>
-              <a:t>12/12/2025</a:t>
+              <a:t>12/13/2025</a:t>
             </a:fld>
             <a:endParaRPr lang="en-US"/>
           </a:p>
@@ -18536,7 +15598,7 @@
           <a:p>
             <a:fld id="{2138E274-D707-074B-90C0-1378B345261A}" type="datetime1">
               <a:rPr lang="en-US" smtClean="0"/>
-              <a:t>12/12/2025</a:t>
+              <a:t>12/13/2025</a:t>
             </a:fld>
             <a:endParaRPr lang="en-US"/>
           </a:p>
@@ -19255,7 +16317,7 @@
           <a:p>
             <a:fld id="{88E87FA6-3C50-8748-8507-409D2A1BA905}" type="datetime1">
               <a:rPr lang="en-US" smtClean="0"/>
-              <a:t>12/12/2025</a:t>
+              <a:t>12/13/2025</a:t>
             </a:fld>
             <a:endParaRPr lang="en-US"/>
           </a:p>
@@ -19587,7 +16649,7 @@
             <a:fld id="{09DD0BF5-CA27-A04C-967E-C46BC4852727}" type="datetime1">
               <a:rPr lang="en-US" smtClean="0"/>
               <a:pPr/>
-              <a:t>12/12/2025</a:t>
+              <a:t>12/13/2025</a:t>
             </a:fld>
             <a:endParaRPr lang="en-US"/>
           </a:p>
@@ -19885,7 +16947,7 @@
             <a:fld id="{67464449-D5FC-7145-944F-5DCEC882B5C4}" type="datetime1">
               <a:rPr lang="en-US" smtClean="0"/>
               <a:pPr/>
-              <a:t>12/12/2025</a:t>
+              <a:t>12/13/2025</a:t>
             </a:fld>
             <a:endParaRPr lang="en-US"/>
           </a:p>
@@ -20232,7 +17294,7 @@
           <a:p>
             <a:fld id="{A4EF2610-7DF8-C942-A8A1-C05E61FE4E13}" type="datetime1">
               <a:rPr lang="en-US" smtClean="0"/>
-              <a:t>12/12/2025</a:t>
+              <a:t>12/13/2025</a:t>
             </a:fld>
             <a:endParaRPr lang="en-US"/>
           </a:p>
@@ -20482,7 +17544,7 @@
           <a:p>
             <a:fld id="{93274EE0-8EE6-BB42-BF21-111D3EB8AA70}" type="datetime1">
               <a:rPr lang="en-US" smtClean="0"/>
-              <a:t>12/12/2025</a:t>
+              <a:t>12/13/2025</a:t>
             </a:fld>
             <a:endParaRPr lang="en-US"/>
           </a:p>
@@ -20989,7 +18051,7 @@
           <a:p>
             <a:fld id="{E110005D-EEDD-DA40-A727-ED7897336E79}" type="datetime1">
               <a:rPr lang="en-US" smtClean="0"/>
-              <a:t>12/12/2025</a:t>
+              <a:t>12/13/2025</a:t>
             </a:fld>
             <a:endParaRPr lang="en-US"/>
           </a:p>
@@ -21152,7 +18214,7 @@
           <a:p>
             <a:fld id="{917F45F0-C73C-6741-AD8D-EA52530DA377}" type="datetime1">
               <a:rPr lang="en-US" smtClean="0"/>
-              <a:t>12/12/2025</a:t>
+              <a:t>12/13/2025</a:t>
             </a:fld>
             <a:endParaRPr lang="en-US"/>
           </a:p>
@@ -21277,7 +18339,7 @@
           <a:p>
             <a:fld id="{7E3784C8-F1F9-3A4E-8157-ADC6FC447930}" type="datetime1">
               <a:rPr lang="en-US" smtClean="0"/>
-              <a:t>12/12/2025</a:t>
+              <a:t>12/13/2025</a:t>
             </a:fld>
             <a:endParaRPr lang="en-US"/>
           </a:p>
@@ -21595,7 +18657,7 @@
           <a:p>
             <a:fld id="{2049B5C8-C320-CE42-B783-8C4DFC960665}" type="datetime1">
               <a:rPr lang="en-US" smtClean="0"/>
-              <a:t>12/12/2025</a:t>
+              <a:t>12/13/2025</a:t>
             </a:fld>
             <a:endParaRPr lang="en-US"/>
           </a:p>
@@ -22018,7 +19080,7 @@
           <a:p>
             <a:fld id="{A9226019-33FF-D14C-86DC-8CD2C65E2709}" type="datetime1">
               <a:rPr lang="en-US" smtClean="0"/>
-              <a:t>12/12/2025</a:t>
+              <a:t>12/13/2025</a:t>
             </a:fld>
             <a:endParaRPr lang="en-US"/>
           </a:p>
@@ -22176,7 +19238,7 @@
           <a:p>
             <a:fld id="{846CE7D5-CF57-46EF-B807-FDD0502418D4}" type="datetimeFigureOut">
               <a:rPr lang="en-US" smtClean="0"/>
-              <a:t>12/12/2025</a:t>
+              <a:t>12/13/2025</a:t>
             </a:fld>
             <a:endParaRPr lang="en-US"/>
           </a:p>
@@ -22615,7 +19677,7 @@
           <a:p>
             <a:fld id="{5A7D64F7-0C7B-1B47-9658-E887339B9A70}" type="datetime1">
               <a:rPr lang="en-US" smtClean="0"/>
-              <a:t>12/12/2025</a:t>
+              <a:t>12/13/2025</a:t>
             </a:fld>
             <a:endParaRPr lang="en-US"/>
           </a:p>
@@ -23042,7 +20104,7 @@
           <a:p>
             <a:fld id="{D3CD07D3-1C6A-7243-B247-92FB4862F8B6}" type="datetime1">
               <a:rPr lang="en-US" smtClean="0"/>
-              <a:t>12/12/2025</a:t>
+              <a:t>12/13/2025</a:t>
             </a:fld>
             <a:endParaRPr lang="en-US"/>
           </a:p>
@@ -23458,7 +20520,7 @@
           <a:p>
             <a:fld id="{A6261448-4908-0A47-BB1E-F6B7BED9DDE3}" type="datetime1">
               <a:rPr lang="en-US" smtClean="0"/>
-              <a:t>12/12/2025</a:t>
+              <a:t>12/13/2025</a:t>
             </a:fld>
             <a:endParaRPr lang="en-US"/>
           </a:p>
@@ -23916,7 +20978,7 @@
             <a:fld id="{52EC4BBC-FFA2-B54E-847D-F2577F1B8D0A}" type="datetime1">
               <a:rPr lang="en-US" smtClean="0"/>
               <a:pPr/>
-              <a:t>12/12/2025</a:t>
+              <a:t>12/13/2025</a:t>
             </a:fld>
             <a:endParaRPr lang="en-US"/>
           </a:p>
@@ -24210,7 +21272,7 @@
             <a:fld id="{93274EE0-8EE6-BB42-BF21-111D3EB8AA70}" type="datetime1">
               <a:rPr lang="en-US" smtClean="0"/>
               <a:pPr/>
-              <a:t>12/12/2025</a:t>
+              <a:t>12/13/2025</a:t>
             </a:fld>
             <a:endParaRPr lang="en-US"/>
           </a:p>
@@ -24680,8 +21742,16 @@
 </file>
 
 <file path=ppt/slides/slide1.xml><?xml version="1.0" encoding="utf-8"?>
-<p:sld xmlns:a="http://schemas.openxmlformats.org/drawingml/2006/main" xmlns:r="http://schemas.openxmlformats.org/officeDocument/2006/relationships" xmlns:p="http://schemas.openxmlformats.org/presentationml/2006/main">
+<p:sld xmlns:a="http://schemas.openxmlformats.org/drawingml/2006/main" xmlns:r="http://schemas.openxmlformats.org/officeDocument/2006/relationships" xmlns:p="http://schemas.openxmlformats.org/presentationml/2006/main" showMasterSp="0">
   <p:cSld>
+    <p:bg>
+      <p:bgPr>
+        <a:solidFill>
+          <a:schemeClr val="bg1"/>
+        </a:solidFill>
+        <a:effectLst/>
+      </p:bgPr>
+    </p:bg>
     <p:spTree>
       <p:nvGrpSpPr>
         <p:cNvPr id="1" name=""/>
@@ -24714,8 +21784,8 @@
         </p:nvSpPr>
         <p:spPr>
           <a:xfrm>
-            <a:off x="381000" y="838200"/>
-            <a:ext cx="11430000" cy="3657600"/>
+            <a:off x="68095" y="46921"/>
+            <a:ext cx="9906000" cy="1659996"/>
           </a:xfrm>
         </p:spPr>
         <p:txBody>
@@ -24724,8 +21794,9 @@
           </a:bodyPr>
           <a:lstStyle/>
           <a:p>
-            <a:r>
-              <a:rPr lang="en-US" sz="7200" dirty="0"/>
+            <a:pPr algn="l"/>
+            <a:r>
+              <a:rPr lang="en-US" sz="4800" dirty="0"/>
               <a:t>PML -Cricket Object Detection Project –Group 27</a:t>
             </a:r>
           </a:p>
@@ -24777,6 +21848,199 @@
           </a:p>
         </p:txBody>
       </p:sp>
+      <p:pic>
+        <p:nvPicPr>
+          <p:cNvPr id="4" name="Picture 3">
+            <a:extLst>
+              <a:ext uri="{FF2B5EF4-FFF2-40B4-BE49-F238E27FC236}">
+                <a16:creationId xmlns:a16="http://schemas.microsoft.com/office/drawing/2014/main" id="{DF0CEBC3-D03C-092E-640B-01707BF4E36D}"/>
+              </a:ext>
+            </a:extLst>
+          </p:cNvPr>
+          <p:cNvPicPr>
+            <a:picLocks noChangeAspect="1"/>
+          </p:cNvPicPr>
+          <p:nvPr/>
+        </p:nvPicPr>
+        <p:blipFill>
+          <a:blip r:embed="rId3"/>
+          <a:stretch>
+            <a:fillRect/>
+          </a:stretch>
+        </p:blipFill>
+        <p:spPr>
+          <a:xfrm>
+            <a:off x="9906000" y="144198"/>
+            <a:ext cx="2285999" cy="838200"/>
+          </a:xfrm>
+          <a:prstGeom prst="rect">
+            <a:avLst/>
+          </a:prstGeom>
+        </p:spPr>
+      </p:pic>
+      <p:graphicFrame>
+        <p:nvGraphicFramePr>
+          <p:cNvPr id="5" name="Table 4">
+            <a:extLst>
+              <a:ext uri="{FF2B5EF4-FFF2-40B4-BE49-F238E27FC236}">
+                <a16:creationId xmlns:a16="http://schemas.microsoft.com/office/drawing/2014/main" id="{537C4B4E-A4D4-1179-3052-E084D04ADF35}"/>
+              </a:ext>
+            </a:extLst>
+          </p:cNvPr>
+          <p:cNvGraphicFramePr>
+            <a:graphicFrameLocks noGrp="1"/>
+          </p:cNvGraphicFramePr>
+          <p:nvPr>
+            <p:extLst>
+              <p:ext uri="{D42A27DB-BD31-4B8C-83A1-F6EECF244321}">
+                <p14:modId xmlns:p14="http://schemas.microsoft.com/office/powerpoint/2010/main" val="2970285901"/>
+              </p:ext>
+            </p:extLst>
+          </p:nvPr>
+        </p:nvGraphicFramePr>
+        <p:xfrm>
+          <a:off x="308669" y="2338347"/>
+          <a:ext cx="8328378" cy="4624428"/>
+        </p:xfrm>
+        <a:graphic>
+          <a:graphicData uri="http://schemas.openxmlformats.org/drawingml/2006/table">
+            <a:tbl>
+              <a:tblPr firstRow="1" bandRow="1">
+                <a:tableStyleId>{2D5ABB26-0587-4C30-8999-92F81FD0307C}</a:tableStyleId>
+              </a:tblPr>
+              <a:tblGrid>
+                <a:gridCol w="4264378">
+                  <a:extLst>
+                    <a:ext uri="{9D8B030D-6E8A-4147-A177-3AD203B41FA5}">
+                      <a16:colId xmlns:a16="http://schemas.microsoft.com/office/drawing/2014/main" val="3905585804"/>
+                    </a:ext>
+                  </a:extLst>
+                </a:gridCol>
+                <a:gridCol w="4064000">
+                  <a:extLst>
+                    <a:ext uri="{9D8B030D-6E8A-4147-A177-3AD203B41FA5}">
+                      <a16:colId xmlns:a16="http://schemas.microsoft.com/office/drawing/2014/main" val="556120060"/>
+                    </a:ext>
+                  </a:extLst>
+                </a:gridCol>
+              </a:tblGrid>
+              <a:tr h="3037906">
+                <a:tc>
+                  <a:txBody>
+                    <a:bodyPr/>
+                    <a:lstStyle/>
+                    <a:p>
+                      <a:r>
+                        <a:rPr lang="en-IN" sz="4400" b="1" i="0" kern="1200" dirty="0">
+                          <a:solidFill>
+                            <a:srgbClr val="00B0F0"/>
+                          </a:solidFill>
+                          <a:latin typeface="-apple-system"/>
+                          <a:ea typeface="+mn-ea"/>
+                          <a:cs typeface="+mn-cs"/>
+                        </a:rPr>
+                        <a:t>Group Members</a:t>
+                      </a:r>
+                      <a:endParaRPr lang="en-IN" sz="3600" dirty="0"/>
+                    </a:p>
+                    <a:p>
+                      <a:pPr marL="342900" indent="-342900">
+                        <a:buAutoNum type="arabicPeriod"/>
+                      </a:pPr>
+                      <a:r>
+                        <a:rPr lang="en-IN" sz="3600" b="1" dirty="0"/>
+                        <a:t>Yugal Sahu</a:t>
+                      </a:r>
+                    </a:p>
+                    <a:p>
+                      <a:pPr marL="342900" indent="-342900">
+                        <a:buAutoNum type="arabicPeriod"/>
+                      </a:pPr>
+                      <a:r>
+                        <a:rPr lang="en-IN" sz="3600" b="1" dirty="0"/>
+                        <a:t>Pravin Patil</a:t>
+                      </a:r>
+                    </a:p>
+                    <a:p>
+                      <a:pPr marL="342900" indent="-342900">
+                        <a:buAutoNum type="arabicPeriod"/>
+                      </a:pPr>
+                      <a:r>
+                        <a:rPr lang="en-IN" sz="3600" b="1" dirty="0"/>
+                        <a:t>Yogesh Gupte</a:t>
+                      </a:r>
+                    </a:p>
+                    <a:p>
+                      <a:pPr marL="342900" indent="-342900">
+                        <a:buAutoNum type="arabicPeriod"/>
+                      </a:pPr>
+                      <a:r>
+                        <a:rPr lang="en-IN" sz="3600" b="1" dirty="0"/>
+                        <a:t>Ratish Nair</a:t>
+                      </a:r>
+                    </a:p>
+                    <a:p>
+                      <a:pPr marL="342900" indent="-342900">
+                        <a:buAutoNum type="arabicPeriod"/>
+                      </a:pPr>
+                      <a:r>
+                        <a:rPr lang="en-IN" sz="3600" b="1" dirty="0"/>
+                        <a:t>Gaurav Patil</a:t>
+                      </a:r>
+                    </a:p>
+                  </a:txBody>
+                  <a:tcPr/>
+                </a:tc>
+                <a:tc>
+                  <a:txBody>
+                    <a:bodyPr/>
+                    <a:lstStyle/>
+                    <a:p>
+                      <a:endParaRPr lang="en-IN" dirty="0"/>
+                    </a:p>
+                  </a:txBody>
+                  <a:tcPr/>
+                </a:tc>
+                <a:extLst>
+                  <a:ext uri="{0D108BD9-81ED-4DB2-BD59-A6C34878D82A}">
+                    <a16:rowId xmlns:a16="http://schemas.microsoft.com/office/drawing/2014/main" val="367783663"/>
+                  </a:ext>
+                </a:extLst>
+              </a:tr>
+              <a:tr h="1119228">
+                <a:tc>
+                  <a:txBody>
+                    <a:bodyPr/>
+                    <a:lstStyle/>
+                    <a:p>
+                      <a:endParaRPr lang="en-IN" dirty="0"/>
+                    </a:p>
+                  </a:txBody>
+                  <a:tcPr/>
+                </a:tc>
+                <a:tc>
+                  <a:txBody>
+                    <a:bodyPr/>
+                    <a:lstStyle/>
+                    <a:p>
+                      <a:endParaRPr lang="en-IN" dirty="0"/>
+                    </a:p>
+                    <a:p>
+                      <a:endParaRPr lang="en-IN" dirty="0"/>
+                    </a:p>
+                  </a:txBody>
+                  <a:tcPr/>
+                </a:tc>
+                <a:extLst>
+                  <a:ext uri="{0D108BD9-81ED-4DB2-BD59-A6C34878D82A}">
+                    <a16:rowId xmlns:a16="http://schemas.microsoft.com/office/drawing/2014/main" val="3275031316"/>
+                  </a:ext>
+                </a:extLst>
+              </a:tr>
+            </a:tbl>
+          </a:graphicData>
+        </a:graphic>
+      </p:graphicFrame>
     </p:spTree>
     <p:extLst>
       <p:ext uri="{BB962C8B-B14F-4D97-AF65-F5344CB8AC3E}">
@@ -24787,98 +22051,6 @@
   <p:clrMapOvr>
     <a:masterClrMapping/>
   </p:clrMapOvr>
-  <p:timing>
-    <p:tnLst>
-      <p:par>
-        <p:cTn id="1" dur="indefinite" restart="never" nodeType="tmRoot">
-          <p:childTnLst>
-            <p:seq concurrent="1" nextAc="seek">
-              <p:cTn id="2" dur="indefinite" nodeType="mainSeq">
-                <p:childTnLst>
-                  <p:par>
-                    <p:cTn id="3" fill="hold">
-                      <p:stCondLst>
-                        <p:cond delay="indefinite"/>
-                        <p:cond evt="onBegin" delay="0">
-                          <p:tn val="2"/>
-                        </p:cond>
-                      </p:stCondLst>
-                      <p:childTnLst>
-                        <p:par>
-                          <p:cTn id="4" fill="hold">
-                            <p:stCondLst>
-                              <p:cond delay="0"/>
-                            </p:stCondLst>
-                            <p:childTnLst>
-                              <p:par>
-                                <p:cTn id="5" presetID="10" presetClass="entr" presetSubtype="0" fill="hold" grpId="0" nodeType="withEffect">
-                                  <p:stCondLst>
-                                    <p:cond delay="500"/>
-                                  </p:stCondLst>
-                                  <p:iterate type="wd">
-                                    <p:tmPct val="15000"/>
-                                  </p:iterate>
-                                  <p:childTnLst>
-                                    <p:set>
-                                      <p:cBhvr>
-                                        <p:cTn id="6" dur="1" fill="hold">
-                                          <p:stCondLst>
-                                            <p:cond delay="0"/>
-                                          </p:stCondLst>
-                                        </p:cTn>
-                                        <p:tgtEl>
-                                          <p:spTgt spid="2"/>
-                                        </p:tgtEl>
-                                        <p:attrNameLst>
-                                          <p:attrName>style.visibility</p:attrName>
-                                        </p:attrNameLst>
-                                      </p:cBhvr>
-                                      <p:to>
-                                        <p:strVal val="visible"/>
-                                      </p:to>
-                                    </p:set>
-                                    <p:animEffect transition="in" filter="fade">
-                                      <p:cBhvr>
-                                        <p:cTn id="7" dur="1000"/>
-                                        <p:tgtEl>
-                                          <p:spTgt spid="2"/>
-                                        </p:tgtEl>
-                                      </p:cBhvr>
-                                    </p:animEffect>
-                                  </p:childTnLst>
-                                </p:cTn>
-                              </p:par>
-                            </p:childTnLst>
-                          </p:cTn>
-                        </p:par>
-                      </p:childTnLst>
-                    </p:cTn>
-                  </p:par>
-                </p:childTnLst>
-              </p:cTn>
-              <p:prevCondLst>
-                <p:cond evt="onPrev" delay="0">
-                  <p:tgtEl>
-                    <p:sldTgt/>
-                  </p:tgtEl>
-                </p:cond>
-              </p:prevCondLst>
-              <p:nextCondLst>
-                <p:cond evt="onNext" delay="0">
-                  <p:tgtEl>
-                    <p:sldTgt/>
-                  </p:tgtEl>
-                </p:cond>
-              </p:nextCondLst>
-            </p:seq>
-          </p:childTnLst>
-        </p:cTn>
-      </p:par>
-    </p:tnLst>
-    <p:bldLst>
-      <p:bldP spid="2" grpId="0"/>
-    </p:bldLst>
-  </p:timing>
 </p:sld>
 </file>
 
@@ -24936,92 +22108,6 @@
       </p:sp>
       <p:sp>
         <p:nvSpPr>
-          <p:cNvPr id="4" name="Footer Placeholder 3">
-            <a:extLst>
-              <a:ext uri="{FF2B5EF4-FFF2-40B4-BE49-F238E27FC236}">
-                <a16:creationId xmlns:a16="http://schemas.microsoft.com/office/drawing/2014/main" id="{63C5A9B2-35C7-DF9A-CD4F-5A1B59ECB423}"/>
-              </a:ext>
-            </a:extLst>
-          </p:cNvPr>
-          <p:cNvSpPr>
-            <a:spLocks noGrp="1"/>
-          </p:cNvSpPr>
-          <p:nvPr>
-            <p:ph type="ftr" sz="quarter" idx="15"/>
-          </p:nvPr>
-        </p:nvSpPr>
-        <p:spPr>
-          <a:xfrm>
-            <a:off x="381000" y="6347057"/>
-            <a:ext cx="3200400" cy="365125"/>
-          </a:xfrm>
-        </p:spPr>
-        <p:txBody>
-          <a:bodyPr anchor="ctr">
-            <a:normAutofit/>
-          </a:bodyPr>
-          <a:lstStyle/>
-          <a:p>
-            <a:pPr>
-              <a:spcAft>
-                <a:spcPts val="600"/>
-              </a:spcAft>
-            </a:pPr>
-            <a:r>
-              <a:rPr lang="en-US"/>
-              <a:t>Sample Footer Text</a:t>
-            </a:r>
-          </a:p>
-        </p:txBody>
-      </p:sp>
-      <p:sp>
-        <p:nvSpPr>
-          <p:cNvPr id="5" name="Date Placeholder 4">
-            <a:extLst>
-              <a:ext uri="{FF2B5EF4-FFF2-40B4-BE49-F238E27FC236}">
-                <a16:creationId xmlns:a16="http://schemas.microsoft.com/office/drawing/2014/main" id="{D70AA05B-ABED-4155-C026-724F1A4994B3}"/>
-              </a:ext>
-            </a:extLst>
-          </p:cNvPr>
-          <p:cNvSpPr>
-            <a:spLocks noGrp="1"/>
-          </p:cNvSpPr>
-          <p:nvPr>
-            <p:ph type="dt" sz="half" idx="14"/>
-          </p:nvPr>
-        </p:nvSpPr>
-        <p:spPr>
-          <a:xfrm>
-            <a:off x="9525000" y="6340475"/>
-            <a:ext cx="1800171" cy="365125"/>
-          </a:xfrm>
-        </p:spPr>
-        <p:txBody>
-          <a:bodyPr anchor="ctr">
-            <a:normAutofit/>
-          </a:bodyPr>
-          <a:lstStyle/>
-          <a:p>
-            <a:pPr>
-              <a:spcAft>
-                <a:spcPts val="600"/>
-              </a:spcAft>
-            </a:pPr>
-            <a:fld id="{192DDA33-D578-2640-B42E-CEBF81697F81}" type="datetime1">
-              <a:rPr lang="en-US" smtClean="0"/>
-              <a:pPr>
-                <a:spcAft>
-                  <a:spcPts val="600"/>
-                </a:spcAft>
-              </a:pPr>
-              <a:t>12/12/2025</a:t>
-            </a:fld>
-            <a:endParaRPr lang="en-US"/>
-          </a:p>
-        </p:txBody>
-      </p:sp>
-      <p:sp>
-        <p:nvSpPr>
           <p:cNvPr id="6" name="Slide Number Placeholder 5">
             <a:extLst>
               <a:ext uri="{FF2B5EF4-FFF2-40B4-BE49-F238E27FC236}">
@@ -25081,7 +22167,7 @@
         <p:spPr>
           <a:xfrm>
             <a:off x="0" y="539108"/>
-            <a:ext cx="11896725" cy="369332"/>
+            <a:ext cx="11896725" cy="646331"/>
           </a:xfrm>
           <a:prstGeom prst="rect">
             <a:avLst/>
@@ -25106,7 +22192,23 @@
                 </a:solidFill>
                 <a:latin typeface="-apple-system"/>
               </a:rPr>
-              <a:t>Predicted cell labels are displayed with colored rectangles representing different objects for clear model interpretation.</a:t>
+              <a:t>Predicted cell labels are displayed with colored rectangles representing different objects for</a:t>
+            </a:r>
+          </a:p>
+          <a:p>
+            <a:pPr lvl="0">
+              <a:lnSpc>
+                <a:spcPct val="100000"/>
+              </a:lnSpc>
+            </a:pPr>
+            <a:r>
+              <a:rPr lang="en-US" dirty="0">
+                <a:solidFill>
+                  <a:srgbClr val="1F2328"/>
+                </a:solidFill>
+                <a:latin typeface="-apple-system"/>
+              </a:rPr>
+              <a:t> clear model interpretation.</a:t>
             </a:r>
           </a:p>
         </p:txBody>
@@ -25133,8 +22235,8 @@
         </p:blipFill>
         <p:spPr>
           <a:xfrm>
-            <a:off x="114299" y="1000720"/>
-            <a:ext cx="4807463" cy="2594127"/>
+            <a:off x="179890" y="1249792"/>
+            <a:ext cx="4723942" cy="2594127"/>
           </a:xfrm>
           <a:prstGeom prst="rect">
             <a:avLst/>
@@ -25163,8 +22265,8 @@
         </p:blipFill>
         <p:spPr>
           <a:xfrm>
-            <a:off x="5445869" y="1000035"/>
-            <a:ext cx="5333132" cy="2571493"/>
+            <a:off x="5471897" y="1288640"/>
+            <a:ext cx="5335732" cy="2571493"/>
           </a:xfrm>
           <a:prstGeom prst="rect">
             <a:avLst/>
@@ -25193,7 +22295,7 @@
         </p:blipFill>
         <p:spPr>
           <a:xfrm>
-            <a:off x="197821" y="3847789"/>
+            <a:off x="179890" y="4110448"/>
             <a:ext cx="4723942" cy="2492685"/>
           </a:xfrm>
           <a:prstGeom prst="rect">
@@ -25223,8 +22325,38 @@
         </p:blipFill>
         <p:spPr>
           <a:xfrm>
-            <a:off x="5445869" y="3847789"/>
+            <a:off x="5436904" y="4110448"/>
             <a:ext cx="5405718" cy="2518006"/>
+          </a:xfrm>
+          <a:prstGeom prst="rect">
+            <a:avLst/>
+          </a:prstGeom>
+        </p:spPr>
+      </p:pic>
+      <p:pic>
+        <p:nvPicPr>
+          <p:cNvPr id="8" name="Picture 7">
+            <a:extLst>
+              <a:ext uri="{FF2B5EF4-FFF2-40B4-BE49-F238E27FC236}">
+                <a16:creationId xmlns:a16="http://schemas.microsoft.com/office/drawing/2014/main" id="{71B5FF18-1518-D938-A525-1A8C62A148A9}"/>
+              </a:ext>
+            </a:extLst>
+          </p:cNvPr>
+          <p:cNvPicPr>
+            <a:picLocks noChangeAspect="1"/>
+          </p:cNvPicPr>
+          <p:nvPr/>
+        </p:nvPicPr>
+        <p:blipFill>
+          <a:blip r:embed="rId7"/>
+          <a:stretch>
+            <a:fillRect/>
+          </a:stretch>
+        </p:blipFill>
+        <p:spPr>
+          <a:xfrm>
+            <a:off x="9777046" y="0"/>
+            <a:ext cx="2414954" cy="905606"/>
           </a:xfrm>
           <a:prstGeom prst="rect">
             <a:avLst/>
@@ -25282,7 +22414,7 @@
         </p:nvSpPr>
         <p:spPr>
           <a:xfrm>
-            <a:off x="380999" y="685800"/>
+            <a:off x="156882" y="145818"/>
             <a:ext cx="6459071" cy="784412"/>
           </a:xfrm>
         </p:spPr>
@@ -25293,7 +22425,11 @@
           <a:lstStyle/>
           <a:p>
             <a:r>
-              <a:rPr lang="en-US" dirty="0"/>
+              <a:rPr lang="en-US" dirty="0">
+                <a:solidFill>
+                  <a:srgbClr val="00B0F0"/>
+                </a:solidFill>
+              </a:rPr>
               <a:t>Learnings and Challenges</a:t>
             </a:r>
           </a:p>
@@ -25327,13 +22463,13 @@
         </p:nvSpPr>
         <p:spPr>
           <a:xfrm>
-            <a:off x="469574" y="1470212"/>
-            <a:ext cx="7522462" cy="4410456"/>
+            <a:off x="236491" y="984153"/>
+            <a:ext cx="8082756" cy="5356322"/>
           </a:xfrm>
         </p:spPr>
         <p:txBody>
           <a:bodyPr>
-            <a:normAutofit/>
+            <a:noAutofit/>
           </a:bodyPr>
           <a:lstStyle/>
           <a:p>
@@ -25345,7 +22481,13 @@
               <a:buNone/>
             </a:pPr>
             <a:r>
-              <a:rPr lang="en-US" b="1" dirty="0"/>
+              <a:rPr lang="en-US" sz="1800" b="1" dirty="0">
+                <a:solidFill>
+                  <a:srgbClr val="1F2328"/>
+                </a:solidFill>
+                <a:latin typeface="-apple-system"/>
+                <a:cs typeface="+mn-cs"/>
+              </a:rPr>
               <a:t>Importance of Annotation and Preprocessing</a:t>
             </a:r>
           </a:p>
@@ -25355,10 +22497,22 @@
               <a:buNone/>
             </a:pPr>
             <a:r>
-              <a:rPr dirty="0"/>
+              <a:rPr sz="1800" dirty="0">
+                <a:solidFill>
+                  <a:srgbClr val="1F2328"/>
+                </a:solidFill>
+                <a:latin typeface="-apple-system"/>
+                <a:cs typeface="+mn-cs"/>
+              </a:rPr>
               <a:t>Consistent annotation and preprocessing are critical to achieving reliable model performance and avoiding accuracy drops.</a:t>
             </a:r>
-            <a:endParaRPr lang="en-US" dirty="0"/>
+            <a:endParaRPr lang="en-US" sz="1800" dirty="0">
+              <a:solidFill>
+                <a:srgbClr val="1F2328"/>
+              </a:solidFill>
+              <a:latin typeface="-apple-system"/>
+              <a:cs typeface="+mn-cs"/>
+            </a:endParaRPr>
           </a:p>
           <a:p>
             <a:pPr marL="0" indent="0">
@@ -25369,7 +22523,13 @@
               <a:buNone/>
             </a:pPr>
             <a:r>
-              <a:rPr lang="en-US" b="1" dirty="0"/>
+              <a:rPr lang="en-US" sz="1800" b="1" dirty="0">
+                <a:solidFill>
+                  <a:srgbClr val="1F2328"/>
+                </a:solidFill>
+                <a:latin typeface="-apple-system"/>
+                <a:cs typeface="+mn-cs"/>
+              </a:rPr>
               <a:t>Effective Feature Engineering</a:t>
             </a:r>
           </a:p>
@@ -25379,10 +22539,22 @@
               <a:buNone/>
             </a:pPr>
             <a:r>
-              <a:rPr dirty="0"/>
+              <a:rPr sz="1800" dirty="0">
+                <a:solidFill>
+                  <a:srgbClr val="1F2328"/>
+                </a:solidFill>
+                <a:latin typeface="-apple-system"/>
+                <a:cs typeface="+mn-cs"/>
+              </a:rPr>
               <a:t>Techniques like HOG and grayscale features improve classical machine learning model accuracy through thoughtful selection.</a:t>
             </a:r>
-            <a:endParaRPr lang="en-US" dirty="0"/>
+            <a:endParaRPr lang="en-US" sz="1800" dirty="0">
+              <a:solidFill>
+                <a:srgbClr val="1F2328"/>
+              </a:solidFill>
+              <a:latin typeface="-apple-system"/>
+              <a:cs typeface="+mn-cs"/>
+            </a:endParaRPr>
           </a:p>
           <a:p>
             <a:pPr marL="0" indent="0">
@@ -25393,7 +22565,13 @@
               <a:buNone/>
             </a:pPr>
             <a:r>
-              <a:rPr lang="en-US" b="1" dirty="0"/>
+              <a:rPr lang="en-US" sz="1800" b="1" dirty="0">
+                <a:solidFill>
+                  <a:srgbClr val="1F2328"/>
+                </a:solidFill>
+                <a:latin typeface="-apple-system"/>
+                <a:cs typeface="+mn-cs"/>
+              </a:rPr>
               <a:t>Model Comparison and Trade-offs</a:t>
             </a:r>
           </a:p>
@@ -25403,10 +22581,22 @@
               <a:buNone/>
             </a:pPr>
             <a:r>
-              <a:rPr dirty="0"/>
+              <a:rPr sz="1800" dirty="0">
+                <a:solidFill>
+                  <a:srgbClr val="1F2328"/>
+                </a:solidFill>
+                <a:latin typeface="-apple-system"/>
+                <a:cs typeface="+mn-cs"/>
+              </a:rPr>
               <a:t>Comparing Random Forest and KNN reveals trade-offs between accuracy and computational speed for model selection.</a:t>
             </a:r>
-            <a:endParaRPr lang="en-US" dirty="0"/>
+            <a:endParaRPr lang="en-US" sz="1800" dirty="0">
+              <a:solidFill>
+                <a:srgbClr val="1F2328"/>
+              </a:solidFill>
+              <a:latin typeface="-apple-system"/>
+              <a:cs typeface="+mn-cs"/>
+            </a:endParaRPr>
           </a:p>
           <a:p>
             <a:pPr marL="0" indent="0">
@@ -25417,7 +22607,13 @@
               <a:buNone/>
             </a:pPr>
             <a:r>
-              <a:rPr lang="en-US" b="1" dirty="0"/>
+              <a:rPr lang="en-US" sz="1800" b="1" dirty="0">
+                <a:solidFill>
+                  <a:srgbClr val="1F2328"/>
+                </a:solidFill>
+                <a:latin typeface="-apple-system"/>
+                <a:cs typeface="+mn-cs"/>
+              </a:rPr>
               <a:t>Visualization and Challenges</a:t>
             </a:r>
           </a:p>
@@ -25427,10 +22623,22 @@
               <a:buNone/>
             </a:pPr>
             <a:r>
-              <a:rPr dirty="0"/>
+              <a:rPr sz="1800" dirty="0">
+                <a:solidFill>
+                  <a:srgbClr val="1F2328"/>
+                </a:solidFill>
+                <a:latin typeface="-apple-system"/>
+                <a:cs typeface="+mn-cs"/>
+              </a:rPr>
               <a:t>Visualization aids debugging and understanding, while annotation complexity and scalability remain key challenges.</a:t>
             </a:r>
-            <a:endParaRPr lang="en-US" dirty="0"/>
+            <a:endParaRPr lang="en-US" sz="1800" dirty="0">
+              <a:solidFill>
+                <a:srgbClr val="1F2328"/>
+              </a:solidFill>
+              <a:latin typeface="-apple-system"/>
+              <a:cs typeface="+mn-cs"/>
+            </a:endParaRPr>
           </a:p>
         </p:txBody>
       </p:sp>
@@ -25514,7 +22722,7 @@
                   <a:spcPts val="600"/>
                 </a:spcAft>
               </a:pPr>
-              <a:t>12/12/2025</a:t>
+              <a:t>12/13/2025</a:t>
             </a:fld>
             <a:endParaRPr lang="en-US"/>
           </a:p>
@@ -25566,6 +22774,36 @@
           </a:p>
         </p:txBody>
       </p:sp>
+      <p:pic>
+        <p:nvPicPr>
+          <p:cNvPr id="8" name="Picture 7">
+            <a:extLst>
+              <a:ext uri="{FF2B5EF4-FFF2-40B4-BE49-F238E27FC236}">
+                <a16:creationId xmlns:a16="http://schemas.microsoft.com/office/drawing/2014/main" id="{45FECFE0-BD8B-9FDE-A077-4F21B0F997B0}"/>
+              </a:ext>
+            </a:extLst>
+          </p:cNvPr>
+          <p:cNvPicPr>
+            <a:picLocks noChangeAspect="1"/>
+          </p:cNvPicPr>
+          <p:nvPr/>
+        </p:nvPicPr>
+        <p:blipFill>
+          <a:blip r:embed="rId3"/>
+          <a:stretch>
+            <a:fillRect/>
+          </a:stretch>
+        </p:blipFill>
+        <p:spPr>
+          <a:xfrm>
+            <a:off x="9777046" y="51001"/>
+            <a:ext cx="2414954" cy="905606"/>
+          </a:xfrm>
+          <a:prstGeom prst="rect">
+            <a:avLst/>
+          </a:prstGeom>
+        </p:spPr>
+      </p:pic>
     </p:spTree>
     <p:extLst>
       <p:ext uri="{BB962C8B-B14F-4D97-AF65-F5344CB8AC3E}">
@@ -25720,534 +22958,6 @@
 </p:sld>
 </file>
 
-<file path=ppt/slides/slide12.xml><?xml version="1.0" encoding="utf-8"?>
-<p:sld xmlns:a="http://schemas.openxmlformats.org/drawingml/2006/main" xmlns:r="http://schemas.openxmlformats.org/officeDocument/2006/relationships" xmlns:p="http://schemas.openxmlformats.org/presentationml/2006/main">
-  <p:cSld>
-    <p:spTree>
-      <p:nvGrpSpPr>
-        <p:cNvPr id="1" name=""/>
-        <p:cNvGrpSpPr/>
-        <p:nvPr/>
-      </p:nvGrpSpPr>
-      <p:grpSpPr>
-        <a:xfrm>
-          <a:off x="0" y="0"/>
-          <a:ext cx="0" cy="0"/>
-          <a:chOff x="0" y="0"/>
-          <a:chExt cx="0" cy="0"/>
-        </a:xfrm>
-      </p:grpSpPr>
-      <p:sp>
-        <p:nvSpPr>
-          <p:cNvPr id="2" name="Title 1">
-            <a:extLst>
-              <a:ext uri="{FF2B5EF4-FFF2-40B4-BE49-F238E27FC236}">
-                <a16:creationId xmlns:a16="http://schemas.microsoft.com/office/drawing/2014/main" id="{C290E03A-FD22-E84D-64C9-DDA8CF35F81A}"/>
-              </a:ext>
-            </a:extLst>
-          </p:cNvPr>
-          <p:cNvSpPr>
-            <a:spLocks noGrp="1"/>
-          </p:cNvSpPr>
-          <p:nvPr>
-            <p:ph type="ctrTitle"/>
-          </p:nvPr>
-        </p:nvSpPr>
-        <p:spPr>
-          <a:xfrm>
-            <a:off x="381000" y="1600200"/>
-            <a:ext cx="11430000" cy="4572000"/>
-          </a:xfrm>
-        </p:spPr>
-        <p:txBody>
-          <a:bodyPr anchor="b">
-            <a:normAutofit/>
-          </a:bodyPr>
-          <a:lstStyle/>
-          <a:p>
-            <a:r>
-              <a:rPr lang="en-US"/>
-              <a:t>References</a:t>
-            </a:r>
-          </a:p>
-        </p:txBody>
-      </p:sp>
-      <p:sp>
-        <p:nvSpPr>
-          <p:cNvPr id="4" name="Footer Placeholder 3">
-            <a:extLst>
-              <a:ext uri="{FF2B5EF4-FFF2-40B4-BE49-F238E27FC236}">
-                <a16:creationId xmlns:a16="http://schemas.microsoft.com/office/drawing/2014/main" id="{BD772A12-0FF3-1627-A8A3-0F4310E133CA}"/>
-              </a:ext>
-            </a:extLst>
-          </p:cNvPr>
-          <p:cNvSpPr>
-            <a:spLocks noGrp="1"/>
-          </p:cNvSpPr>
-          <p:nvPr>
-            <p:ph type="ftr" sz="quarter" idx="11"/>
-          </p:nvPr>
-        </p:nvSpPr>
-        <p:spPr>
-          <a:xfrm>
-            <a:off x="381000" y="6347057"/>
-            <a:ext cx="3200400" cy="365125"/>
-          </a:xfrm>
-        </p:spPr>
-        <p:txBody>
-          <a:bodyPr anchor="ctr">
-            <a:normAutofit/>
-          </a:bodyPr>
-          <a:lstStyle/>
-          <a:p>
-            <a:pPr>
-              <a:spcAft>
-                <a:spcPts val="600"/>
-              </a:spcAft>
-            </a:pPr>
-            <a:r>
-              <a:rPr lang="en-US"/>
-              <a:t>Sample Footer Text</a:t>
-            </a:r>
-          </a:p>
-        </p:txBody>
-      </p:sp>
-      <p:sp>
-        <p:nvSpPr>
-          <p:cNvPr id="5" name="Date Placeholder 4">
-            <a:extLst>
-              <a:ext uri="{FF2B5EF4-FFF2-40B4-BE49-F238E27FC236}">
-                <a16:creationId xmlns:a16="http://schemas.microsoft.com/office/drawing/2014/main" id="{07ADB421-6668-F00B-137B-2959F5D3933A}"/>
-              </a:ext>
-            </a:extLst>
-          </p:cNvPr>
-          <p:cNvSpPr>
-            <a:spLocks noGrp="1"/>
-          </p:cNvSpPr>
-          <p:nvPr>
-            <p:ph type="dt" sz="half" idx="10"/>
-          </p:nvPr>
-        </p:nvSpPr>
-        <p:spPr>
-          <a:xfrm>
-            <a:off x="9525000" y="6340475"/>
-            <a:ext cx="1800171" cy="365125"/>
-          </a:xfrm>
-        </p:spPr>
-        <p:txBody>
-          <a:bodyPr anchor="ctr">
-            <a:normAutofit/>
-          </a:bodyPr>
-          <a:lstStyle/>
-          <a:p>
-            <a:pPr>
-              <a:spcAft>
-                <a:spcPts val="600"/>
-              </a:spcAft>
-            </a:pPr>
-            <a:fld id="{F7F4CBCF-2EA5-5248-B352-49E9FE7B89CF}" type="datetime1">
-              <a:rPr lang="en-US" smtClean="0"/>
-              <a:pPr>
-                <a:spcAft>
-                  <a:spcPts val="600"/>
-                </a:spcAft>
-              </a:pPr>
-              <a:t>12/12/2025</a:t>
-            </a:fld>
-            <a:endParaRPr lang="en-US"/>
-          </a:p>
-        </p:txBody>
-      </p:sp>
-      <p:sp>
-        <p:nvSpPr>
-          <p:cNvPr id="6" name="Slide Number Placeholder 5">
-            <a:extLst>
-              <a:ext uri="{FF2B5EF4-FFF2-40B4-BE49-F238E27FC236}">
-                <a16:creationId xmlns:a16="http://schemas.microsoft.com/office/drawing/2014/main" id="{C4AC5EAE-2EB4-9845-CE26-CDDAC51B0D14}"/>
-              </a:ext>
-            </a:extLst>
-          </p:cNvPr>
-          <p:cNvSpPr>
-            <a:spLocks noGrp="1"/>
-          </p:cNvSpPr>
-          <p:nvPr>
-            <p:ph type="sldNum" sz="quarter" idx="12"/>
-          </p:nvPr>
-        </p:nvSpPr>
-        <p:spPr>
-          <a:xfrm>
-            <a:off x="11375694" y="6340475"/>
-            <a:ext cx="429207" cy="365125"/>
-          </a:xfrm>
-        </p:spPr>
-        <p:txBody>
-          <a:bodyPr anchor="ctr">
-            <a:normAutofit/>
-          </a:bodyPr>
-          <a:lstStyle/>
-          <a:p>
-            <a:pPr>
-              <a:spcAft>
-                <a:spcPts val="600"/>
-              </a:spcAft>
-            </a:pPr>
-            <a:fld id="{AEAA3239-9EA4-4A65-A281-97F994456D9F}" type="slidenum">
-              <a:rPr lang="en-US" smtClean="0"/>
-              <a:pPr>
-                <a:spcAft>
-                  <a:spcPts val="600"/>
-                </a:spcAft>
-              </a:pPr>
-              <a:t>12</a:t>
-            </a:fld>
-            <a:endParaRPr lang="en-US"/>
-          </a:p>
-        </p:txBody>
-      </p:sp>
-    </p:spTree>
-    <p:extLst>
-      <p:ext uri="{BB962C8B-B14F-4D97-AF65-F5344CB8AC3E}">
-        <p14:creationId xmlns:p14="http://schemas.microsoft.com/office/powerpoint/2010/main" val="2923561532"/>
-      </p:ext>
-    </p:extLst>
-  </p:cSld>
-  <p:clrMapOvr>
-    <a:masterClrMapping/>
-  </p:clrMapOvr>
-  <p:transition>
-    <p:fade/>
-  </p:transition>
-  <p:timing>
-    <p:tnLst>
-      <p:par>
-        <p:cTn id="1" dur="indefinite" restart="never" nodeType="tmRoot">
-          <p:childTnLst>
-            <p:seq concurrent="1" nextAc="seek">
-              <p:cTn id="2" dur="indefinite" nodeType="mainSeq">
-                <p:childTnLst>
-                  <p:par>
-                    <p:cTn id="3" fill="hold">
-                      <p:stCondLst>
-                        <p:cond delay="indefinite"/>
-                        <p:cond evt="onBegin" delay="0">
-                          <p:tn val="2"/>
-                        </p:cond>
-                      </p:stCondLst>
-                      <p:childTnLst>
-                        <p:par>
-                          <p:cTn id="4" fill="hold">
-                            <p:stCondLst>
-                              <p:cond delay="0"/>
-                            </p:stCondLst>
-                            <p:childTnLst>
-                              <p:par>
-                                <p:cTn id="5" presetID="10" presetClass="entr" presetSubtype="0" fill="hold" grpId="0" nodeType="withEffect">
-                                  <p:stCondLst>
-                                    <p:cond delay="500"/>
-                                  </p:stCondLst>
-                                  <p:iterate type="wd">
-                                    <p:tmPct val="15000"/>
-                                  </p:iterate>
-                                  <p:childTnLst>
-                                    <p:set>
-                                      <p:cBhvr>
-                                        <p:cTn id="6" dur="1" fill="hold">
-                                          <p:stCondLst>
-                                            <p:cond delay="0"/>
-                                          </p:stCondLst>
-                                        </p:cTn>
-                                        <p:tgtEl>
-                                          <p:spTgt spid="2"/>
-                                        </p:tgtEl>
-                                        <p:attrNameLst>
-                                          <p:attrName>style.visibility</p:attrName>
-                                        </p:attrNameLst>
-                                      </p:cBhvr>
-                                      <p:to>
-                                        <p:strVal val="visible"/>
-                                      </p:to>
-                                    </p:set>
-                                    <p:animEffect transition="in" filter="fade">
-                                      <p:cBhvr>
-                                        <p:cTn id="7" dur="1000"/>
-                                        <p:tgtEl>
-                                          <p:spTgt spid="2"/>
-                                        </p:tgtEl>
-                                      </p:cBhvr>
-                                    </p:animEffect>
-                                  </p:childTnLst>
-                                </p:cTn>
-                              </p:par>
-                            </p:childTnLst>
-                          </p:cTn>
-                        </p:par>
-                      </p:childTnLst>
-                    </p:cTn>
-                  </p:par>
-                </p:childTnLst>
-              </p:cTn>
-              <p:prevCondLst>
-                <p:cond evt="onPrev" delay="0">
-                  <p:tgtEl>
-                    <p:sldTgt/>
-                  </p:tgtEl>
-                </p:cond>
-              </p:prevCondLst>
-              <p:nextCondLst>
-                <p:cond evt="onNext" delay="0">
-                  <p:tgtEl>
-                    <p:sldTgt/>
-                  </p:tgtEl>
-                </p:cond>
-              </p:nextCondLst>
-            </p:seq>
-          </p:childTnLst>
-        </p:cTn>
-      </p:par>
-    </p:tnLst>
-    <p:bldLst>
-      <p:bldP spid="2" grpId="0"/>
-    </p:bldLst>
-  </p:timing>
-</p:sld>
-</file>
-
-<file path=ppt/slides/slide13.xml><?xml version="1.0" encoding="utf-8"?>
-<p:sld xmlns:a="http://schemas.openxmlformats.org/drawingml/2006/main" xmlns:r="http://schemas.openxmlformats.org/officeDocument/2006/relationships" xmlns:p="http://schemas.openxmlformats.org/presentationml/2006/main">
-  <p:cSld>
-    <p:spTree>
-      <p:nvGrpSpPr>
-        <p:cNvPr id="1" name=""/>
-        <p:cNvGrpSpPr/>
-        <p:nvPr/>
-      </p:nvGrpSpPr>
-      <p:grpSpPr>
-        <a:xfrm>
-          <a:off x="0" y="0"/>
-          <a:ext cx="0" cy="0"/>
-          <a:chOff x="0" y="0"/>
-          <a:chExt cx="0" cy="0"/>
-        </a:xfrm>
-      </p:grpSpPr>
-      <p:sp>
-        <p:nvSpPr>
-          <p:cNvPr id="2" name="Title 1">
-            <a:extLst>
-              <a:ext uri="{FF2B5EF4-FFF2-40B4-BE49-F238E27FC236}">
-                <a16:creationId xmlns:a16="http://schemas.microsoft.com/office/drawing/2014/main" id="{981FA5E3-876E-BAE8-6711-A8BDD23BF489}"/>
-              </a:ext>
-            </a:extLst>
-          </p:cNvPr>
-          <p:cNvSpPr>
-            <a:spLocks noGrp="1"/>
-          </p:cNvSpPr>
-          <p:nvPr>
-            <p:ph type="title"/>
-          </p:nvPr>
-        </p:nvSpPr>
-        <p:spPr>
-          <a:xfrm>
-            <a:off x="381000" y="1600200"/>
-            <a:ext cx="3215641" cy="3657600"/>
-          </a:xfrm>
-        </p:spPr>
-        <p:txBody>
-          <a:bodyPr anchor="t">
-            <a:normAutofit/>
-          </a:bodyPr>
-          <a:lstStyle/>
-          <a:p>
-            <a:r>
-              <a:rPr lang="en-US"/>
-              <a:t>Reference Materials</a:t>
-            </a:r>
-          </a:p>
-        </p:txBody>
-      </p:sp>
-      <p:graphicFrame>
-        <p:nvGraphicFramePr>
-          <p:cNvPr id="10" name="Content Placeholder 2">
-            <a:extLst>
-              <a:ext uri="{FF2B5EF4-FFF2-40B4-BE49-F238E27FC236}">
-                <a16:creationId xmlns:a16="http://schemas.microsoft.com/office/drawing/2014/main" id="{0061502D-3D12-C701-6496-15F9C3F95B73}"/>
-              </a:ext>
-            </a:extLst>
-          </p:cNvPr>
-          <p:cNvGraphicFramePr>
-            <a:graphicFrameLocks noGrp="1"/>
-          </p:cNvGraphicFramePr>
-          <p:nvPr>
-            <p:ph sz="quarter" idx="13"/>
-            <p:extLst>
-              <p:ext uri="{E7BDC344-281C-4309-B0C6-D0EE65EED2A8}">
-                <p202:designPr xmlns:p202="http://schemas.microsoft.com/office/powerpoint/2020/02/main">
-                  <p202:designTagLst>
-                    <p202:designTag name="ARCH:1:CLS" val="InformationBlock"/>
-                    <p202:designTag name="ARCH:1:VSVAR" val="TitledTextBox"/>
-                  </p202:designTagLst>
-                </p202:designPr>
-              </p:ext>
-            </p:extLst>
-          </p:nvPr>
-        </p:nvGraphicFramePr>
-        <p:xfrm>
-          <a:off x="4282441" y="1600200"/>
-          <a:ext cx="6842759" cy="3200400"/>
-        </p:xfrm>
-        <a:graphic>
-          <a:graphicData uri="http://schemas.openxmlformats.org/drawingml/2006/diagram">
-            <dgm:relIds xmlns:dgm="http://schemas.openxmlformats.org/drawingml/2006/diagram" xmlns:r="http://schemas.openxmlformats.org/officeDocument/2006/relationships" r:dm="rId3" r:lo="rId4" r:qs="rId5" r:cs="rId6"/>
-          </a:graphicData>
-        </a:graphic>
-      </p:graphicFrame>
-      <p:sp>
-        <p:nvSpPr>
-          <p:cNvPr id="4" name="Footer Placeholder 3">
-            <a:extLst>
-              <a:ext uri="{FF2B5EF4-FFF2-40B4-BE49-F238E27FC236}">
-                <a16:creationId xmlns:a16="http://schemas.microsoft.com/office/drawing/2014/main" id="{F70304AD-3FF2-4D28-F529-28878BC4F833}"/>
-              </a:ext>
-            </a:extLst>
-          </p:cNvPr>
-          <p:cNvSpPr>
-            <a:spLocks noGrp="1"/>
-          </p:cNvSpPr>
-          <p:nvPr>
-            <p:ph type="ftr" sz="quarter" idx="15"/>
-          </p:nvPr>
-        </p:nvSpPr>
-        <p:spPr>
-          <a:xfrm>
-            <a:off x="381000" y="6347057"/>
-            <a:ext cx="3200400" cy="365125"/>
-          </a:xfrm>
-        </p:spPr>
-        <p:txBody>
-          <a:bodyPr anchor="ctr">
-            <a:normAutofit/>
-          </a:bodyPr>
-          <a:lstStyle/>
-          <a:p>
-            <a:pPr>
-              <a:spcAft>
-                <a:spcPts val="600"/>
-              </a:spcAft>
-            </a:pPr>
-            <a:r>
-              <a:rPr lang="en-US"/>
-              <a:t>Sample Footer Text</a:t>
-            </a:r>
-          </a:p>
-        </p:txBody>
-      </p:sp>
-      <p:sp>
-        <p:nvSpPr>
-          <p:cNvPr id="5" name="Date Placeholder 4">
-            <a:extLst>
-              <a:ext uri="{FF2B5EF4-FFF2-40B4-BE49-F238E27FC236}">
-                <a16:creationId xmlns:a16="http://schemas.microsoft.com/office/drawing/2014/main" id="{902F3ED5-9E55-CE29-FF23-8A55164D25C1}"/>
-              </a:ext>
-            </a:extLst>
-          </p:cNvPr>
-          <p:cNvSpPr>
-            <a:spLocks noGrp="1"/>
-          </p:cNvSpPr>
-          <p:nvPr>
-            <p:ph type="dt" sz="half" idx="14"/>
-          </p:nvPr>
-        </p:nvSpPr>
-        <p:spPr>
-          <a:xfrm>
-            <a:off x="9525000" y="6340475"/>
-            <a:ext cx="1800171" cy="365125"/>
-          </a:xfrm>
-        </p:spPr>
-        <p:txBody>
-          <a:bodyPr anchor="ctr">
-            <a:normAutofit/>
-          </a:bodyPr>
-          <a:lstStyle/>
-          <a:p>
-            <a:pPr>
-              <a:spcAft>
-                <a:spcPts val="600"/>
-              </a:spcAft>
-            </a:pPr>
-            <a:fld id="{192DDA33-D578-2640-B42E-CEBF81697F81}" type="datetime1">
-              <a:rPr lang="en-US" smtClean="0"/>
-              <a:pPr>
-                <a:spcAft>
-                  <a:spcPts val="600"/>
-                </a:spcAft>
-              </a:pPr>
-              <a:t>12/12/2025</a:t>
-            </a:fld>
-            <a:endParaRPr lang="en-US"/>
-          </a:p>
-        </p:txBody>
-      </p:sp>
-      <p:sp>
-        <p:nvSpPr>
-          <p:cNvPr id="6" name="Slide Number Placeholder 5">
-            <a:extLst>
-              <a:ext uri="{FF2B5EF4-FFF2-40B4-BE49-F238E27FC236}">
-                <a16:creationId xmlns:a16="http://schemas.microsoft.com/office/drawing/2014/main" id="{7E8B56FA-B4CC-D17B-424C-196F76C6D90D}"/>
-              </a:ext>
-            </a:extLst>
-          </p:cNvPr>
-          <p:cNvSpPr>
-            <a:spLocks noGrp="1"/>
-          </p:cNvSpPr>
-          <p:nvPr>
-            <p:ph type="sldNum" sz="quarter" idx="16"/>
-          </p:nvPr>
-        </p:nvSpPr>
-        <p:spPr>
-          <a:xfrm>
-            <a:off x="11375694" y="6340475"/>
-            <a:ext cx="429207" cy="365125"/>
-          </a:xfrm>
-        </p:spPr>
-        <p:txBody>
-          <a:bodyPr anchor="ctr">
-            <a:normAutofit/>
-          </a:bodyPr>
-          <a:lstStyle/>
-          <a:p>
-            <a:pPr>
-              <a:spcAft>
-                <a:spcPts val="600"/>
-              </a:spcAft>
-            </a:pPr>
-            <a:fld id="{AEAA3239-9EA4-4A65-A281-97F994456D9F}" type="slidenum">
-              <a:rPr lang="en-US" smtClean="0"/>
-              <a:pPr>
-                <a:spcAft>
-                  <a:spcPts val="600"/>
-                </a:spcAft>
-              </a:pPr>
-              <a:t>13</a:t>
-            </a:fld>
-            <a:endParaRPr lang="en-US"/>
-          </a:p>
-        </p:txBody>
-      </p:sp>
-    </p:spTree>
-    <p:extLst>
-      <p:ext uri="{BB962C8B-B14F-4D97-AF65-F5344CB8AC3E}">
-        <p14:creationId xmlns:p14="http://schemas.microsoft.com/office/powerpoint/2010/main" val="1092044145"/>
-      </p:ext>
-    </p:extLst>
-  </p:cSld>
-  <p:clrMapOvr>
-    <a:masterClrMapping/>
-  </p:clrMapOvr>
-  <p:transition>
-    <p:fade/>
-  </p:transition>
-</p:sld>
-</file>
-
 <file path=ppt/slides/slide2.xml><?xml version="1.0" encoding="utf-8"?>
 <p:sld xmlns:a="http://schemas.openxmlformats.org/drawingml/2006/main" xmlns:r="http://schemas.openxmlformats.org/officeDocument/2006/relationships" xmlns:p="http://schemas.openxmlformats.org/presentationml/2006/main">
   <p:cSld>
@@ -26277,13 +22987,13 @@
         </p:nvSpPr>
         <p:spPr>
           <a:xfrm>
-            <a:off x="0" y="79686"/>
-            <a:ext cx="11430000" cy="6218022"/>
+            <a:off x="0" y="304799"/>
+            <a:ext cx="11430000" cy="6553201"/>
           </a:xfrm>
         </p:spPr>
         <p:txBody>
           <a:bodyPr>
-            <a:normAutofit/>
+            <a:normAutofit fontScale="92500" lnSpcReduction="10000"/>
           </a:bodyPr>
           <a:lstStyle/>
           <a:p>
@@ -26291,140 +23001,421 @@
               <a:defRPr sz="1400"/>
             </a:pPr>
             <a:r>
-              <a:rPr dirty="0"/>
+              <a:rPr sz="1800" b="1" dirty="0">
+                <a:solidFill>
+                  <a:srgbClr val="00B0F0"/>
+                </a:solidFill>
+                <a:latin typeface="-apple-system"/>
+                <a:cs typeface="+mn-cs"/>
+              </a:rPr>
               <a:t>Objective:</a:t>
             </a:r>
             <a:br>
-              <a:rPr dirty="0"/>
+              <a:rPr sz="1800" dirty="0">
+                <a:solidFill>
+                  <a:srgbClr val="1F2328"/>
+                </a:solidFill>
+                <a:latin typeface="-apple-system"/>
+                <a:cs typeface="+mn-cs"/>
+              </a:rPr>
             </a:br>
             <a:r>
-              <a:rPr dirty="0"/>
-              <a:t>Develop a machine learning model to detect cricket objects (bat, ball, stumps, or no object) at grid-cell level in images using classical ML techniques and manual feature engineering.</a:t>
+              <a:rPr sz="1800" dirty="0">
+                <a:solidFill>
+                  <a:srgbClr val="1F2328"/>
+                </a:solidFill>
+                <a:latin typeface="-apple-system"/>
+                <a:cs typeface="+mn-cs"/>
+              </a:rPr>
+              <a:t>Develop a machine learning model to detect cricket objects (bat, ball, stumps, or no object) at grid-cell level </a:t>
+            </a:r>
+            <a:endParaRPr lang="en-IN" sz="1800" dirty="0">
+              <a:solidFill>
+                <a:srgbClr val="1F2328"/>
+              </a:solidFill>
+              <a:latin typeface="-apple-system"/>
+              <a:cs typeface="+mn-cs"/>
+            </a:endParaRPr>
+          </a:p>
+          <a:p>
+            <a:pPr algn="l">
+              <a:defRPr sz="1400"/>
+            </a:pPr>
+            <a:r>
+              <a:rPr sz="1800" dirty="0">
+                <a:solidFill>
+                  <a:srgbClr val="1F2328"/>
+                </a:solidFill>
+                <a:latin typeface="-apple-system"/>
+                <a:cs typeface="+mn-cs"/>
+              </a:rPr>
+              <a:t>in images using classical ML techniques and manual feature engineering.</a:t>
             </a:r>
             <a:br>
-              <a:rPr dirty="0"/>
+              <a:rPr sz="1800" dirty="0">
+                <a:solidFill>
+                  <a:srgbClr val="1F2328"/>
+                </a:solidFill>
+                <a:latin typeface="-apple-system"/>
+                <a:cs typeface="+mn-cs"/>
+              </a:rPr>
             </a:br>
             <a:br>
-              <a:rPr dirty="0"/>
+              <a:rPr sz="1800" dirty="0">
+                <a:solidFill>
+                  <a:srgbClr val="1F2328"/>
+                </a:solidFill>
+                <a:latin typeface="-apple-system"/>
+                <a:cs typeface="+mn-cs"/>
+              </a:rPr>
             </a:br>
             <a:r>
-              <a:rPr dirty="0"/>
+              <a:rPr sz="1800" b="1" dirty="0">
+                <a:solidFill>
+                  <a:srgbClr val="00B0F0"/>
+                </a:solidFill>
+                <a:latin typeface="-apple-system"/>
+                <a:cs typeface="+mn-cs"/>
+              </a:rPr>
               <a:t>Scope &amp; Approach:</a:t>
             </a:r>
             <a:br>
-              <a:rPr dirty="0"/>
+              <a:rPr sz="1800" dirty="0">
+                <a:solidFill>
+                  <a:srgbClr val="1F2328"/>
+                </a:solidFill>
+                <a:latin typeface="-apple-system"/>
+                <a:cs typeface="+mn-cs"/>
+              </a:rPr>
             </a:br>
             <a:r>
-              <a:rPr dirty="0"/>
-              <a:t>• Created dataset of 300+ cricket images (balanced across object classes)</a:t>
+              <a:rPr sz="1800" dirty="0">
+                <a:solidFill>
+                  <a:srgbClr val="1F2328"/>
+                </a:solidFill>
+                <a:latin typeface="-apple-system"/>
+                <a:cs typeface="+mn-cs"/>
+              </a:rPr>
+              <a:t>• Created dataset of </a:t>
+            </a:r>
+            <a:r>
+              <a:rPr lang="en-IN" sz="1800" dirty="0">
+                <a:solidFill>
+                  <a:srgbClr val="1F2328"/>
+                </a:solidFill>
+                <a:latin typeface="-apple-system"/>
+                <a:cs typeface="+mn-cs"/>
+              </a:rPr>
+              <a:t>2</a:t>
+            </a:r>
+            <a:r>
+              <a:rPr sz="1800" dirty="0">
+                <a:solidFill>
+                  <a:srgbClr val="1F2328"/>
+                </a:solidFill>
+                <a:latin typeface="-apple-system"/>
+                <a:cs typeface="+mn-cs"/>
+              </a:rPr>
+              <a:t>00+ cricket images (balanced across object classes)</a:t>
             </a:r>
             <a:br>
-              <a:rPr dirty="0"/>
+              <a:rPr sz="1800" dirty="0">
+                <a:solidFill>
+                  <a:srgbClr val="1F2328"/>
+                </a:solidFill>
+                <a:latin typeface="-apple-system"/>
+                <a:cs typeface="+mn-cs"/>
+              </a:rPr>
             </a:br>
             <a:r>
-              <a:rPr dirty="0"/>
+              <a:rPr sz="1800" dirty="0">
+                <a:solidFill>
+                  <a:srgbClr val="1F2328"/>
+                </a:solidFill>
+                <a:latin typeface="-apple-system"/>
+                <a:cs typeface="+mn-cs"/>
+              </a:rPr>
               <a:t>• Preprocessed images to 800×600 resolution and divided into 8×8 grid cells</a:t>
             </a:r>
             <a:br>
-              <a:rPr dirty="0"/>
+              <a:rPr sz="1800" dirty="0">
+                <a:solidFill>
+                  <a:srgbClr val="1F2328"/>
+                </a:solidFill>
+                <a:latin typeface="-apple-system"/>
+                <a:cs typeface="+mn-cs"/>
+              </a:rPr>
             </a:br>
             <a:r>
-              <a:rPr dirty="0"/>
+              <a:rPr sz="1800" dirty="0">
+                <a:solidFill>
+                  <a:srgbClr val="1F2328"/>
+                </a:solidFill>
+                <a:latin typeface="-apple-system"/>
+                <a:cs typeface="+mn-cs"/>
+              </a:rPr>
               <a:t>• Annotated each cell with object labels (0: no object, 1: ball, 2: bat, 3: stump)</a:t>
             </a:r>
             <a:br>
-              <a:rPr dirty="0"/>
+              <a:rPr sz="1800" dirty="0">
+                <a:solidFill>
+                  <a:srgbClr val="1F2328"/>
+                </a:solidFill>
+                <a:latin typeface="-apple-system"/>
+                <a:cs typeface="+mn-cs"/>
+              </a:rPr>
             </a:br>
             <a:r>
-              <a:rPr dirty="0"/>
+              <a:rPr sz="1800" dirty="0">
+                <a:solidFill>
+                  <a:srgbClr val="1F2328"/>
+                </a:solidFill>
+                <a:latin typeface="-apple-system"/>
+                <a:cs typeface="+mn-cs"/>
+              </a:rPr>
               <a:t>• Extracted handcrafted features (HOG, grayscale) for classification</a:t>
             </a:r>
             <a:br>
-              <a:rPr dirty="0"/>
+              <a:rPr sz="1800" dirty="0">
+                <a:solidFill>
+                  <a:srgbClr val="1F2328"/>
+                </a:solidFill>
+                <a:latin typeface="-apple-system"/>
+                <a:cs typeface="+mn-cs"/>
+              </a:rPr>
             </a:br>
             <a:r>
-              <a:rPr dirty="0"/>
+              <a:rPr sz="1800" dirty="0">
+                <a:solidFill>
+                  <a:srgbClr val="1F2328"/>
+                </a:solidFill>
+                <a:latin typeface="-apple-system"/>
+                <a:cs typeface="+mn-cs"/>
+              </a:rPr>
               <a:t>• Trained and evaluated Random Forest and KNN models</a:t>
             </a:r>
             <a:br>
-              <a:rPr dirty="0"/>
+              <a:rPr sz="1800" dirty="0">
+                <a:solidFill>
+                  <a:srgbClr val="1F2328"/>
+                </a:solidFill>
+                <a:latin typeface="-apple-system"/>
+                <a:cs typeface="+mn-cs"/>
+              </a:rPr>
             </a:br>
             <a:br>
-              <a:rPr dirty="0"/>
+              <a:rPr sz="1800" b="1" dirty="0">
+                <a:solidFill>
+                  <a:srgbClr val="1F2328"/>
+                </a:solidFill>
+                <a:latin typeface="-apple-system"/>
+                <a:cs typeface="+mn-cs"/>
+              </a:rPr>
             </a:br>
             <a:r>
-              <a:rPr dirty="0"/>
+              <a:rPr sz="1800" b="1" dirty="0">
+                <a:solidFill>
+                  <a:srgbClr val="00B0F0"/>
+                </a:solidFill>
+                <a:latin typeface="-apple-system"/>
+                <a:cs typeface="+mn-cs"/>
+              </a:rPr>
               <a:t>Key Deliverables:</a:t>
             </a:r>
             <a:br>
-              <a:rPr dirty="0"/>
+              <a:rPr sz="1800" dirty="0">
+                <a:solidFill>
+                  <a:srgbClr val="1F2328"/>
+                </a:solidFill>
+                <a:latin typeface="-apple-system"/>
+                <a:cs typeface="+mn-cs"/>
+              </a:rPr>
             </a:br>
             <a:r>
-              <a:rPr dirty="0"/>
-              <a:t>• Dataset with annotations</a:t>
+              <a:rPr sz="1800" dirty="0">
+                <a:solidFill>
+                  <a:srgbClr val="1F2328"/>
+                </a:solidFill>
+                <a:latin typeface="-apple-system"/>
+                <a:cs typeface="+mn-cs"/>
+              </a:rPr>
+              <a:t>• Source code &amp; pipelines</a:t>
             </a:r>
             <a:br>
-              <a:rPr dirty="0"/>
+              <a:rPr sz="1800" dirty="0">
+                <a:solidFill>
+                  <a:srgbClr val="1F2328"/>
+                </a:solidFill>
+                <a:latin typeface="-apple-system"/>
+                <a:cs typeface="+mn-cs"/>
+              </a:rPr>
             </a:br>
             <a:r>
-              <a:rPr dirty="0"/>
-              <a:t>• Source code &amp; pipelines</a:t>
+              <a:rPr sz="1800" dirty="0">
+                <a:solidFill>
+                  <a:srgbClr val="1F2328"/>
+                </a:solidFill>
+                <a:latin typeface="-apple-system"/>
+                <a:cs typeface="+mn-cs"/>
+              </a:rPr>
+              <a:t>• Predictions CSV</a:t>
             </a:r>
             <a:br>
-              <a:rPr dirty="0"/>
+              <a:rPr sz="1800" dirty="0">
+                <a:solidFill>
+                  <a:srgbClr val="1F2328"/>
+                </a:solidFill>
+                <a:latin typeface="-apple-system"/>
+                <a:cs typeface="+mn-cs"/>
+              </a:rPr>
             </a:br>
             <a:r>
-              <a:rPr dirty="0"/>
-              <a:t>• Predictions CSV</a:t>
+              <a:rPr sz="1800" dirty="0">
+                <a:solidFill>
+                  <a:srgbClr val="1F2328"/>
+                </a:solidFill>
+                <a:latin typeface="-apple-system"/>
+                <a:cs typeface="+mn-cs"/>
+              </a:rPr>
+              <a:t>• Performance metrics &amp; visualizations</a:t>
             </a:r>
             <a:br>
-              <a:rPr dirty="0"/>
+              <a:rPr sz="1800" dirty="0">
+                <a:solidFill>
+                  <a:srgbClr val="1F2328"/>
+                </a:solidFill>
+                <a:latin typeface="-apple-system"/>
+                <a:cs typeface="+mn-cs"/>
+              </a:rPr>
             </a:br>
             <a:r>
-              <a:rPr dirty="0"/>
-              <a:t>• Performance metrics &amp; visualizations</a:t>
+              <a:rPr sz="1800" dirty="0">
+                <a:solidFill>
+                  <a:srgbClr val="1F2328"/>
+                </a:solidFill>
+                <a:latin typeface="-apple-system"/>
+                <a:cs typeface="+mn-cs"/>
+              </a:rPr>
+              <a:t>• Presentation &amp; 5-min video</a:t>
             </a:r>
             <a:br>
-              <a:rPr dirty="0"/>
-            </a:br>
-            <a:r>
-              <a:rPr dirty="0"/>
-              <a:t>• Presentation &amp; 5-min video</a:t>
-            </a:r>
-            <a:br>
-              <a:rPr dirty="0"/>
+              <a:rPr sz="1800" dirty="0">
+                <a:solidFill>
+                  <a:srgbClr val="1F2328"/>
+                </a:solidFill>
+                <a:latin typeface="-apple-system"/>
+                <a:cs typeface="+mn-cs"/>
+              </a:rPr>
             </a:br>
             <a:br>
-              <a:rPr dirty="0"/>
+              <a:rPr sz="1800" dirty="0">
+                <a:solidFill>
+                  <a:srgbClr val="1F2328"/>
+                </a:solidFill>
+                <a:latin typeface="-apple-system"/>
+                <a:cs typeface="+mn-cs"/>
+              </a:rPr>
             </a:br>
             <a:r>
-              <a:rPr dirty="0"/>
+              <a:rPr sz="1800" b="1" dirty="0">
+                <a:solidFill>
+                  <a:srgbClr val="00B0F0"/>
+                </a:solidFill>
+                <a:latin typeface="-apple-system"/>
+                <a:cs typeface="+mn-cs"/>
+              </a:rPr>
               <a:t>Evaluation Criteria:</a:t>
             </a:r>
             <a:br>
-              <a:rPr dirty="0"/>
+              <a:rPr sz="1800" dirty="0">
+                <a:solidFill>
+                  <a:srgbClr val="1F2328"/>
+                </a:solidFill>
+                <a:latin typeface="-apple-system"/>
+                <a:cs typeface="+mn-cs"/>
+              </a:rPr>
             </a:br>
             <a:r>
-              <a:rPr dirty="0"/>
+              <a:rPr sz="1800" dirty="0">
+                <a:solidFill>
+                  <a:srgbClr val="1F2328"/>
+                </a:solidFill>
+                <a:latin typeface="-apple-system"/>
+                <a:cs typeface="+mn-cs"/>
+              </a:rPr>
               <a:t>• Problem detailing &amp; solution approach</a:t>
             </a:r>
             <a:br>
-              <a:rPr dirty="0"/>
+              <a:rPr sz="1800" dirty="0">
+                <a:solidFill>
+                  <a:srgbClr val="1F2328"/>
+                </a:solidFill>
+                <a:latin typeface="-apple-system"/>
+                <a:cs typeface="+mn-cs"/>
+              </a:rPr>
             </a:br>
             <a:r>
-              <a:rPr dirty="0"/>
-              <a:t>• Model performance on train/test &amp; unseen data</a:t>
+              <a:rPr sz="1800" dirty="0">
+                <a:solidFill>
+                  <a:srgbClr val="1F2328"/>
+                </a:solidFill>
+                <a:latin typeface="-apple-system"/>
+                <a:cs typeface="+mn-cs"/>
+              </a:rPr>
+              <a:t>• Model performance on train/test</a:t>
             </a:r>
             <a:br>
-              <a:rPr dirty="0"/>
+              <a:rPr sz="1800" dirty="0">
+                <a:solidFill>
+                  <a:srgbClr val="1F2328"/>
+                </a:solidFill>
+                <a:latin typeface="-apple-system"/>
+                <a:cs typeface="+mn-cs"/>
+              </a:rPr>
             </a:br>
             <a:r>
-              <a:rPr dirty="0"/>
+              <a:rPr sz="1800" dirty="0">
+                <a:solidFill>
+                  <a:srgbClr val="1F2328"/>
+                </a:solidFill>
+                <a:latin typeface="-apple-system"/>
+                <a:cs typeface="+mn-cs"/>
+              </a:rPr>
               <a:t>• Quality of documentation and presentation</a:t>
             </a:r>
           </a:p>
         </p:txBody>
       </p:sp>
+      <p:pic>
+        <p:nvPicPr>
+          <p:cNvPr id="5" name="Picture 4">
+            <a:extLst>
+              <a:ext uri="{FF2B5EF4-FFF2-40B4-BE49-F238E27FC236}">
+                <a16:creationId xmlns:a16="http://schemas.microsoft.com/office/drawing/2014/main" id="{96D00A60-29BE-E66E-27C7-0450E2F90C7E}"/>
+              </a:ext>
+            </a:extLst>
+          </p:cNvPr>
+          <p:cNvPicPr>
+            <a:picLocks noChangeAspect="1"/>
+          </p:cNvPicPr>
+          <p:nvPr/>
+        </p:nvPicPr>
+        <p:blipFill>
+          <a:blip r:embed="rId2"/>
+          <a:stretch>
+            <a:fillRect/>
+          </a:stretch>
+        </p:blipFill>
+        <p:spPr>
+          <a:xfrm>
+            <a:off x="9697534" y="-1"/>
+            <a:ext cx="2414954" cy="974035"/>
+          </a:xfrm>
+          <a:prstGeom prst="rect">
+            <a:avLst/>
+          </a:prstGeom>
+        </p:spPr>
+      </p:pic>
     </p:spTree>
   </p:cSld>
   <p:clrMapOvr>
@@ -26468,7 +23459,7 @@
         </p:nvSpPr>
         <p:spPr>
           <a:xfrm>
-            <a:off x="380999" y="331237"/>
+            <a:off x="381000" y="145818"/>
             <a:ext cx="5490883" cy="969512"/>
           </a:xfrm>
         </p:spPr>
@@ -26479,48 +23470,12 @@
           <a:lstStyle/>
           <a:p>
             <a:r>
-              <a:rPr lang="en-US" dirty="0"/>
-              <a:t>Step-by-Step Workflow</a:t>
-            </a:r>
-          </a:p>
-        </p:txBody>
-      </p:sp>
-      <p:sp>
-        <p:nvSpPr>
-          <p:cNvPr id="4" name="Footer Placeholder 3">
-            <a:extLst>
-              <a:ext uri="{FF2B5EF4-FFF2-40B4-BE49-F238E27FC236}">
-                <a16:creationId xmlns:a16="http://schemas.microsoft.com/office/drawing/2014/main" id="{B5301672-F88E-0DD0-22A6-0486E7826BDF}"/>
-              </a:ext>
-            </a:extLst>
-          </p:cNvPr>
-          <p:cNvSpPr>
-            <a:spLocks noGrp="1"/>
-          </p:cNvSpPr>
-          <p:nvPr>
-            <p:ph type="ftr" sz="quarter" idx="15"/>
-          </p:nvPr>
-        </p:nvSpPr>
-        <p:spPr>
-          <a:xfrm>
-            <a:off x="381000" y="6347057"/>
-            <a:ext cx="3200400" cy="365125"/>
-          </a:xfrm>
-        </p:spPr>
-        <p:txBody>
-          <a:bodyPr anchor="ctr">
-            <a:normAutofit/>
-          </a:bodyPr>
-          <a:lstStyle/>
-          <a:p>
-            <a:pPr>
-              <a:spcAft>
-                <a:spcPts val="600"/>
-              </a:spcAft>
-            </a:pPr>
-            <a:r>
-              <a:rPr lang="en-US" dirty="0"/>
-              <a:t>Sample Footer Text</a:t>
+              <a:rPr lang="en-US" dirty="0">
+                <a:solidFill>
+                  <a:srgbClr val="00B0F0"/>
+                </a:solidFill>
+              </a:rPr>
+              <a:t> Step-by-Step Workflow</a:t>
             </a:r>
           </a:p>
         </p:txBody>
@@ -26565,7 +23520,7 @@
                   <a:spcPts val="600"/>
                 </a:spcAft>
               </a:pPr>
-              <a:t>12/12/2025</a:t>
+              <a:t>12/13/2025</a:t>
             </a:fld>
             <a:endParaRPr lang="en-US"/>
           </a:p>
@@ -26641,8 +23596,38 @@
         </p:blipFill>
         <p:spPr>
           <a:xfrm>
-            <a:off x="657432" y="1099712"/>
-            <a:ext cx="7128667" cy="5423325"/>
+            <a:off x="776702" y="1282275"/>
+            <a:ext cx="7308399" cy="5423325"/>
+          </a:xfrm>
+          <a:prstGeom prst="rect">
+            <a:avLst/>
+          </a:prstGeom>
+        </p:spPr>
+      </p:pic>
+      <p:pic>
+        <p:nvPicPr>
+          <p:cNvPr id="8" name="Picture 7">
+            <a:extLst>
+              <a:ext uri="{FF2B5EF4-FFF2-40B4-BE49-F238E27FC236}">
+                <a16:creationId xmlns:a16="http://schemas.microsoft.com/office/drawing/2014/main" id="{B993E837-B091-13F3-141D-BAFEC3ECE506}"/>
+              </a:ext>
+            </a:extLst>
+          </p:cNvPr>
+          <p:cNvPicPr>
+            <a:picLocks noChangeAspect="1"/>
+          </p:cNvPicPr>
+          <p:nvPr/>
+        </p:nvPicPr>
+        <p:blipFill>
+          <a:blip r:embed="rId4"/>
+          <a:stretch>
+            <a:fillRect/>
+          </a:stretch>
+        </p:blipFill>
+        <p:spPr>
+          <a:xfrm>
+            <a:off x="9601199" y="0"/>
+            <a:ext cx="2590801" cy="905606"/>
           </a:xfrm>
           <a:prstGeom prst="rect">
             <a:avLst/>
@@ -26711,7 +23696,11 @@
           <a:lstStyle/>
           <a:p>
             <a:r>
-              <a:rPr lang="en-US" dirty="0"/>
+              <a:rPr lang="en-US" dirty="0">
+                <a:solidFill>
+                  <a:srgbClr val="00B0F0"/>
+                </a:solidFill>
+              </a:rPr>
               <a:t>Data Collection &amp; Pre Processing</a:t>
             </a:r>
           </a:p>
@@ -26797,7 +23786,7 @@
                   <a:spcPts val="600"/>
                 </a:spcAft>
               </a:pPr>
-              <a:t>12/12/2025</a:t>
+              <a:t>12/13/2025</a:t>
             </a:fld>
             <a:endParaRPr lang="en-US"/>
           </a:p>
@@ -26863,7 +23852,7 @@
         </p:nvSpPr>
         <p:spPr>
           <a:xfrm>
-            <a:off x="533400" y="1447800"/>
+            <a:off x="288240" y="928352"/>
             <a:ext cx="5132294" cy="2215991"/>
           </a:xfrm>
           <a:prstGeom prst="rect">
@@ -26972,7 +23961,7 @@
         </p:blipFill>
         <p:spPr>
           <a:xfrm>
-            <a:off x="5826187" y="931443"/>
+            <a:off x="5779946" y="1029225"/>
             <a:ext cx="6249272" cy="5682957"/>
           </a:xfrm>
           <a:prstGeom prst="rect">
@@ -27002,8 +23991,38 @@
         </p:blipFill>
         <p:spPr>
           <a:xfrm>
-            <a:off x="667968" y="3073130"/>
-            <a:ext cx="4035825" cy="3354610"/>
+            <a:off x="374901" y="2902226"/>
+            <a:ext cx="4415759" cy="3596727"/>
+          </a:xfrm>
+          <a:prstGeom prst="rect">
+            <a:avLst/>
+          </a:prstGeom>
+        </p:spPr>
+      </p:pic>
+      <p:pic>
+        <p:nvPicPr>
+          <p:cNvPr id="7" name="Picture 6">
+            <a:extLst>
+              <a:ext uri="{FF2B5EF4-FFF2-40B4-BE49-F238E27FC236}">
+                <a16:creationId xmlns:a16="http://schemas.microsoft.com/office/drawing/2014/main" id="{3B2FDCD4-2261-E279-D3E9-788DC113AE84}"/>
+              </a:ext>
+            </a:extLst>
+          </p:cNvPr>
+          <p:cNvPicPr>
+            <a:picLocks noChangeAspect="1"/>
+          </p:cNvPicPr>
+          <p:nvPr/>
+        </p:nvPicPr>
+        <p:blipFill>
+          <a:blip r:embed="rId5"/>
+          <a:stretch>
+            <a:fillRect/>
+          </a:stretch>
+        </p:blipFill>
+        <p:spPr>
+          <a:xfrm>
+            <a:off x="9616553" y="-1"/>
+            <a:ext cx="2575447" cy="976487"/>
           </a:xfrm>
           <a:prstGeom prst="rect">
             <a:avLst/>
@@ -27067,8 +24086,8 @@
         </p:nvSpPr>
         <p:spPr>
           <a:xfrm>
-            <a:off x="374902" y="243600"/>
-            <a:ext cx="11429999" cy="755965"/>
+            <a:off x="374903" y="243600"/>
+            <a:ext cx="3783860" cy="552017"/>
           </a:xfrm>
         </p:spPr>
         <p:txBody>
@@ -27078,7 +24097,11 @@
           <a:lstStyle/>
           <a:p>
             <a:r>
-              <a:rPr lang="en-US" dirty="0"/>
+              <a:rPr lang="en-US" dirty="0">
+                <a:solidFill>
+                  <a:srgbClr val="00B0F0"/>
+                </a:solidFill>
+              </a:rPr>
               <a:t>Annotation</a:t>
             </a:r>
           </a:p>
@@ -27367,8 +24390,8 @@
         </p:blipFill>
         <p:spPr>
           <a:xfrm>
-            <a:off x="5794066" y="798730"/>
-            <a:ext cx="6521913" cy="5932211"/>
+            <a:off x="5758383" y="1035174"/>
+            <a:ext cx="6433617" cy="5943600"/>
           </a:xfrm>
           <a:prstGeom prst="rect">
             <a:avLst/>
@@ -27475,7 +24498,7 @@
         </p:nvSpPr>
         <p:spPr>
           <a:xfrm>
-            <a:off x="6493093" y="218259"/>
+            <a:off x="6089901" y="530279"/>
             <a:ext cx="3403942" cy="369332"/>
           </a:xfrm>
           <a:prstGeom prst="rect">
@@ -27505,6 +24528,36 @@
           </a:p>
         </p:txBody>
       </p:sp>
+      <p:pic>
+        <p:nvPicPr>
+          <p:cNvPr id="7" name="Picture 6">
+            <a:extLst>
+              <a:ext uri="{FF2B5EF4-FFF2-40B4-BE49-F238E27FC236}">
+                <a16:creationId xmlns:a16="http://schemas.microsoft.com/office/drawing/2014/main" id="{59D0A746-881A-E868-766C-B7A0903A824B}"/>
+              </a:ext>
+            </a:extLst>
+          </p:cNvPr>
+          <p:cNvPicPr>
+            <a:picLocks noChangeAspect="1"/>
+          </p:cNvPicPr>
+          <p:nvPr/>
+        </p:nvPicPr>
+        <p:blipFill>
+          <a:blip r:embed="rId5"/>
+          <a:stretch>
+            <a:fillRect/>
+          </a:stretch>
+        </p:blipFill>
+        <p:spPr>
+          <a:xfrm>
+            <a:off x="9680331" y="0"/>
+            <a:ext cx="2511669" cy="899611"/>
+          </a:xfrm>
+          <a:prstGeom prst="rect">
+            <a:avLst/>
+          </a:prstGeom>
+        </p:spPr>
+      </p:pic>
     </p:spTree>
     <p:extLst>
       <p:ext uri="{BB962C8B-B14F-4D97-AF65-F5344CB8AC3E}">
@@ -27540,46 +24593,6 @@
       </p:grpSpPr>
       <p:sp>
         <p:nvSpPr>
-          <p:cNvPr id="4" name="Footer Placeholder 3">
-            <a:extLst>
-              <a:ext uri="{FF2B5EF4-FFF2-40B4-BE49-F238E27FC236}">
-                <a16:creationId xmlns:a16="http://schemas.microsoft.com/office/drawing/2014/main" id="{F2D362BE-F642-C91C-FBF0-86A6AE786716}"/>
-              </a:ext>
-            </a:extLst>
-          </p:cNvPr>
-          <p:cNvSpPr>
-            <a:spLocks noGrp="1"/>
-          </p:cNvSpPr>
-          <p:nvPr>
-            <p:ph type="ftr" sz="quarter" idx="15"/>
-          </p:nvPr>
-        </p:nvSpPr>
-        <p:spPr>
-          <a:xfrm>
-            <a:off x="381000" y="6347057"/>
-            <a:ext cx="3200400" cy="365125"/>
-          </a:xfrm>
-        </p:spPr>
-        <p:txBody>
-          <a:bodyPr anchor="ctr">
-            <a:normAutofit/>
-          </a:bodyPr>
-          <a:lstStyle/>
-          <a:p>
-            <a:pPr>
-              <a:spcAft>
-                <a:spcPts val="600"/>
-              </a:spcAft>
-            </a:pPr>
-            <a:r>
-              <a:rPr lang="en-US"/>
-              <a:t>Sample Footer Text</a:t>
-            </a:r>
-          </a:p>
-        </p:txBody>
-      </p:sp>
-      <p:sp>
-        <p:nvSpPr>
           <p:cNvPr id="5" name="Date Placeholder 4">
             <a:extLst>
               <a:ext uri="{FF2B5EF4-FFF2-40B4-BE49-F238E27FC236}">
@@ -27747,8 +24760,38 @@
         </p:blipFill>
         <p:spPr>
           <a:xfrm>
-            <a:off x="80682" y="1555377"/>
-            <a:ext cx="12192000" cy="4676383"/>
+            <a:off x="0" y="1938017"/>
+            <a:ext cx="12003101" cy="4676383"/>
+          </a:xfrm>
+          <a:prstGeom prst="rect">
+            <a:avLst/>
+          </a:prstGeom>
+        </p:spPr>
+      </p:pic>
+      <p:pic>
+        <p:nvPicPr>
+          <p:cNvPr id="3" name="Picture 2">
+            <a:extLst>
+              <a:ext uri="{FF2B5EF4-FFF2-40B4-BE49-F238E27FC236}">
+                <a16:creationId xmlns:a16="http://schemas.microsoft.com/office/drawing/2014/main" id="{3D79031C-B968-17E4-4EE8-6836EB02DA4D}"/>
+              </a:ext>
+            </a:extLst>
+          </p:cNvPr>
+          <p:cNvPicPr>
+            <a:picLocks noChangeAspect="1"/>
+          </p:cNvPicPr>
+          <p:nvPr/>
+        </p:nvPicPr>
+        <p:blipFill>
+          <a:blip r:embed="rId4"/>
+          <a:stretch>
+            <a:fillRect/>
+          </a:stretch>
+        </p:blipFill>
+        <p:spPr>
+          <a:xfrm>
+            <a:off x="9668828" y="0"/>
+            <a:ext cx="2523171" cy="905606"/>
           </a:xfrm>
           <a:prstGeom prst="rect">
             <a:avLst/>
@@ -27868,7 +24911,7 @@
                   <a:spcPts val="600"/>
                 </a:spcAft>
               </a:pPr>
-              <a:t>12/12/2025</a:t>
+              <a:t>12/13/2025</a:t>
             </a:fld>
             <a:endParaRPr lang="en-US"/>
           </a:p>
@@ -27934,8 +24977,8 @@
         </p:nvSpPr>
         <p:spPr>
           <a:xfrm>
-            <a:off x="0" y="145818"/>
-            <a:ext cx="6096000" cy="2769989"/>
+            <a:off x="-22234" y="-8665"/>
+            <a:ext cx="5710517" cy="2354491"/>
           </a:xfrm>
           <a:prstGeom prst="rect">
             <a:avLst/>
@@ -27956,11 +24999,14 @@
             </a:pPr>
             <a:r>
               <a:rPr lang="en-US" sz="2700" dirty="0">
+                <a:solidFill>
+                  <a:srgbClr val="00B0F0"/>
+                </a:solidFill>
                 <a:latin typeface="+mj-lt"/>
                 <a:ea typeface="+mj-ea"/>
                 <a:cs typeface="Biome" panose="020B0503030204020804" pitchFamily="34" charset="0"/>
               </a:rPr>
-              <a:t>Feature Engineering &amp; Preprocessing</a:t>
+              <a:t>Feature Engineering </a:t>
             </a:r>
           </a:p>
           <a:p>
@@ -28044,8 +25090,8 @@
         </p:blipFill>
         <p:spPr>
           <a:xfrm>
-            <a:off x="6096000" y="3763496"/>
-            <a:ext cx="5051223" cy="2317376"/>
+            <a:off x="220171" y="5097402"/>
+            <a:ext cx="4423548" cy="1731022"/>
           </a:xfrm>
           <a:prstGeom prst="rect">
             <a:avLst/>
@@ -28074,8 +25120,98 @@
         </p:blipFill>
         <p:spPr>
           <a:xfrm>
-            <a:off x="501908" y="2920484"/>
-            <a:ext cx="4458322" cy="3467584"/>
+            <a:off x="219636" y="2390350"/>
+            <a:ext cx="4424082" cy="2662528"/>
+          </a:xfrm>
+          <a:prstGeom prst="rect">
+            <a:avLst/>
+          </a:prstGeom>
+        </p:spPr>
+      </p:pic>
+      <p:pic>
+        <p:nvPicPr>
+          <p:cNvPr id="7" name="Picture 6">
+            <a:extLst>
+              <a:ext uri="{FF2B5EF4-FFF2-40B4-BE49-F238E27FC236}">
+                <a16:creationId xmlns:a16="http://schemas.microsoft.com/office/drawing/2014/main" id="{9C054A0A-3C69-2A85-762A-21766D25B10D}"/>
+              </a:ext>
+            </a:extLst>
+          </p:cNvPr>
+          <p:cNvPicPr>
+            <a:picLocks noChangeAspect="1"/>
+          </p:cNvPicPr>
+          <p:nvPr/>
+        </p:nvPicPr>
+        <p:blipFill>
+          <a:blip r:embed="rId5"/>
+          <a:stretch>
+            <a:fillRect/>
+          </a:stretch>
+        </p:blipFill>
+        <p:spPr>
+          <a:xfrm>
+            <a:off x="6136685" y="1072838"/>
+            <a:ext cx="5468113" cy="2545976"/>
+          </a:xfrm>
+          <a:prstGeom prst="rect">
+            <a:avLst/>
+          </a:prstGeom>
+        </p:spPr>
+      </p:pic>
+      <p:pic>
+        <p:nvPicPr>
+          <p:cNvPr id="9" name="Picture 8">
+            <a:extLst>
+              <a:ext uri="{FF2B5EF4-FFF2-40B4-BE49-F238E27FC236}">
+                <a16:creationId xmlns:a16="http://schemas.microsoft.com/office/drawing/2014/main" id="{79FFE25F-33DE-253E-7BD1-EE03F233C93A}"/>
+              </a:ext>
+            </a:extLst>
+          </p:cNvPr>
+          <p:cNvPicPr>
+            <a:picLocks noChangeAspect="1"/>
+          </p:cNvPicPr>
+          <p:nvPr/>
+        </p:nvPicPr>
+        <p:blipFill>
+          <a:blip r:embed="rId6"/>
+          <a:stretch>
+            <a:fillRect/>
+          </a:stretch>
+        </p:blipFill>
+        <p:spPr>
+          <a:xfrm>
+            <a:off x="6096000" y="3877235"/>
+            <a:ext cx="5453612" cy="2828365"/>
+          </a:xfrm>
+          <a:prstGeom prst="rect">
+            <a:avLst/>
+          </a:prstGeom>
+        </p:spPr>
+      </p:pic>
+      <p:pic>
+        <p:nvPicPr>
+          <p:cNvPr id="11" name="Picture 10">
+            <a:extLst>
+              <a:ext uri="{FF2B5EF4-FFF2-40B4-BE49-F238E27FC236}">
+                <a16:creationId xmlns:a16="http://schemas.microsoft.com/office/drawing/2014/main" id="{B67678D5-CB37-4553-9BE1-6FC8013CA124}"/>
+              </a:ext>
+            </a:extLst>
+          </p:cNvPr>
+          <p:cNvPicPr>
+            <a:picLocks noChangeAspect="1"/>
+          </p:cNvPicPr>
+          <p:nvPr/>
+        </p:nvPicPr>
+        <p:blipFill>
+          <a:blip r:embed="rId7"/>
+          <a:stretch>
+            <a:fillRect/>
+          </a:stretch>
+        </p:blipFill>
+        <p:spPr>
+          <a:xfrm>
+            <a:off x="9777046" y="44408"/>
+            <a:ext cx="2414954" cy="905606"/>
           </a:xfrm>
           <a:prstGeom prst="rect">
             <a:avLst/>
@@ -28133,19 +25269,38 @@
         </p:nvSpPr>
         <p:spPr>
           <a:xfrm>
-            <a:off x="380999" y="141515"/>
+            <a:off x="193925" y="230080"/>
             <a:ext cx="11610976" cy="692203"/>
           </a:xfrm>
         </p:spPr>
         <p:txBody>
           <a:bodyPr anchor="t">
-            <a:normAutofit/>
+            <a:normAutofit fontScale="90000"/>
           </a:bodyPr>
           <a:lstStyle/>
           <a:p>
             <a:r>
-              <a:rPr lang="en-US" dirty="0"/>
-              <a:t>Model Training and Evaluation – Random Forest And KNN</a:t>
+              <a:rPr lang="en-US" dirty="0">
+                <a:solidFill>
+                  <a:srgbClr val="00B0F0"/>
+                </a:solidFill>
+              </a:rPr>
+              <a:t>Model Training and Evaluation – Random Forest</a:t>
+            </a:r>
+            <a:br>
+              <a:rPr lang="en-US" dirty="0">
+                <a:solidFill>
+                  <a:srgbClr val="00B0F0"/>
+                </a:solidFill>
+              </a:rPr>
+            </a:br>
+            <a:r>
+              <a:rPr lang="en-US" dirty="0">
+                <a:solidFill>
+                  <a:srgbClr val="00B0F0"/>
+                </a:solidFill>
+              </a:rPr>
+              <a:t> And KNN</a:t>
             </a:r>
           </a:p>
         </p:txBody>
@@ -28297,14 +25452,14 @@
           <p:nvPr>
             <p:extLst>
               <p:ext uri="{D42A27DB-BD31-4B8C-83A1-F6EECF244321}">
-                <p14:modId xmlns:p14="http://schemas.microsoft.com/office/powerpoint/2010/main" val="4059844201"/>
+                <p14:modId xmlns:p14="http://schemas.microsoft.com/office/powerpoint/2010/main" val="3940009097"/>
               </p:ext>
             </p:extLst>
           </p:nvPr>
         </p:nvGraphicFramePr>
         <p:xfrm>
-          <a:off x="589333" y="939613"/>
-          <a:ext cx="9792916" cy="4937312"/>
+          <a:off x="667954" y="1409745"/>
+          <a:ext cx="9312184" cy="4937312"/>
         </p:xfrm>
         <a:graphic>
           <a:graphicData uri="http://schemas.openxmlformats.org/drawingml/2006/table">
@@ -28319,49 +25474,49 @@
                 </a:effectLst>
               </a:tblPr>
               <a:tblGrid>
-                <a:gridCol w="1398988">
+                <a:gridCol w="1330312">
                   <a:extLst>
                     <a:ext uri="{9D8B030D-6E8A-4147-A177-3AD203B41FA5}">
                       <a16:colId xmlns:a16="http://schemas.microsoft.com/office/drawing/2014/main" val="3745787776"/>
                     </a:ext>
                   </a:extLst>
                 </a:gridCol>
-                <a:gridCol w="1123924">
+                <a:gridCol w="1068751">
                   <a:extLst>
                     <a:ext uri="{9D8B030D-6E8A-4147-A177-3AD203B41FA5}">
                       <a16:colId xmlns:a16="http://schemas.microsoft.com/office/drawing/2014/main" val="315781235"/>
                     </a:ext>
                   </a:extLst>
                 </a:gridCol>
-                <a:gridCol w="1323791">
+                <a:gridCol w="1258806">
                   <a:extLst>
                     <a:ext uri="{9D8B030D-6E8A-4147-A177-3AD203B41FA5}">
                       <a16:colId xmlns:a16="http://schemas.microsoft.com/office/drawing/2014/main" val="3718985804"/>
                     </a:ext>
                   </a:extLst>
                 </a:gridCol>
-                <a:gridCol w="1323791">
+                <a:gridCol w="1258806">
                   <a:extLst>
                     <a:ext uri="{9D8B030D-6E8A-4147-A177-3AD203B41FA5}">
                       <a16:colId xmlns:a16="http://schemas.microsoft.com/office/drawing/2014/main" val="406499367"/>
                     </a:ext>
                   </a:extLst>
                 </a:gridCol>
-                <a:gridCol w="1215285">
+                <a:gridCol w="1155627">
                   <a:extLst>
                     <a:ext uri="{9D8B030D-6E8A-4147-A177-3AD203B41FA5}">
                       <a16:colId xmlns:a16="http://schemas.microsoft.com/office/drawing/2014/main" val="4214259754"/>
                     </a:ext>
                   </a:extLst>
                 </a:gridCol>
-                <a:gridCol w="1334643">
+                <a:gridCol w="1269126">
                   <a:extLst>
                     <a:ext uri="{9D8B030D-6E8A-4147-A177-3AD203B41FA5}">
                       <a16:colId xmlns:a16="http://schemas.microsoft.com/office/drawing/2014/main" val="3929732295"/>
                     </a:ext>
                   </a:extLst>
                 </a:gridCol>
-                <a:gridCol w="2072494">
+                <a:gridCol w="1970756">
                   <a:extLst>
                     <a:ext uri="{9D8B030D-6E8A-4147-A177-3AD203B41FA5}">
                       <a16:colId xmlns:a16="http://schemas.microsoft.com/office/drawing/2014/main" val="3886608585"/>
@@ -28423,7 +25578,9 @@
                       <a:headEnd type="none" w="med" len="med"/>
                       <a:tailEnd type="none" w="med" len="med"/>
                     </a:lnB>
-                    <a:noFill/>
+                    <a:solidFill>
+                      <a:schemeClr val="bg2"/>
+                    </a:solidFill>
                   </a:tcPr>
                 </a:tc>
                 <a:tc>
@@ -28479,7 +25636,9 @@
                       <a:headEnd type="none" w="med" len="med"/>
                       <a:tailEnd type="none" w="med" len="med"/>
                     </a:lnB>
-                    <a:noFill/>
+                    <a:solidFill>
+                      <a:schemeClr val="bg2"/>
+                    </a:solidFill>
                   </a:tcPr>
                 </a:tc>
                 <a:tc>
@@ -28535,7 +25694,9 @@
                       <a:headEnd type="none" w="med" len="med"/>
                       <a:tailEnd type="none" w="med" len="med"/>
                     </a:lnB>
-                    <a:noFill/>
+                    <a:solidFill>
+                      <a:schemeClr val="bg2"/>
+                    </a:solidFill>
                   </a:tcPr>
                 </a:tc>
                 <a:tc>
@@ -28591,7 +25752,9 @@
                       <a:headEnd type="none" w="med" len="med"/>
                       <a:tailEnd type="none" w="med" len="med"/>
                     </a:lnB>
-                    <a:noFill/>
+                    <a:solidFill>
+                      <a:schemeClr val="bg2"/>
+                    </a:solidFill>
                   </a:tcPr>
                 </a:tc>
                 <a:tc>
@@ -28647,7 +25810,9 @@
                       <a:headEnd type="none" w="med" len="med"/>
                       <a:tailEnd type="none" w="med" len="med"/>
                     </a:lnB>
-                    <a:noFill/>
+                    <a:solidFill>
+                      <a:schemeClr val="bg2"/>
+                    </a:solidFill>
                   </a:tcPr>
                 </a:tc>
                 <a:tc>
@@ -28703,7 +25868,9 @@
                       <a:headEnd type="none" w="med" len="med"/>
                       <a:tailEnd type="none" w="med" len="med"/>
                     </a:lnB>
-                    <a:noFill/>
+                    <a:solidFill>
+                      <a:schemeClr val="bg2"/>
+                    </a:solidFill>
                   </a:tcPr>
                 </a:tc>
                 <a:tc>
@@ -28759,7 +25926,9 @@
                       <a:headEnd type="none" w="med" len="med"/>
                       <a:tailEnd type="none" w="med" len="med"/>
                     </a:lnB>
-                    <a:noFill/>
+                    <a:solidFill>
+                      <a:schemeClr val="bg2"/>
+                    </a:solidFill>
                   </a:tcPr>
                 </a:tc>
                 <a:extLst>
@@ -28825,7 +25994,9 @@
                       <a:headEnd type="none" w="med" len="med"/>
                       <a:tailEnd type="none" w="med" len="med"/>
                     </a:lnB>
-                    <a:noFill/>
+                    <a:solidFill>
+                      <a:schemeClr val="bg2"/>
+                    </a:solidFill>
                   </a:tcPr>
                 </a:tc>
                 <a:tc>
@@ -28837,8 +26008,14 @@
                         <a:buNone/>
                       </a:pPr>
                       <a:r>
-                        <a:rPr lang="en-IN" sz="1700" dirty="0">
+                        <a:rPr lang="en-IN" sz="1700" kern="1200" dirty="0">
+                          <a:solidFill>
+                            <a:schemeClr val="tx1"/>
+                          </a:solidFill>
                           <a:effectLst/>
+                          <a:latin typeface="+mn-lt"/>
+                          <a:ea typeface="+mn-ea"/>
+                          <a:cs typeface="+mn-cs"/>
                         </a:rPr>
                         <a:t>0.80</a:t>
                       </a:r>
@@ -28881,7 +26058,9 @@
                       <a:headEnd type="none" w="med" len="med"/>
                       <a:tailEnd type="none" w="med" len="med"/>
                     </a:lnB>
-                    <a:noFill/>
+                    <a:solidFill>
+                      <a:srgbClr val="00B050"/>
+                    </a:solidFill>
                   </a:tcPr>
                 </a:tc>
                 <a:tc>
@@ -28993,7 +26172,9 @@
                       <a:headEnd type="none" w="med" len="med"/>
                       <a:tailEnd type="none" w="med" len="med"/>
                     </a:lnB>
-                    <a:noFill/>
+                    <a:solidFill>
+                      <a:srgbClr val="00B050"/>
+                    </a:solidFill>
                   </a:tcPr>
                 </a:tc>
                 <a:tc>
@@ -29105,7 +26286,9 @@
                       <a:headEnd type="none" w="med" len="med"/>
                       <a:tailEnd type="none" w="med" len="med"/>
                     </a:lnB>
-                    <a:noFill/>
+                    <a:solidFill>
+                      <a:srgbClr val="00B050"/>
+                    </a:solidFill>
                   </a:tcPr>
                 </a:tc>
                 <a:tc>
@@ -29224,7 +26407,9 @@
                       <a:headEnd type="none" w="med" len="med"/>
                       <a:tailEnd type="none" w="med" len="med"/>
                     </a:lnB>
-                    <a:noFill/>
+                    <a:solidFill>
+                      <a:schemeClr val="bg2"/>
+                    </a:solidFill>
                   </a:tcPr>
                 </a:tc>
                 <a:tc>
@@ -29236,8 +26421,14 @@
                         <a:buNone/>
                       </a:pPr>
                       <a:r>
-                        <a:rPr lang="en-IN" sz="1700" dirty="0">
+                        <a:rPr lang="en-IN" sz="1700" kern="1200" dirty="0">
+                          <a:solidFill>
+                            <a:schemeClr val="tx1"/>
+                          </a:solidFill>
                           <a:effectLst/>
+                          <a:latin typeface="+mn-lt"/>
+                          <a:ea typeface="+mn-ea"/>
+                          <a:cs typeface="+mn-cs"/>
                         </a:rPr>
                         <a:t>0.85</a:t>
                       </a:r>
@@ -29280,7 +26471,9 @@
                       <a:headEnd type="none" w="med" len="med"/>
                       <a:tailEnd type="none" w="med" len="med"/>
                     </a:lnB>
-                    <a:noFill/>
+                    <a:solidFill>
+                      <a:srgbClr val="00B050"/>
+                    </a:solidFill>
                   </a:tcPr>
                 </a:tc>
                 <a:tc>
@@ -29392,7 +26585,9 @@
                       <a:headEnd type="none" w="med" len="med"/>
                       <a:tailEnd type="none" w="med" len="med"/>
                     </a:lnB>
-                    <a:noFill/>
+                    <a:solidFill>
+                      <a:srgbClr val="00B050"/>
+                    </a:solidFill>
                   </a:tcPr>
                 </a:tc>
                 <a:tc>
@@ -29504,7 +26699,9 @@
                       <a:headEnd type="none" w="med" len="med"/>
                       <a:tailEnd type="none" w="med" len="med"/>
                     </a:lnB>
-                    <a:noFill/>
+                    <a:solidFill>
+                      <a:srgbClr val="00B050"/>
+                    </a:solidFill>
                   </a:tcPr>
                 </a:tc>
                 <a:tc>
@@ -29623,7 +26820,9 @@
                       <a:headEnd type="none" w="med" len="med"/>
                       <a:tailEnd type="none" w="med" len="med"/>
                     </a:lnB>
-                    <a:noFill/>
+                    <a:solidFill>
+                      <a:schemeClr val="bg2"/>
+                    </a:solidFill>
                   </a:tcPr>
                 </a:tc>
                 <a:tc>
@@ -29635,8 +26834,14 @@
                         <a:buNone/>
                       </a:pPr>
                       <a:r>
-                        <a:rPr lang="en-IN" sz="1700" dirty="0">
+                        <a:rPr lang="en-IN" sz="1700" kern="1200" dirty="0">
+                          <a:solidFill>
+                            <a:schemeClr val="tx1"/>
+                          </a:solidFill>
                           <a:effectLst/>
+                          <a:latin typeface="+mn-lt"/>
+                          <a:ea typeface="+mn-ea"/>
+                          <a:cs typeface="+mn-cs"/>
                         </a:rPr>
                         <a:t>0.92</a:t>
                       </a:r>
@@ -29679,7 +26884,9 @@
                       <a:headEnd type="none" w="med" len="med"/>
                       <a:tailEnd type="none" w="med" len="med"/>
                     </a:lnB>
-                    <a:noFill/>
+                    <a:solidFill>
+                      <a:srgbClr val="00B050"/>
+                    </a:solidFill>
                   </a:tcPr>
                 </a:tc>
                 <a:tc>
@@ -29791,7 +26998,9 @@
                       <a:headEnd type="none" w="med" len="med"/>
                       <a:tailEnd type="none" w="med" len="med"/>
                     </a:lnB>
-                    <a:noFill/>
+                    <a:solidFill>
+                      <a:srgbClr val="FFC000"/>
+                    </a:solidFill>
                   </a:tcPr>
                 </a:tc>
                 <a:tc>
@@ -29903,7 +27112,9 @@
                       <a:headEnd type="none" w="med" len="med"/>
                       <a:tailEnd type="none" w="med" len="med"/>
                     </a:lnB>
-                    <a:noFill/>
+                    <a:solidFill>
+                      <a:srgbClr val="FFC000"/>
+                    </a:solidFill>
                   </a:tcPr>
                 </a:tc>
                 <a:tc>
@@ -30022,7 +27233,9 @@
                       <a:headEnd type="none" w="med" len="med"/>
                       <a:tailEnd type="none" w="med" len="med"/>
                     </a:lnB>
-                    <a:noFill/>
+                    <a:solidFill>
+                      <a:schemeClr val="bg2"/>
+                    </a:solidFill>
                   </a:tcPr>
                 </a:tc>
                 <a:tc>
@@ -30034,10 +27247,16 @@
                         <a:buNone/>
                       </a:pPr>
                       <a:r>
-                        <a:rPr lang="en-IN" sz="1700">
+                        <a:rPr lang="en-IN" sz="1700" kern="1200" dirty="0">
+                          <a:solidFill>
+                            <a:schemeClr val="tx1"/>
+                          </a:solidFill>
                           <a:effectLst/>
+                          <a:latin typeface="+mn-lt"/>
+                          <a:ea typeface="+mn-ea"/>
+                          <a:cs typeface="+mn-cs"/>
                         </a:rPr>
-                        <a:t>0.726027</a:t>
+                        <a:t>0.73</a:t>
                       </a:r>
                     </a:p>
                   </a:txBody>
@@ -30078,7 +27297,9 @@
                       <a:headEnd type="none" w="med" len="med"/>
                       <a:tailEnd type="none" w="med" len="med"/>
                     </a:lnB>
-                    <a:noFill/>
+                    <a:solidFill>
+                      <a:srgbClr val="00B050"/>
+                    </a:solidFill>
                   </a:tcPr>
                 </a:tc>
                 <a:tc>
@@ -30190,7 +27411,9 @@
                       <a:headEnd type="none" w="med" len="med"/>
                       <a:tailEnd type="none" w="med" len="med"/>
                     </a:lnB>
-                    <a:noFill/>
+                    <a:solidFill>
+                      <a:srgbClr val="00B050"/>
+                    </a:solidFill>
                   </a:tcPr>
                 </a:tc>
                 <a:tc>
@@ -30302,7 +27525,9 @@
                       <a:headEnd type="none" w="med" len="med"/>
                       <a:tailEnd type="none" w="med" len="med"/>
                     </a:lnB>
-                    <a:noFill/>
+                    <a:solidFill>
+                      <a:srgbClr val="00B050"/>
+                    </a:solidFill>
                   </a:tcPr>
                 </a:tc>
                 <a:tc>
@@ -30371,6 +27596,36 @@
           </a:graphicData>
         </a:graphic>
       </p:graphicFrame>
+      <p:pic>
+        <p:nvPicPr>
+          <p:cNvPr id="7" name="Picture 6">
+            <a:extLst>
+              <a:ext uri="{FF2B5EF4-FFF2-40B4-BE49-F238E27FC236}">
+                <a16:creationId xmlns:a16="http://schemas.microsoft.com/office/drawing/2014/main" id="{94A716DE-DD4F-FA96-858C-ECBDA571A7E0}"/>
+              </a:ext>
+            </a:extLst>
+          </p:cNvPr>
+          <p:cNvPicPr>
+            <a:picLocks noChangeAspect="1"/>
+          </p:cNvPicPr>
+          <p:nvPr/>
+        </p:nvPicPr>
+        <p:blipFill>
+          <a:blip r:embed="rId3"/>
+          <a:stretch>
+            <a:fillRect/>
+          </a:stretch>
+        </p:blipFill>
+        <p:spPr>
+          <a:xfrm>
+            <a:off x="9777046" y="16677"/>
+            <a:ext cx="2414954" cy="905606"/>
+          </a:xfrm>
+          <a:prstGeom prst="rect">
+            <a:avLst/>
+          </a:prstGeom>
+        </p:spPr>
+      </p:pic>
     </p:spTree>
     <p:extLst>
       <p:ext uri="{BB962C8B-B14F-4D97-AF65-F5344CB8AC3E}">
@@ -30577,7 +27832,7 @@
         </p:blipFill>
         <p:spPr>
           <a:xfrm>
-            <a:off x="625208" y="670926"/>
+            <a:off x="257331" y="779937"/>
             <a:ext cx="8849269" cy="5858693"/>
           </a:xfrm>
           <a:prstGeom prst="rect">
@@ -30601,8 +27856,8 @@
         </p:nvSpPr>
         <p:spPr>
           <a:xfrm>
-            <a:off x="380999" y="141515"/>
-            <a:ext cx="6566648" cy="692203"/>
+            <a:off x="0" y="87734"/>
+            <a:ext cx="9056077" cy="692203"/>
           </a:xfrm>
           <a:prstGeom prst="rect">
             <a:avLst/>
@@ -30633,12 +27888,46 @@
           </a:lstStyle>
           <a:p>
             <a:r>
-              <a:rPr lang="en-US" dirty="0"/>
-              <a:t>Model Compare Metrics</a:t>
-            </a:r>
-          </a:p>
-        </p:txBody>
-      </p:sp>
+              <a:rPr lang="en-US" dirty="0">
+                <a:solidFill>
+                  <a:srgbClr val="00B0F0"/>
+                </a:solidFill>
+              </a:rPr>
+              <a:t>Model Compare Metrics – Random Forest Vs KNN</a:t>
+            </a:r>
+          </a:p>
+        </p:txBody>
+      </p:sp>
+      <p:pic>
+        <p:nvPicPr>
+          <p:cNvPr id="6" name="Picture 5">
+            <a:extLst>
+              <a:ext uri="{FF2B5EF4-FFF2-40B4-BE49-F238E27FC236}">
+                <a16:creationId xmlns:a16="http://schemas.microsoft.com/office/drawing/2014/main" id="{FB391F6C-80A6-81A2-969D-878CF30D2784}"/>
+              </a:ext>
+            </a:extLst>
+          </p:cNvPr>
+          <p:cNvPicPr>
+            <a:picLocks noChangeAspect="1"/>
+          </p:cNvPicPr>
+          <p:nvPr/>
+        </p:nvPicPr>
+        <p:blipFill>
+          <a:blip r:embed="rId3"/>
+          <a:stretch>
+            <a:fillRect/>
+          </a:stretch>
+        </p:blipFill>
+        <p:spPr>
+          <a:xfrm>
+            <a:off x="9777046" y="0"/>
+            <a:ext cx="2414954" cy="896815"/>
+          </a:xfrm>
+          <a:prstGeom prst="rect">
+            <a:avLst/>
+          </a:prstGeom>
+        </p:spPr>
+      </p:pic>
     </p:spTree>
     <p:extLst>
       <p:ext uri="{BB962C8B-B14F-4D97-AF65-F5344CB8AC3E}">

--- a/cricket_object_detection/Group27-PMLProject.pptx
+++ b/cricket_object_detection/Group27-PMLProject.pptx
@@ -21893,14 +21893,14 @@
           <p:nvPr>
             <p:extLst>
               <p:ext uri="{D42A27DB-BD31-4B8C-83A1-F6EECF244321}">
-                <p14:modId xmlns:p14="http://schemas.microsoft.com/office/powerpoint/2010/main" val="2970285901"/>
+                <p14:modId xmlns:p14="http://schemas.microsoft.com/office/powerpoint/2010/main" val="1023286754"/>
               </p:ext>
             </p:extLst>
           </p:nvPr>
         </p:nvGraphicFramePr>
         <p:xfrm>
           <a:off x="308669" y="2338347"/>
-          <a:ext cx="8328378" cy="4624428"/>
+          <a:ext cx="8328378" cy="5173068"/>
         </p:xfrm>
         <a:graphic>
           <a:graphicData uri="http://schemas.openxmlformats.org/drawingml/2006/table">
@@ -21941,6 +21941,8 @@
                         </a:rPr>
                         <a:t>Group Members</a:t>
                       </a:r>
+                    </a:p>
+                    <a:p>
                       <a:endParaRPr lang="en-IN" sz="3600" dirty="0"/>
                     </a:p>
                     <a:p>
@@ -22639,46 +22641,6 @@
               <a:latin typeface="-apple-system"/>
               <a:cs typeface="+mn-cs"/>
             </a:endParaRPr>
-          </a:p>
-        </p:txBody>
-      </p:sp>
-      <p:sp>
-        <p:nvSpPr>
-          <p:cNvPr id="4" name="Footer Placeholder 3">
-            <a:extLst>
-              <a:ext uri="{FF2B5EF4-FFF2-40B4-BE49-F238E27FC236}">
-                <a16:creationId xmlns:a16="http://schemas.microsoft.com/office/drawing/2014/main" id="{A839B9FB-004B-EE62-D291-83BFE414AC7D}"/>
-              </a:ext>
-            </a:extLst>
-          </p:cNvPr>
-          <p:cNvSpPr>
-            <a:spLocks noGrp="1"/>
-          </p:cNvSpPr>
-          <p:nvPr>
-            <p:ph type="ftr" sz="quarter" idx="15"/>
-          </p:nvPr>
-        </p:nvSpPr>
-        <p:spPr>
-          <a:xfrm>
-            <a:off x="381000" y="6347057"/>
-            <a:ext cx="3200400" cy="365125"/>
-          </a:xfrm>
-        </p:spPr>
-        <p:txBody>
-          <a:bodyPr anchor="ctr">
-            <a:normAutofit/>
-          </a:bodyPr>
-          <a:lstStyle/>
-          <a:p>
-            <a:pPr>
-              <a:spcAft>
-                <a:spcPts val="600"/>
-              </a:spcAft>
-            </a:pPr>
-            <a:r>
-              <a:rPr lang="en-US"/>
-              <a:t>Sample Footer Text</a:t>
-            </a:r>
           </a:p>
         </p:txBody>
       </p:sp>
@@ -24712,17 +24674,33 @@
           <a:lstStyle/>
           <a:p>
             <a:r>
-              <a:rPr lang="en-US" dirty="0"/>
+              <a:rPr lang="en-US" sz="3100" dirty="0">
+                <a:solidFill>
+                  <a:srgbClr val="00B0F0"/>
+                </a:solidFill>
+              </a:rPr>
               <a:t>Checking Data Imbalance on Labels</a:t>
             </a:r>
             <a:br>
-              <a:rPr lang="en-US" dirty="0"/>
+              <a:rPr lang="en-US" dirty="0">
+                <a:solidFill>
+                  <a:srgbClr val="5DACFC"/>
+                </a:solidFill>
+              </a:rPr>
             </a:br>
             <a:br>
-              <a:rPr lang="en-US" dirty="0"/>
+              <a:rPr lang="en-US" dirty="0">
+                <a:solidFill>
+                  <a:srgbClr val="5DACFC"/>
+                </a:solidFill>
+              </a:rPr>
             </a:br>
             <a:br>
-              <a:rPr lang="en-US" dirty="0"/>
+              <a:rPr lang="en-US" dirty="0">
+                <a:solidFill>
+                  <a:srgbClr val="5DACFC"/>
+                </a:solidFill>
+              </a:rPr>
             </a:br>
             <a:r>
               <a:rPr lang="en-US" sz="2000" dirty="0">
